--- a/Lectures/Design-Of-Experiments/doe_overview.pptx
+++ b/Lectures/Design-Of-Experiments/doe_overview.pptx
@@ -5,10 +5,10 @@
     <p:sldMasterId id="2147483648" r:id="rId1"/>
   </p:sldMasterIdLst>
   <p:notesMasterIdLst>
-    <p:notesMasterId r:id="rId23"/>
+    <p:notesMasterId r:id="rId24"/>
   </p:notesMasterIdLst>
   <p:handoutMasterIdLst>
-    <p:handoutMasterId r:id="rId24"/>
+    <p:handoutMasterId r:id="rId25"/>
   </p:handoutMasterIdLst>
   <p:sldIdLst>
     <p:sldId id="473" r:id="rId2"/>
@@ -30,8 +30,9 @@
     <p:sldId id="480" r:id="rId18"/>
     <p:sldId id="391" r:id="rId19"/>
     <p:sldId id="385" r:id="rId20"/>
-    <p:sldId id="271" r:id="rId21"/>
-    <p:sldId id="474" r:id="rId22"/>
+    <p:sldId id="481" r:id="rId21"/>
+    <p:sldId id="271" r:id="rId22"/>
+    <p:sldId id="474" r:id="rId23"/>
   </p:sldIdLst>
   <p:sldSz cx="9144000" cy="6858000" type="screen4x3"/>
   <p:notesSz cx="6858000" cy="9144000"/>
@@ -301,7 +302,7 @@
               <a:pPr>
                 <a:defRPr/>
               </a:pPr>
-              <a:t>11/4/24</a:t>
+              <a:t>11/3/25</a:t>
             </a:fld>
             <a:endParaRPr lang="en-US" altLang="x-none"/>
           </a:p>
@@ -510,7 +511,7 @@
               <a:pPr>
                 <a:defRPr/>
               </a:pPr>
-              <a:t>11/4/24</a:t>
+              <a:t>11/3/25</a:t>
             </a:fld>
             <a:endParaRPr lang="en-US" altLang="x-none"/>
           </a:p>
@@ -1046,6 +1047,153 @@
 </file>
 
 <file path=ppt/notesSlides/notesSlide11.xml><?xml version="1.0" encoding="utf-8"?>
+<p:notes xmlns:a="http://schemas.openxmlformats.org/drawingml/2006/main" xmlns:r="http://schemas.openxmlformats.org/officeDocument/2006/relationships" xmlns:p="http://schemas.openxmlformats.org/presentationml/2006/main">
+  <p:cSld>
+    <p:spTree>
+      <p:nvGrpSpPr>
+        <p:cNvPr id="1" name="">
+          <a:extLst>
+            <a:ext uri="{FF2B5EF4-FFF2-40B4-BE49-F238E27FC236}">
+              <a16:creationId xmlns:a16="http://schemas.microsoft.com/office/drawing/2014/main" id="{2C56748A-D25C-EC62-E926-1BB0BDC6A152}"/>
+            </a:ext>
+          </a:extLst>
+        </p:cNvPr>
+        <p:cNvGrpSpPr/>
+        <p:nvPr/>
+      </p:nvGrpSpPr>
+      <p:grpSpPr>
+        <a:xfrm>
+          <a:off x="0" y="0"/>
+          <a:ext cx="0" cy="0"/>
+          <a:chOff x="0" y="0"/>
+          <a:chExt cx="0" cy="0"/>
+        </a:xfrm>
+      </p:grpSpPr>
+      <p:sp>
+        <p:nvSpPr>
+          <p:cNvPr id="2" name="Slide Image Placeholder 1">
+            <a:extLst>
+              <a:ext uri="{FF2B5EF4-FFF2-40B4-BE49-F238E27FC236}">
+                <a16:creationId xmlns:a16="http://schemas.microsoft.com/office/drawing/2014/main" id="{8E9B2A38-E59D-A9BA-9C93-A98F1104DDA7}"/>
+              </a:ext>
+            </a:extLst>
+          </p:cNvPr>
+          <p:cNvSpPr>
+            <a:spLocks noGrp="1" noRot="1" noChangeAspect="1"/>
+          </p:cNvSpPr>
+          <p:nvPr>
+            <p:ph type="sldImg"/>
+          </p:nvPr>
+        </p:nvSpPr>
+        <p:spPr/>
+      </p:sp>
+      <p:sp>
+        <p:nvSpPr>
+          <p:cNvPr id="3" name="Notes Placeholder 2">
+            <a:extLst>
+              <a:ext uri="{FF2B5EF4-FFF2-40B4-BE49-F238E27FC236}">
+                <a16:creationId xmlns:a16="http://schemas.microsoft.com/office/drawing/2014/main" id="{F084AF57-174E-49E5-2935-CE0E786176F2}"/>
+              </a:ext>
+            </a:extLst>
+          </p:cNvPr>
+          <p:cNvSpPr>
+            <a:spLocks noGrp="1"/>
+          </p:cNvSpPr>
+          <p:nvPr>
+            <p:ph type="body" idx="1"/>
+          </p:nvPr>
+        </p:nvSpPr>
+        <p:spPr/>
+        <p:txBody>
+          <a:bodyPr/>
+          <a:lstStyle/>
+          <a:p>
+            <a:r>
+              <a:rPr lang="en-US" dirty="0"/>
+              <a:t>Mu = 10</a:t>
+            </a:r>
+          </a:p>
+          <a:p>
+            <a:r>
+              <a:rPr lang="en-US" dirty="0"/>
+              <a:t>-1: -5</a:t>
+            </a:r>
+          </a:p>
+          <a:p>
+            <a:r>
+              <a:rPr lang="en-US" dirty="0"/>
+              <a:t>1: 5</a:t>
+            </a:r>
+          </a:p>
+          <a:p>
+            <a:r>
+              <a:rPr lang="en-US" dirty="0"/>
+              <a:t>-1,-1: -2</a:t>
+            </a:r>
+          </a:p>
+          <a:p>
+            <a:r>
+              <a:rPr lang="en-US" dirty="0"/>
+              <a:t>-1,1 &amp; 1, -1: 0</a:t>
+            </a:r>
+          </a:p>
+          <a:p>
+            <a:r>
+              <a:rPr lang="en-US" dirty="0"/>
+              <a:t>1,1: 2</a:t>
+            </a:r>
+          </a:p>
+        </p:txBody>
+      </p:sp>
+      <p:sp>
+        <p:nvSpPr>
+          <p:cNvPr id="4" name="Slide Number Placeholder 3">
+            <a:extLst>
+              <a:ext uri="{FF2B5EF4-FFF2-40B4-BE49-F238E27FC236}">
+                <a16:creationId xmlns:a16="http://schemas.microsoft.com/office/drawing/2014/main" id="{8E3CD77D-EC56-A670-1BFD-8E7C1F952539}"/>
+              </a:ext>
+            </a:extLst>
+          </p:cNvPr>
+          <p:cNvSpPr>
+            <a:spLocks noGrp="1"/>
+          </p:cNvSpPr>
+          <p:nvPr>
+            <p:ph type="sldNum" sz="quarter" idx="5"/>
+          </p:nvPr>
+        </p:nvSpPr>
+        <p:spPr/>
+        <p:txBody>
+          <a:bodyPr/>
+          <a:lstStyle/>
+          <a:p>
+            <a:pPr>
+              <a:defRPr/>
+            </a:pPr>
+            <a:fld id="{1E3608CA-DBCA-4E8F-8DAB-6E1AFAF19782}" type="slidenum">
+              <a:rPr lang="en-US" altLang="x-none" smtClean="0"/>
+              <a:pPr>
+                <a:defRPr/>
+              </a:pPr>
+              <a:t>20</a:t>
+            </a:fld>
+            <a:endParaRPr lang="en-US" altLang="x-none"/>
+          </a:p>
+        </p:txBody>
+      </p:sp>
+    </p:spTree>
+    <p:extLst>
+      <p:ext uri="{BB962C8B-B14F-4D97-AF65-F5344CB8AC3E}">
+        <p14:creationId xmlns:p14="http://schemas.microsoft.com/office/powerpoint/2010/main" val="597109440"/>
+      </p:ext>
+    </p:extLst>
+  </p:cSld>
+  <p:clrMapOvr>
+    <a:masterClrMapping/>
+  </p:clrMapOvr>
+</p:notes>
+</file>
+
+<file path=ppt/notesSlides/notesSlide12.xml><?xml version="1.0" encoding="utf-8"?>
 <p:notes xmlns:a="http://schemas.openxmlformats.org/drawingml/2006/main" xmlns:r="http://schemas.openxmlformats.org/officeDocument/2006/relationships" xmlns:p="http://schemas.openxmlformats.org/presentationml/2006/main" showMasterSp="0" showMasterPhAnim="0">
   <p:cSld>
     <p:spTree>
@@ -1199,7 +1347,7 @@
             </a:pPr>
             <a:fld id="{00000000-1234-1234-1234-123412341234}" type="slidenum">
               <a:rPr lang="en-US"/>
-              <a:t>20</a:t>
+              <a:t>21</a:t>
             </a:fld>
             <a:endParaRPr/>
           </a:p>
@@ -6233,64 +6381,66 @@
           <a:p>
             <a:r>
               <a:rPr lang="en-US" dirty="0"/>
-              <a:t>Joseph L. </a:t>
+              <a:t>Joseph L. Hellerstein</a:t>
             </a:r>
             <a:r>
-              <a:rPr lang="en-US" dirty="0" err="1"/>
-              <a:t>Hellerstein</a:t>
+              <a:rPr lang="en-US" baseline="30000" dirty="0"/>
+              <a:t>1,2,3</a:t>
             </a:r>
-            <a:r>
-              <a:rPr lang="en-US" dirty="0"/>
-              <a:t>*</a:t>
-            </a:r>
+            <a:endParaRPr lang="en-US" dirty="0"/>
           </a:p>
           <a:p>
             <a:r>
               <a:rPr lang="en-US" dirty="0"/>
-              <a:t>Herbert </a:t>
+              <a:t>Herbert Sauro</a:t>
             </a:r>
             <a:r>
-              <a:rPr lang="en-US" dirty="0" err="1"/>
-              <a:t>Sauro</a:t>
+              <a:rPr lang="en-US" baseline="30000" dirty="0"/>
+              <a:t>1,2</a:t>
             </a:r>
-            <a:r>
-              <a:rPr lang="en-US" dirty="0"/>
-              <a:t>**</a:t>
-            </a:r>
+            <a:endParaRPr lang="en-US" dirty="0"/>
           </a:p>
           <a:p>
             <a:r>
               <a:rPr lang="en-US" sz="2000" dirty="0"/>
-              <a:t>October, 2023</a:t>
+              <a:t>November, 2025</a:t>
             </a:r>
           </a:p>
           <a:p>
             <a:endParaRPr lang="en-US" dirty="0"/>
           </a:p>
           <a:p>
+            <a:pPr algn="l"/>
             <a:r>
-              <a:rPr lang="en-US" sz="2800" dirty="0"/>
-              <a:t>*</a:t>
+              <a:rPr lang="en-US" sz="1800" baseline="30000" dirty="0"/>
+              <a:t>1</a:t>
             </a:r>
             <a:r>
-              <a:rPr lang="en-US" sz="2800" dirty="0" err="1"/>
-              <a:t>eScience</a:t>
-            </a:r>
-            <a:r>
-              <a:rPr lang="en-US" sz="2800" dirty="0"/>
-              <a:t> Institute, Computer Science &amp; Engineering</a:t>
+              <a:rPr lang="en-US" sz="1800" dirty="0"/>
+              <a:t>eScience Institute</a:t>
             </a:r>
           </a:p>
           <a:p>
+            <a:pPr algn="l"/>
             <a:r>
-              <a:rPr lang="en-US" sz="2800" dirty="0"/>
-              <a:t>**</a:t>
+              <a:rPr lang="en-US" sz="1800" baseline="30000" dirty="0"/>
+              <a:t>2</a:t>
             </a:r>
             <a:r>
-              <a:rPr lang="en-US" sz="2800" dirty="0" err="1"/>
+              <a:rPr lang="en-US" sz="1800" dirty="0"/>
+              <a:t>Computer Science &amp; Engineering</a:t>
+            </a:r>
+          </a:p>
+          <a:p>
+            <a:pPr algn="l"/>
+            <a:r>
+              <a:rPr lang="en-US" sz="1800" baseline="30000" dirty="0"/>
+              <a:t>3</a:t>
+            </a:r>
+            <a:r>
+              <a:rPr lang="en-US" sz="1800" dirty="0"/>
               <a:t>BioEngineering</a:t>
             </a:r>
-            <a:endParaRPr lang="en-US" sz="2800" dirty="0"/>
           </a:p>
         </p:txBody>
       </p:sp>
@@ -11823,8 +11973,8 @@
         </p:nvSpPr>
         <p:spPr>
           <a:xfrm>
-            <a:off x="3262983" y="2388933"/>
-            <a:ext cx="1921759" cy="553998"/>
+            <a:off x="3039877" y="2388933"/>
+            <a:ext cx="2144865" cy="553998"/>
           </a:xfrm>
           <a:prstGeom prst="rect">
             <a:avLst/>
@@ -11853,7 +12003,7 @@
             </a:r>
             <a:r>
               <a:rPr lang="en-US" dirty="0"/>
-              <a:t> </a:t>
+              <a:t> (baseline)</a:t>
             </a:r>
           </a:p>
         </p:txBody>
@@ -21230,8 +21380,8 @@
           </p:sp>
         </mc:Fallback>
       </mc:AlternateContent>
-      <mc:AlternateContent xmlns:mc="http://schemas.openxmlformats.org/markup-compatibility/2006">
-        <mc:Choice xmlns:a14="http://schemas.microsoft.com/office/drawing/2010/main" Requires="a14">
+      <mc:AlternateContent xmlns:mc="http://schemas.openxmlformats.org/markup-compatibility/2006" xmlns:a14="http://schemas.microsoft.com/office/drawing/2010/main">
+        <mc:Choice Requires="a14">
           <p:sp>
             <p:nvSpPr>
               <p:cNvPr id="14" name="TextBox 13">
@@ -21382,7 +21532,7 @@
             </p:txBody>
           </p:sp>
         </mc:Choice>
-        <mc:Fallback>
+        <mc:Fallback xmlns="">
           <p:sp>
             <p:nvSpPr>
               <p:cNvPr id="14" name="TextBox 13">
@@ -29058,6 +29208,4116 @@
   <p:cSld>
     <p:spTree>
       <p:nvGrpSpPr>
+        <p:cNvPr id="1" name="">
+          <a:extLst>
+            <a:ext uri="{FF2B5EF4-FFF2-40B4-BE49-F238E27FC236}">
+              <a16:creationId xmlns:a16="http://schemas.microsoft.com/office/drawing/2014/main" id="{F8DBC60B-3CF2-72B2-694F-2A00E857D146}"/>
+            </a:ext>
+          </a:extLst>
+        </p:cNvPr>
+        <p:cNvGrpSpPr/>
+        <p:nvPr/>
+      </p:nvGrpSpPr>
+      <p:grpSpPr>
+        <a:xfrm>
+          <a:off x="0" y="0"/>
+          <a:ext cx="0" cy="0"/>
+          <a:chOff x="0" y="0"/>
+          <a:chExt cx="0" cy="0"/>
+        </a:xfrm>
+      </p:grpSpPr>
+      <mc:AlternateContent xmlns:mc="http://schemas.openxmlformats.org/markup-compatibility/2006">
+        <mc:Choice xmlns:a14="http://schemas.microsoft.com/office/drawing/2010/main" Requires="a14">
+          <p:sp>
+            <p:nvSpPr>
+              <p:cNvPr id="2" name="Title 1">
+                <a:extLst>
+                  <a:ext uri="{FF2B5EF4-FFF2-40B4-BE49-F238E27FC236}">
+                    <a16:creationId xmlns:a16="http://schemas.microsoft.com/office/drawing/2014/main" id="{7A330E13-A2DE-4817-EF37-62860A16D31D}"/>
+                  </a:ext>
+                </a:extLst>
+              </p:cNvPr>
+              <p:cNvSpPr>
+                <a:spLocks noGrp="1"/>
+              </p:cNvSpPr>
+              <p:nvPr>
+                <p:ph type="title"/>
+              </p:nvPr>
+            </p:nvSpPr>
+            <p:spPr>
+              <a:xfrm>
+                <a:off x="457199" y="381000"/>
+                <a:ext cx="5239511" cy="838200"/>
+              </a:xfrm>
+            </p:spPr>
+            <p:txBody>
+              <a:bodyPr/>
+              <a:lstStyle/>
+              <a:p>
+                <a:r>
+                  <a:rPr lang="en-US" dirty="0"/>
+                  <a:t>Exercise: Find </a:t>
+                </a:r>
+                <a14:m>
+                  <m:oMath xmlns:m="http://schemas.openxmlformats.org/officeDocument/2006/math">
+                    <m:r>
+                      <a:rPr lang="en-US" b="1" i="1" smtClean="0">
+                        <a:latin typeface="Cambria Math" panose="02040503050406030204" pitchFamily="18" charset="0"/>
+                      </a:rPr>
+                      <m:t>𝝁</m:t>
+                    </m:r>
+                    <m:r>
+                      <a:rPr lang="en-US" b="1" i="1" smtClean="0">
+                        <a:latin typeface="Cambria Math" panose="02040503050406030204" pitchFamily="18" charset="0"/>
+                      </a:rPr>
+                      <m:t>, </m:t>
+                    </m:r>
+                    <m:sSub>
+                      <m:sSubPr>
+                        <m:ctrlPr>
+                          <a:rPr lang="en-US" b="1" i="1" smtClean="0">
+                            <a:latin typeface="Cambria Math" panose="02040503050406030204" pitchFamily="18" charset="0"/>
+                          </a:rPr>
+                        </m:ctrlPr>
+                      </m:sSubPr>
+                      <m:e>
+                        <m:r>
+                          <a:rPr lang="en-US" b="1" i="1" smtClean="0">
+                            <a:latin typeface="Cambria Math" panose="02040503050406030204" pitchFamily="18" charset="0"/>
+                          </a:rPr>
+                          <m:t>𝜶</m:t>
+                        </m:r>
+                      </m:e>
+                      <m:sub>
+                        <m:r>
+                          <a:rPr lang="en-US" b="1" i="1" smtClean="0">
+                            <a:latin typeface="Cambria Math" panose="02040503050406030204" pitchFamily="18" charset="0"/>
+                          </a:rPr>
+                          <m:t>𝒊</m:t>
+                        </m:r>
+                        <m:r>
+                          <a:rPr lang="en-US" b="1" i="1" smtClean="0">
+                            <a:latin typeface="Cambria Math" panose="02040503050406030204" pitchFamily="18" charset="0"/>
+                          </a:rPr>
+                          <m:t>,</m:t>
+                        </m:r>
+                        <m:sSub>
+                          <m:sSubPr>
+                            <m:ctrlPr>
+                              <a:rPr lang="en-US" b="1" i="1" smtClean="0">
+                                <a:latin typeface="Cambria Math" panose="02040503050406030204" pitchFamily="18" charset="0"/>
+                              </a:rPr>
+                            </m:ctrlPr>
+                          </m:sSubPr>
+                          <m:e>
+                            <m:r>
+                              <a:rPr lang="en-US" b="1" i="1" smtClean="0">
+                                <a:latin typeface="Cambria Math" panose="02040503050406030204" pitchFamily="18" charset="0"/>
+                              </a:rPr>
+                              <m:t>𝒌</m:t>
+                            </m:r>
+                          </m:e>
+                          <m:sub>
+                            <m:r>
+                              <a:rPr lang="en-US" b="1" i="1" smtClean="0">
+                                <a:latin typeface="Cambria Math" panose="02040503050406030204" pitchFamily="18" charset="0"/>
+                              </a:rPr>
+                              <m:t>𝒊</m:t>
+                            </m:r>
+                          </m:sub>
+                        </m:sSub>
+                      </m:sub>
+                    </m:sSub>
+                    <m:r>
+                      <a:rPr lang="en-US" b="1" i="1" smtClean="0">
+                        <a:latin typeface="Cambria Math" panose="02040503050406030204" pitchFamily="18" charset="0"/>
+                      </a:rPr>
+                      <m:t> </m:t>
+                    </m:r>
+                  </m:oMath>
+                </a14:m>
+                <a:r>
+                  <a:rPr lang="en-US" dirty="0"/>
+                  <a:t>for 1WD</a:t>
+                </a:r>
+              </a:p>
+            </p:txBody>
+          </p:sp>
+        </mc:Choice>
+        <mc:Fallback>
+          <p:sp>
+            <p:nvSpPr>
+              <p:cNvPr id="2" name="Title 1">
+                <a:extLst>
+                  <a:ext uri="{FF2B5EF4-FFF2-40B4-BE49-F238E27FC236}">
+                    <a16:creationId xmlns:a16="http://schemas.microsoft.com/office/drawing/2014/main" id="{7A330E13-A2DE-4817-EF37-62860A16D31D}"/>
+                  </a:ext>
+                </a:extLst>
+              </p:cNvPr>
+              <p:cNvSpPr>
+                <a:spLocks noGrp="1" noRot="1" noChangeAspect="1" noMove="1" noResize="1" noEditPoints="1" noAdjustHandles="1" noChangeArrowheads="1" noChangeShapeType="1" noTextEdit="1"/>
+              </p:cNvSpPr>
+              <p:nvPr>
+                <p:ph type="title"/>
+              </p:nvPr>
+            </p:nvSpPr>
+            <p:spPr>
+              <a:xfrm>
+                <a:off x="457199" y="381000"/>
+                <a:ext cx="5239511" cy="838200"/>
+              </a:xfrm>
+              <a:blipFill>
+                <a:blip r:embed="rId3"/>
+                <a:stretch>
+                  <a:fillRect l="-2906" t="-9091" r="-2663"/>
+                </a:stretch>
+              </a:blipFill>
+            </p:spPr>
+            <p:txBody>
+              <a:bodyPr/>
+              <a:lstStyle/>
+              <a:p>
+                <a:r>
+                  <a:rPr lang="en-US">
+                    <a:noFill/>
+                  </a:rPr>
+                  <a:t> </a:t>
+                </a:r>
+              </a:p>
+            </p:txBody>
+          </p:sp>
+        </mc:Fallback>
+      </mc:AlternateContent>
+      <mc:AlternateContent xmlns:mc="http://schemas.openxmlformats.org/markup-compatibility/2006">
+        <mc:Choice xmlns:a14="http://schemas.microsoft.com/office/drawing/2010/main" Requires="a14">
+          <p:sp>
+            <p:nvSpPr>
+              <p:cNvPr id="3" name="Content Placeholder 2">
+                <a:extLst>
+                  <a:ext uri="{FF2B5EF4-FFF2-40B4-BE49-F238E27FC236}">
+                    <a16:creationId xmlns:a16="http://schemas.microsoft.com/office/drawing/2014/main" id="{FA8730BB-F8AD-BE0C-8F2A-92E1F8B53515}"/>
+                  </a:ext>
+                </a:extLst>
+              </p:cNvPr>
+              <p:cNvSpPr>
+                <a:spLocks noGrp="1"/>
+              </p:cNvSpPr>
+              <p:nvPr>
+                <p:ph idx="1"/>
+              </p:nvPr>
+            </p:nvSpPr>
+            <p:spPr>
+              <a:xfrm>
+                <a:off x="258868" y="2741926"/>
+                <a:ext cx="4643069" cy="1211238"/>
+              </a:xfrm>
+            </p:spPr>
+            <p:txBody>
+              <a:bodyPr/>
+              <a:lstStyle/>
+              <a:p>
+                <a:pPr marL="0" indent="0">
+                  <a:buNone/>
+                </a:pPr>
+                <a14:m>
+                  <m:oMathPara xmlns:m="http://schemas.openxmlformats.org/officeDocument/2006/math">
+                    <m:oMathParaPr>
+                      <m:jc m:val="centerGroup"/>
+                    </m:oMathParaPr>
+                    <m:oMath xmlns:m="http://schemas.openxmlformats.org/officeDocument/2006/math">
+                      <m:r>
+                        <a:rPr lang="en-US" sz="2000" b="0" i="1" smtClean="0">
+                          <a:latin typeface="Cambria Math" panose="02040503050406030204" pitchFamily="18" charset="0"/>
+                        </a:rPr>
+                        <m:t>𝜇</m:t>
+                      </m:r>
+                    </m:oMath>
+                  </m:oMathPara>
+                </a14:m>
+                <a:endParaRPr lang="en-US" sz="2000" b="0" i="1" dirty="0">
+                  <a:latin typeface="Cambria Math" panose="02040503050406030204" pitchFamily="18" charset="0"/>
+                </a:endParaRPr>
+              </a:p>
+              <a:p>
+                <a14:m>
+                  <m:oMath xmlns:m="http://schemas.openxmlformats.org/officeDocument/2006/math">
+                    <m:r>
+                      <a:rPr lang="en-US" sz="2000" b="0" i="1" smtClean="0">
+                        <a:latin typeface="Cambria Math" panose="02040503050406030204" pitchFamily="18" charset="0"/>
+                      </a:rPr>
+                      <m:t>𝑦</m:t>
+                    </m:r>
+                    <m:r>
+                      <a:rPr lang="en-US" sz="2000" b="0" i="1" smtClean="0">
+                        <a:latin typeface="Cambria Math" panose="02040503050406030204" pitchFamily="18" charset="0"/>
+                      </a:rPr>
+                      <m:t>=10, </m:t>
+                    </m:r>
+                    <m:r>
+                      <a:rPr lang="en-US" sz="2000" b="0" i="1" smtClean="0">
+                        <a:latin typeface="Cambria Math" panose="02040503050406030204" pitchFamily="18" charset="0"/>
+                      </a:rPr>
+                      <m:t>𝛼</m:t>
+                    </m:r>
+                    <m:r>
+                      <a:rPr lang="en-US" sz="2000" b="0" i="1" smtClean="0">
+                        <a:latin typeface="Cambria Math" panose="02040503050406030204" pitchFamily="18" charset="0"/>
+                      </a:rPr>
+                      <m:t>=0</m:t>
+                    </m:r>
+                  </m:oMath>
+                </a14:m>
+                <a:endParaRPr lang="en-US" sz="2000" b="0" i="1" dirty="0">
+                  <a:latin typeface="Cambria Math" panose="02040503050406030204" pitchFamily="18" charset="0"/>
+                </a:endParaRPr>
+              </a:p>
+              <a:p>
+                <a14:m>
+                  <m:oMath xmlns:m="http://schemas.openxmlformats.org/officeDocument/2006/math">
+                    <m:r>
+                      <a:rPr lang="en-US" sz="2000" b="0" i="1" smtClean="0">
+                        <a:latin typeface="Cambria Math" panose="02040503050406030204" pitchFamily="18" charset="0"/>
+                      </a:rPr>
+                      <m:t>𝑢</m:t>
+                    </m:r>
+                    <m:r>
+                      <a:rPr lang="en-US" sz="2000" b="0" i="1" smtClean="0">
+                        <a:latin typeface="Cambria Math" panose="02040503050406030204" pitchFamily="18" charset="0"/>
+                      </a:rPr>
+                      <m:t>=</m:t>
+                    </m:r>
+                    <m:r>
+                      <a:rPr lang="en-US" sz="2000" b="0" i="1" smtClean="0">
+                        <a:latin typeface="Cambria Math" panose="02040503050406030204" pitchFamily="18" charset="0"/>
+                      </a:rPr>
+                      <m:t>𝑦</m:t>
+                    </m:r>
+                  </m:oMath>
+                </a14:m>
+                <a:endParaRPr lang="en-US" sz="2000" b="0" dirty="0"/>
+              </a:p>
+            </p:txBody>
+          </p:sp>
+        </mc:Choice>
+        <mc:Fallback>
+          <p:sp>
+            <p:nvSpPr>
+              <p:cNvPr id="3" name="Content Placeholder 2">
+                <a:extLst>
+                  <a:ext uri="{FF2B5EF4-FFF2-40B4-BE49-F238E27FC236}">
+                    <a16:creationId xmlns:a16="http://schemas.microsoft.com/office/drawing/2014/main" id="{FA8730BB-F8AD-BE0C-8F2A-92E1F8B53515}"/>
+                  </a:ext>
+                </a:extLst>
+              </p:cNvPr>
+              <p:cNvSpPr>
+                <a:spLocks noGrp="1" noRot="1" noChangeAspect="1" noMove="1" noResize="1" noEditPoints="1" noAdjustHandles="1" noChangeArrowheads="1" noChangeShapeType="1" noTextEdit="1"/>
+              </p:cNvSpPr>
+              <p:nvPr>
+                <p:ph idx="1"/>
+              </p:nvPr>
+            </p:nvSpPr>
+            <p:spPr>
+              <a:xfrm>
+                <a:off x="258868" y="2741926"/>
+                <a:ext cx="4643069" cy="1211238"/>
+              </a:xfrm>
+              <a:blipFill>
+                <a:blip r:embed="rId4"/>
+                <a:stretch>
+                  <a:fillRect l="-1093"/>
+                </a:stretch>
+              </a:blipFill>
+            </p:spPr>
+            <p:txBody>
+              <a:bodyPr/>
+              <a:lstStyle/>
+              <a:p>
+                <a:r>
+                  <a:rPr lang="en-US">
+                    <a:noFill/>
+                  </a:rPr>
+                  <a:t> </a:t>
+                </a:r>
+              </a:p>
+            </p:txBody>
+          </p:sp>
+        </mc:Fallback>
+      </mc:AlternateContent>
+      <p:sp>
+        <p:nvSpPr>
+          <p:cNvPr id="4" name="Slide Number Placeholder 3">
+            <a:extLst>
+              <a:ext uri="{FF2B5EF4-FFF2-40B4-BE49-F238E27FC236}">
+                <a16:creationId xmlns:a16="http://schemas.microsoft.com/office/drawing/2014/main" id="{435BCF55-0B73-20E8-0EF1-5441D4709352}"/>
+              </a:ext>
+            </a:extLst>
+          </p:cNvPr>
+          <p:cNvSpPr>
+            <a:spLocks noGrp="1"/>
+          </p:cNvSpPr>
+          <p:nvPr>
+            <p:ph type="sldNum" sz="quarter" idx="11"/>
+          </p:nvPr>
+        </p:nvSpPr>
+        <p:spPr/>
+        <p:txBody>
+          <a:bodyPr/>
+          <a:lstStyle/>
+          <a:p>
+            <a:pPr>
+              <a:defRPr/>
+            </a:pPr>
+            <a:fld id="{3EF4E9CC-9D91-476E-91FD-5BEEC1642931}" type="slidenum">
+              <a:rPr lang="en-US" altLang="x-none" smtClean="0"/>
+              <a:pPr>
+                <a:defRPr/>
+              </a:pPr>
+              <a:t>20</a:t>
+            </a:fld>
+            <a:endParaRPr lang="en-US" altLang="x-none"/>
+          </a:p>
+        </p:txBody>
+      </p:sp>
+      <p:sp>
+        <p:nvSpPr>
+          <p:cNvPr id="6" name="Rectangle 5">
+            <a:extLst>
+              <a:ext uri="{FF2B5EF4-FFF2-40B4-BE49-F238E27FC236}">
+                <a16:creationId xmlns:a16="http://schemas.microsoft.com/office/drawing/2014/main" id="{230E2944-7EC3-35B7-4167-AD854663140E}"/>
+              </a:ext>
+            </a:extLst>
+          </p:cNvPr>
+          <p:cNvSpPr/>
+          <p:nvPr/>
+        </p:nvSpPr>
+        <p:spPr>
+          <a:xfrm>
+            <a:off x="436150" y="676729"/>
+            <a:ext cx="4572000" cy="1015663"/>
+          </a:xfrm>
+          <a:prstGeom prst="rect">
+            <a:avLst/>
+          </a:prstGeom>
+        </p:spPr>
+        <p:txBody>
+          <a:bodyPr>
+            <a:spAutoFit/>
+          </a:bodyPr>
+          <a:lstStyle/>
+          <a:p>
+            <a:endParaRPr lang="en-US" sz="2000" dirty="0"/>
+          </a:p>
+          <a:p>
+            <a:r>
+              <a:rPr lang="en-US" sz="2000" dirty="0"/>
+              <a:t>Factors: F1, F2, F3</a:t>
+            </a:r>
+          </a:p>
+          <a:p>
+            <a:r>
+              <a:rPr lang="en-US" sz="2000" dirty="0"/>
+              <a:t>Level values: -1, 0, 1 (0 is baseline)</a:t>
+            </a:r>
+          </a:p>
+        </p:txBody>
+      </p:sp>
+      <mc:AlternateContent xmlns:mc="http://schemas.openxmlformats.org/markup-compatibility/2006">
+        <mc:Choice xmlns:a14="http://schemas.microsoft.com/office/drawing/2010/main" Requires="a14">
+          <p:sp>
+            <p:nvSpPr>
+              <p:cNvPr id="7" name="TextBox 6">
+                <a:extLst>
+                  <a:ext uri="{FF2B5EF4-FFF2-40B4-BE49-F238E27FC236}">
+                    <a16:creationId xmlns:a16="http://schemas.microsoft.com/office/drawing/2014/main" id="{F39DA73F-7375-C94C-A236-3DA41CBC3327}"/>
+                  </a:ext>
+                </a:extLst>
+              </p:cNvPr>
+              <p:cNvSpPr txBox="1"/>
+              <p:nvPr/>
+            </p:nvSpPr>
+            <p:spPr>
+              <a:xfrm>
+                <a:off x="871382" y="2066519"/>
+                <a:ext cx="2439321" cy="494879"/>
+              </a:xfrm>
+              <a:prstGeom prst="rect">
+                <a:avLst/>
+              </a:prstGeom>
+              <a:noFill/>
+              <a:ln w="38100">
+                <a:noFill/>
+              </a:ln>
+            </p:spPr>
+            <p:txBody>
+              <a:bodyPr wrap="none" rtlCol="0">
+                <a:spAutoFit/>
+              </a:bodyPr>
+              <a:lstStyle/>
+              <a:p>
+                <a:pPr/>
+                <a14:m>
+                  <m:oMathPara xmlns:m="http://schemas.openxmlformats.org/officeDocument/2006/math">
+                    <m:oMathParaPr>
+                      <m:jc m:val="centerGroup"/>
+                    </m:oMathParaPr>
+                    <m:oMath xmlns:m="http://schemas.openxmlformats.org/officeDocument/2006/math">
+                      <m:sSub>
+                        <m:sSubPr>
+                          <m:ctrlPr>
+                            <a:rPr lang="en-US" sz="2400" b="1" i="1" smtClean="0">
+                              <a:latin typeface="Cambria Math" panose="02040503050406030204" pitchFamily="18" charset="0"/>
+                            </a:rPr>
+                          </m:ctrlPr>
+                        </m:sSubPr>
+                        <m:e>
+                          <m:r>
+                            <a:rPr lang="en-US" sz="2400" b="1" i="1" smtClean="0">
+                              <a:latin typeface="Cambria Math" panose="02040503050406030204" pitchFamily="18" charset="0"/>
+                            </a:rPr>
+                            <m:t>𝒚</m:t>
+                          </m:r>
+                        </m:e>
+                        <m:sub>
+                          <m:r>
+                            <a:rPr lang="en-US" sz="2400" b="1" i="1" smtClean="0">
+                              <a:latin typeface="Cambria Math" panose="02040503050406030204" pitchFamily="18" charset="0"/>
+                            </a:rPr>
+                            <m:t>𝒊</m:t>
+                          </m:r>
+                          <m:r>
+                            <a:rPr lang="en-US" sz="2400" b="1" i="1" smtClean="0">
+                              <a:latin typeface="Cambria Math" panose="02040503050406030204" pitchFamily="18" charset="0"/>
+                            </a:rPr>
+                            <m:t>, </m:t>
+                          </m:r>
+                          <m:sSub>
+                            <m:sSubPr>
+                              <m:ctrlPr>
+                                <a:rPr lang="en-US" sz="2400" b="1" i="1" smtClean="0">
+                                  <a:latin typeface="Cambria Math" panose="02040503050406030204" pitchFamily="18" charset="0"/>
+                                </a:rPr>
+                              </m:ctrlPr>
+                            </m:sSubPr>
+                            <m:e>
+                              <m:r>
+                                <a:rPr lang="en-US" sz="2400" b="1" i="1" smtClean="0">
+                                  <a:latin typeface="Cambria Math" panose="02040503050406030204" pitchFamily="18" charset="0"/>
+                                </a:rPr>
+                                <m:t>𝒌</m:t>
+                              </m:r>
+                            </m:e>
+                            <m:sub>
+                              <m:r>
+                                <a:rPr lang="en-US" sz="2400" b="1" i="1" smtClean="0">
+                                  <a:latin typeface="Cambria Math" panose="02040503050406030204" pitchFamily="18" charset="0"/>
+                                </a:rPr>
+                                <m:t>𝒊</m:t>
+                              </m:r>
+                            </m:sub>
+                          </m:sSub>
+                          <m:r>
+                            <a:rPr lang="en-US" sz="2400" b="1" i="1" smtClean="0">
+                              <a:latin typeface="Cambria Math" panose="02040503050406030204" pitchFamily="18" charset="0"/>
+                            </a:rPr>
+                            <m:t> </m:t>
+                          </m:r>
+                        </m:sub>
+                      </m:sSub>
+                      <m:r>
+                        <a:rPr lang="en-US" sz="2400" b="1" i="1" smtClean="0">
+                          <a:latin typeface="Cambria Math" panose="02040503050406030204" pitchFamily="18" charset="0"/>
+                        </a:rPr>
+                        <m:t>=</m:t>
+                      </m:r>
+                      <m:r>
+                        <a:rPr lang="en-US" sz="2400" b="1" i="1" smtClean="0">
+                          <a:latin typeface="Cambria Math" panose="02040503050406030204" pitchFamily="18" charset="0"/>
+                        </a:rPr>
+                        <m:t>𝝁</m:t>
+                      </m:r>
+                      <m:r>
+                        <a:rPr lang="en-US" sz="2400" b="1" i="1" smtClean="0">
+                          <a:latin typeface="Cambria Math" panose="02040503050406030204" pitchFamily="18" charset="0"/>
+                        </a:rPr>
+                        <m:t>+</m:t>
+                      </m:r>
+                      <m:sSub>
+                        <m:sSubPr>
+                          <m:ctrlPr>
+                            <a:rPr lang="en-US" sz="2400" b="1" i="1" smtClean="0">
+                              <a:latin typeface="Cambria Math" panose="02040503050406030204" pitchFamily="18" charset="0"/>
+                            </a:rPr>
+                          </m:ctrlPr>
+                        </m:sSubPr>
+                        <m:e>
+                          <m:r>
+                            <a:rPr lang="en-US" sz="2400" b="1" i="1" smtClean="0">
+                              <a:latin typeface="Cambria Math" panose="02040503050406030204" pitchFamily="18" charset="0"/>
+                            </a:rPr>
+                            <m:t>𝜶</m:t>
+                          </m:r>
+                        </m:e>
+                        <m:sub>
+                          <m:r>
+                            <a:rPr lang="en-US" sz="2400" b="1" i="1" smtClean="0">
+                              <a:latin typeface="Cambria Math" panose="02040503050406030204" pitchFamily="18" charset="0"/>
+                            </a:rPr>
+                            <m:t>𝒊</m:t>
+                          </m:r>
+                          <m:r>
+                            <a:rPr lang="en-US" sz="2400" b="1" i="1" smtClean="0">
+                              <a:latin typeface="Cambria Math" panose="02040503050406030204" pitchFamily="18" charset="0"/>
+                            </a:rPr>
+                            <m:t>,</m:t>
+                          </m:r>
+                          <m:sSub>
+                            <m:sSubPr>
+                              <m:ctrlPr>
+                                <a:rPr lang="en-US" sz="2400" b="1" i="1" smtClean="0">
+                                  <a:latin typeface="Cambria Math" panose="02040503050406030204" pitchFamily="18" charset="0"/>
+                                </a:rPr>
+                              </m:ctrlPr>
+                            </m:sSubPr>
+                            <m:e>
+                              <m:r>
+                                <a:rPr lang="en-US" sz="2400" b="1" i="1" smtClean="0">
+                                  <a:latin typeface="Cambria Math" panose="02040503050406030204" pitchFamily="18" charset="0"/>
+                                </a:rPr>
+                                <m:t>𝒌</m:t>
+                              </m:r>
+                            </m:e>
+                            <m:sub>
+                              <m:r>
+                                <a:rPr lang="en-US" sz="2400" b="1" i="1" smtClean="0">
+                                  <a:latin typeface="Cambria Math" panose="02040503050406030204" pitchFamily="18" charset="0"/>
+                                </a:rPr>
+                                <m:t>𝒊</m:t>
+                              </m:r>
+                            </m:sub>
+                          </m:sSub>
+                          <m:r>
+                            <a:rPr lang="en-US" sz="2400" b="1" i="1" smtClean="0">
+                              <a:latin typeface="Cambria Math" panose="02040503050406030204" pitchFamily="18" charset="0"/>
+                            </a:rPr>
+                            <m:t> </m:t>
+                          </m:r>
+                        </m:sub>
+                      </m:sSub>
+                    </m:oMath>
+                  </m:oMathPara>
+                </a14:m>
+                <a:endParaRPr lang="en-US" sz="2400" b="1" dirty="0"/>
+              </a:p>
+            </p:txBody>
+          </p:sp>
+        </mc:Choice>
+        <mc:Fallback>
+          <p:sp>
+            <p:nvSpPr>
+              <p:cNvPr id="7" name="TextBox 6">
+                <a:extLst>
+                  <a:ext uri="{FF2B5EF4-FFF2-40B4-BE49-F238E27FC236}">
+                    <a16:creationId xmlns:a16="http://schemas.microsoft.com/office/drawing/2014/main" id="{F39DA73F-7375-C94C-A236-3DA41CBC3327}"/>
+                  </a:ext>
+                </a:extLst>
+              </p:cNvPr>
+              <p:cNvSpPr txBox="1">
+                <a:spLocks noRot="1" noChangeAspect="1" noMove="1" noResize="1" noEditPoints="1" noAdjustHandles="1" noChangeArrowheads="1" noChangeShapeType="1" noTextEdit="1"/>
+              </p:cNvSpPr>
+              <p:nvPr/>
+            </p:nvSpPr>
+            <p:spPr>
+              <a:xfrm>
+                <a:off x="871382" y="2066519"/>
+                <a:ext cx="2439321" cy="494879"/>
+              </a:xfrm>
+              <a:prstGeom prst="rect">
+                <a:avLst/>
+              </a:prstGeom>
+              <a:blipFill>
+                <a:blip r:embed="rId5"/>
+                <a:stretch>
+                  <a:fillRect b="-15000"/>
+                </a:stretch>
+              </a:blipFill>
+              <a:ln w="38100">
+                <a:noFill/>
+              </a:ln>
+            </p:spPr>
+            <p:txBody>
+              <a:bodyPr/>
+              <a:lstStyle/>
+              <a:p>
+                <a:r>
+                  <a:rPr lang="en-US">
+                    <a:noFill/>
+                  </a:rPr>
+                  <a:t> </a:t>
+                </a:r>
+              </a:p>
+            </p:txBody>
+          </p:sp>
+        </mc:Fallback>
+      </mc:AlternateContent>
+      <mc:AlternateContent xmlns:mc="http://schemas.openxmlformats.org/markup-compatibility/2006">
+        <mc:Choice xmlns:a14="http://schemas.microsoft.com/office/drawing/2010/main" Requires="a14">
+          <p:sp>
+            <p:nvSpPr>
+              <p:cNvPr id="9" name="TextBox 8">
+                <a:extLst>
+                  <a:ext uri="{FF2B5EF4-FFF2-40B4-BE49-F238E27FC236}">
+                    <a16:creationId xmlns:a16="http://schemas.microsoft.com/office/drawing/2014/main" id="{4F8B46BC-FB90-20B2-4FB3-90378D06A5FE}"/>
+                  </a:ext>
+                </a:extLst>
+              </p:cNvPr>
+              <p:cNvSpPr txBox="1"/>
+              <p:nvPr/>
+            </p:nvSpPr>
+            <p:spPr>
+              <a:xfrm>
+                <a:off x="-123179" y="4169489"/>
+                <a:ext cx="4992255" cy="1704249"/>
+              </a:xfrm>
+              <a:prstGeom prst="rect">
+                <a:avLst/>
+              </a:prstGeom>
+              <a:noFill/>
+            </p:spPr>
+            <p:txBody>
+              <a:bodyPr wrap="square">
+                <a:spAutoFit/>
+              </a:bodyPr>
+              <a:lstStyle/>
+              <a:p>
+                <a:pPr lvl="1"/>
+                <a14:m>
+                  <m:oMath xmlns:m="http://schemas.openxmlformats.org/officeDocument/2006/math">
+                    <m:sSub>
+                      <m:sSubPr>
+                        <m:ctrlPr>
+                          <a:rPr lang="en-US" sz="2000" b="0" i="1" smtClean="0">
+                            <a:latin typeface="Cambria Math" panose="02040503050406030204" pitchFamily="18" charset="0"/>
+                          </a:rPr>
+                        </m:ctrlPr>
+                      </m:sSubPr>
+                      <m:e>
+                        <m:r>
+                          <a:rPr lang="en-US" sz="2000" b="0" i="1" smtClean="0">
+                            <a:latin typeface="Cambria Math" panose="02040503050406030204" pitchFamily="18" charset="0"/>
+                          </a:rPr>
+                          <m:t>𝛼</m:t>
+                        </m:r>
+                      </m:e>
+                      <m:sub>
+                        <m:r>
+                          <a:rPr lang="en-US" sz="2000" b="0" i="1" smtClean="0">
+                            <a:latin typeface="Cambria Math" panose="02040503050406030204" pitchFamily="18" charset="0"/>
+                          </a:rPr>
+                          <m:t>𝑖</m:t>
+                        </m:r>
+                        <m:r>
+                          <a:rPr lang="en-US" sz="2000" b="0" i="1" smtClean="0">
+                            <a:latin typeface="Cambria Math" panose="02040503050406030204" pitchFamily="18" charset="0"/>
+                          </a:rPr>
+                          <m:t>,</m:t>
+                        </m:r>
+                        <m:sSub>
+                          <m:sSubPr>
+                            <m:ctrlPr>
+                              <a:rPr lang="en-US" sz="2000" b="0" i="1" smtClean="0">
+                                <a:latin typeface="Cambria Math" panose="02040503050406030204" pitchFamily="18" charset="0"/>
+                              </a:rPr>
+                            </m:ctrlPr>
+                          </m:sSubPr>
+                          <m:e>
+                            <m:r>
+                              <a:rPr lang="en-US" sz="2000" b="0" i="1" smtClean="0">
+                                <a:latin typeface="Cambria Math" panose="02040503050406030204" pitchFamily="18" charset="0"/>
+                              </a:rPr>
+                              <m:t>𝑘</m:t>
+                            </m:r>
+                          </m:e>
+                          <m:sub>
+                            <m:r>
+                              <a:rPr lang="en-US" sz="2000" b="0" i="1" smtClean="0">
+                                <a:latin typeface="Cambria Math" panose="02040503050406030204" pitchFamily="18" charset="0"/>
+                              </a:rPr>
+                              <m:t>𝑖</m:t>
+                            </m:r>
+                          </m:sub>
+                        </m:sSub>
+                      </m:sub>
+                    </m:sSub>
+                  </m:oMath>
+                </a14:m>
+                <a:r>
+                  <a:rPr lang="en-US" sz="2000" b="0" dirty="0"/>
+                  <a:t> for F1= 1. </a:t>
+                </a:r>
+              </a:p>
+              <a:p>
+                <a:pPr lvl="1"/>
+                <a:r>
+                  <a:rPr lang="en-US" sz="2000" b="0" dirty="0"/>
+                  <a:t>Denote this level as 3.</a:t>
+                </a:r>
+              </a:p>
+              <a:p>
+                <a:pPr lvl="2"/>
+                <a14:m>
+                  <m:oMathPara xmlns:m="http://schemas.openxmlformats.org/officeDocument/2006/math">
+                    <m:oMathParaPr>
+                      <m:jc m:val="centerGroup"/>
+                    </m:oMathParaPr>
+                    <m:oMath xmlns:m="http://schemas.openxmlformats.org/officeDocument/2006/math">
+                      <m:sSub>
+                        <m:sSubPr>
+                          <m:ctrlPr>
+                            <a:rPr lang="en-US" sz="2000" b="0" i="1" smtClean="0">
+                              <a:latin typeface="Cambria Math" panose="02040503050406030204" pitchFamily="18" charset="0"/>
+                            </a:rPr>
+                          </m:ctrlPr>
+                        </m:sSubPr>
+                        <m:e>
+                          <m:r>
+                            <a:rPr lang="en-US" sz="2000" b="0" i="1" smtClean="0">
+                              <a:latin typeface="Cambria Math" panose="02040503050406030204" pitchFamily="18" charset="0"/>
+                            </a:rPr>
+                            <m:t>𝑦</m:t>
+                          </m:r>
+                        </m:e>
+                        <m:sub>
+                          <m:r>
+                            <a:rPr lang="en-US" sz="2000" b="0" i="1" smtClean="0">
+                              <a:latin typeface="Cambria Math" panose="02040503050406030204" pitchFamily="18" charset="0"/>
+                            </a:rPr>
+                            <m:t>𝑖</m:t>
+                          </m:r>
+                          <m:r>
+                            <a:rPr lang="en-US" sz="2000" b="0" i="1" smtClean="0">
+                              <a:latin typeface="Cambria Math" panose="02040503050406030204" pitchFamily="18" charset="0"/>
+                            </a:rPr>
+                            <m:t>,</m:t>
+                          </m:r>
+                          <m:sSub>
+                            <m:sSubPr>
+                              <m:ctrlPr>
+                                <a:rPr lang="en-US" sz="2000" b="0" i="1" smtClean="0">
+                                  <a:latin typeface="Cambria Math" panose="02040503050406030204" pitchFamily="18" charset="0"/>
+                                </a:rPr>
+                              </m:ctrlPr>
+                            </m:sSubPr>
+                            <m:e>
+                              <m:r>
+                                <a:rPr lang="en-US" sz="2000" b="0" i="1" smtClean="0">
+                                  <a:latin typeface="Cambria Math" panose="02040503050406030204" pitchFamily="18" charset="0"/>
+                                </a:rPr>
+                                <m:t>𝑘</m:t>
+                              </m:r>
+                            </m:e>
+                            <m:sub>
+                              <m:r>
+                                <a:rPr lang="en-US" sz="2000" b="0" i="1" smtClean="0">
+                                  <a:latin typeface="Cambria Math" panose="02040503050406030204" pitchFamily="18" charset="0"/>
+                                </a:rPr>
+                                <m:t>𝑖</m:t>
+                              </m:r>
+                            </m:sub>
+                          </m:sSub>
+                        </m:sub>
+                      </m:sSub>
+                      <m:r>
+                        <a:rPr lang="en-US" sz="2000" b="0" i="1" smtClean="0">
+                          <a:latin typeface="Cambria Math" panose="02040503050406030204" pitchFamily="18" charset="0"/>
+                        </a:rPr>
+                        <m:t>=</m:t>
+                      </m:r>
+                      <m:sSub>
+                        <m:sSubPr>
+                          <m:ctrlPr>
+                            <a:rPr lang="en-US" sz="2000" b="0" i="1" smtClean="0">
+                              <a:latin typeface="Cambria Math" panose="02040503050406030204" pitchFamily="18" charset="0"/>
+                            </a:rPr>
+                          </m:ctrlPr>
+                        </m:sSubPr>
+                        <m:e>
+                          <m:r>
+                            <a:rPr lang="en-US" sz="2000" b="0" i="1" smtClean="0">
+                              <a:latin typeface="Cambria Math" panose="02040503050406030204" pitchFamily="18" charset="0"/>
+                            </a:rPr>
+                            <m:t>𝑦</m:t>
+                          </m:r>
+                        </m:e>
+                        <m:sub>
+                          <m:r>
+                            <a:rPr lang="en-US" sz="2000" b="0" i="1" smtClean="0">
+                              <a:latin typeface="Cambria Math" panose="02040503050406030204" pitchFamily="18" charset="0"/>
+                            </a:rPr>
+                            <m:t>1,3</m:t>
+                          </m:r>
+                        </m:sub>
+                      </m:sSub>
+                      <m:r>
+                        <a:rPr lang="en-US" sz="2000" b="0" i="1" smtClean="0">
+                          <a:latin typeface="Cambria Math" panose="02040503050406030204" pitchFamily="18" charset="0"/>
+                        </a:rPr>
+                        <m:t>=1</m:t>
+                      </m:r>
+                      <m:r>
+                        <a:rPr lang="en-US" sz="2000" b="0" i="1" smtClean="0">
+                          <a:latin typeface="Cambria Math" panose="02040503050406030204" pitchFamily="18" charset="0"/>
+                        </a:rPr>
+                        <m:t>5</m:t>
+                      </m:r>
+                    </m:oMath>
+                  </m:oMathPara>
+                </a14:m>
+                <a:endParaRPr lang="en-US" sz="2000" b="0" dirty="0"/>
+              </a:p>
+              <a:p>
+                <a:pPr lvl="2"/>
+                <a14:m>
+                  <m:oMathPara xmlns:m="http://schemas.openxmlformats.org/officeDocument/2006/math">
+                    <m:oMathParaPr>
+                      <m:jc m:val="centerGroup"/>
+                    </m:oMathParaPr>
+                    <m:oMath xmlns:m="http://schemas.openxmlformats.org/officeDocument/2006/math">
+                      <m:sSub>
+                        <m:sSubPr>
+                          <m:ctrlPr>
+                            <a:rPr lang="en-US" sz="2000" b="0" i="1" smtClean="0">
+                              <a:latin typeface="Cambria Math" panose="02040503050406030204" pitchFamily="18" charset="0"/>
+                            </a:rPr>
+                          </m:ctrlPr>
+                        </m:sSubPr>
+                        <m:e>
+                          <m:r>
+                            <a:rPr lang="en-US" sz="2000" b="0" i="1" smtClean="0">
+                              <a:latin typeface="Cambria Math" panose="02040503050406030204" pitchFamily="18" charset="0"/>
+                            </a:rPr>
+                            <m:t>𝑦</m:t>
+                          </m:r>
+                        </m:e>
+                        <m:sub>
+                          <m:r>
+                            <a:rPr lang="en-US" sz="2000" b="0" i="1" smtClean="0">
+                              <a:latin typeface="Cambria Math" panose="02040503050406030204" pitchFamily="18" charset="0"/>
+                            </a:rPr>
+                            <m:t>1,3</m:t>
+                          </m:r>
+                        </m:sub>
+                      </m:sSub>
+                      <m:r>
+                        <a:rPr lang="en-US" sz="2000" b="0" i="1" smtClean="0">
+                          <a:latin typeface="Cambria Math" panose="02040503050406030204" pitchFamily="18" charset="0"/>
+                        </a:rPr>
+                        <m:t>=</m:t>
+                      </m:r>
+                      <m:r>
+                        <a:rPr lang="en-US" sz="2000" b="0" i="1" smtClean="0">
+                          <a:latin typeface="Cambria Math" panose="02040503050406030204" pitchFamily="18" charset="0"/>
+                        </a:rPr>
+                        <m:t>𝜇</m:t>
+                      </m:r>
+                      <m:r>
+                        <a:rPr lang="en-US" sz="2000" b="0" i="1" smtClean="0">
+                          <a:latin typeface="Cambria Math" panose="02040503050406030204" pitchFamily="18" charset="0"/>
+                        </a:rPr>
+                        <m:t>+</m:t>
+                      </m:r>
+                      <m:sSub>
+                        <m:sSubPr>
+                          <m:ctrlPr>
+                            <a:rPr lang="en-US" sz="2000" b="0" i="1" smtClean="0">
+                              <a:latin typeface="Cambria Math" panose="02040503050406030204" pitchFamily="18" charset="0"/>
+                            </a:rPr>
+                          </m:ctrlPr>
+                        </m:sSubPr>
+                        <m:e>
+                          <m:r>
+                            <a:rPr lang="en-US" sz="2000" b="0" i="1" smtClean="0">
+                              <a:latin typeface="Cambria Math" panose="02040503050406030204" pitchFamily="18" charset="0"/>
+                            </a:rPr>
+                            <m:t>𝛼</m:t>
+                          </m:r>
+                        </m:e>
+                        <m:sub>
+                          <m:r>
+                            <a:rPr lang="en-US" sz="2000" b="0" i="1" smtClean="0">
+                              <a:latin typeface="Cambria Math" panose="02040503050406030204" pitchFamily="18" charset="0"/>
+                            </a:rPr>
+                            <m:t>1,3</m:t>
+                          </m:r>
+                        </m:sub>
+                      </m:sSub>
+                    </m:oMath>
+                  </m:oMathPara>
+                </a14:m>
+                <a:endParaRPr lang="en-US" sz="2000" b="0" dirty="0"/>
+              </a:p>
+              <a:p>
+                <a:pPr lvl="2"/>
+                <a14:m>
+                  <m:oMathPara xmlns:m="http://schemas.openxmlformats.org/officeDocument/2006/math">
+                    <m:oMathParaPr>
+                      <m:jc m:val="centerGroup"/>
+                    </m:oMathParaPr>
+                    <m:oMath xmlns:m="http://schemas.openxmlformats.org/officeDocument/2006/math">
+                      <m:sSub>
+                        <m:sSubPr>
+                          <m:ctrlPr>
+                            <a:rPr lang="en-US" sz="2000" b="0" i="1" smtClean="0">
+                              <a:latin typeface="Cambria Math" panose="02040503050406030204" pitchFamily="18" charset="0"/>
+                            </a:rPr>
+                          </m:ctrlPr>
+                        </m:sSubPr>
+                        <m:e>
+                          <m:r>
+                            <a:rPr lang="en-US" sz="2000" b="0" i="1" smtClean="0">
+                              <a:latin typeface="Cambria Math" panose="02040503050406030204" pitchFamily="18" charset="0"/>
+                            </a:rPr>
+                            <m:t>𝛼</m:t>
+                          </m:r>
+                        </m:e>
+                        <m:sub>
+                          <m:r>
+                            <a:rPr lang="en-US" sz="2000" b="0" i="1" smtClean="0">
+                              <a:latin typeface="Cambria Math" panose="02040503050406030204" pitchFamily="18" charset="0"/>
+                            </a:rPr>
+                            <m:t>1,3</m:t>
+                          </m:r>
+                        </m:sub>
+                      </m:sSub>
+                      <m:r>
+                        <a:rPr lang="en-US" sz="2000" b="0" i="1" smtClean="0">
+                          <a:latin typeface="Cambria Math" panose="02040503050406030204" pitchFamily="18" charset="0"/>
+                        </a:rPr>
+                        <m:t>=</m:t>
+                      </m:r>
+                      <m:sSub>
+                        <m:sSubPr>
+                          <m:ctrlPr>
+                            <a:rPr lang="en-US" sz="2000" b="0" i="1" smtClean="0">
+                              <a:latin typeface="Cambria Math" panose="02040503050406030204" pitchFamily="18" charset="0"/>
+                            </a:rPr>
+                          </m:ctrlPr>
+                        </m:sSubPr>
+                        <m:e>
+                          <m:r>
+                            <a:rPr lang="en-US" sz="2000" b="0" i="1" smtClean="0">
+                              <a:latin typeface="Cambria Math" panose="02040503050406030204" pitchFamily="18" charset="0"/>
+                            </a:rPr>
+                            <m:t>𝑦</m:t>
+                          </m:r>
+                        </m:e>
+                        <m:sub>
+                          <m:r>
+                            <a:rPr lang="en-US" sz="2000" b="0" i="1" smtClean="0">
+                              <a:latin typeface="Cambria Math" panose="02040503050406030204" pitchFamily="18" charset="0"/>
+                            </a:rPr>
+                            <m:t>1,3</m:t>
+                          </m:r>
+                        </m:sub>
+                      </m:sSub>
+                      <m:r>
+                        <a:rPr lang="en-US" sz="2000" b="0" i="1" smtClean="0">
+                          <a:latin typeface="Cambria Math" panose="02040503050406030204" pitchFamily="18" charset="0"/>
+                        </a:rPr>
+                        <m:t>−</m:t>
+                      </m:r>
+                      <m:r>
+                        <a:rPr lang="en-US" sz="2000" b="0" i="1" smtClean="0">
+                          <a:latin typeface="Cambria Math" panose="02040503050406030204" pitchFamily="18" charset="0"/>
+                        </a:rPr>
+                        <m:t>𝜇</m:t>
+                      </m:r>
+                      <m:r>
+                        <a:rPr lang="en-US" sz="2000" b="0" i="0" smtClean="0">
+                          <a:latin typeface="Cambria Math" panose="02040503050406030204" pitchFamily="18" charset="0"/>
+                        </a:rPr>
+                        <m:t>=−5</m:t>
+                      </m:r>
+                    </m:oMath>
+                  </m:oMathPara>
+                </a14:m>
+                <a:endParaRPr lang="en-US" sz="2000" b="0" dirty="0"/>
+              </a:p>
+            </p:txBody>
+          </p:sp>
+        </mc:Choice>
+        <mc:Fallback>
+          <p:sp>
+            <p:nvSpPr>
+              <p:cNvPr id="9" name="TextBox 8">
+                <a:extLst>
+                  <a:ext uri="{FF2B5EF4-FFF2-40B4-BE49-F238E27FC236}">
+                    <a16:creationId xmlns:a16="http://schemas.microsoft.com/office/drawing/2014/main" id="{4F8B46BC-FB90-20B2-4FB3-90378D06A5FE}"/>
+                  </a:ext>
+                </a:extLst>
+              </p:cNvPr>
+              <p:cNvSpPr txBox="1">
+                <a:spLocks noRot="1" noChangeAspect="1" noMove="1" noResize="1" noEditPoints="1" noAdjustHandles="1" noChangeArrowheads="1" noChangeShapeType="1" noTextEdit="1"/>
+              </p:cNvSpPr>
+              <p:nvPr/>
+            </p:nvSpPr>
+            <p:spPr>
+              <a:xfrm>
+                <a:off x="-123179" y="4169489"/>
+                <a:ext cx="4992255" cy="1704249"/>
+              </a:xfrm>
+              <a:prstGeom prst="rect">
+                <a:avLst/>
+              </a:prstGeom>
+              <a:blipFill>
+                <a:blip r:embed="rId6"/>
+                <a:stretch>
+                  <a:fillRect t="-2222" b="-741"/>
+                </a:stretch>
+              </a:blipFill>
+            </p:spPr>
+            <p:txBody>
+              <a:bodyPr/>
+              <a:lstStyle/>
+              <a:p>
+                <a:r>
+                  <a:rPr lang="en-US">
+                    <a:noFill/>
+                  </a:rPr>
+                  <a:t> </a:t>
+                </a:r>
+              </a:p>
+            </p:txBody>
+          </p:sp>
+        </mc:Fallback>
+      </mc:AlternateContent>
+      <mc:AlternateContent xmlns:mc="http://schemas.openxmlformats.org/markup-compatibility/2006">
+        <mc:Choice xmlns:a14="http://schemas.microsoft.com/office/drawing/2010/main" Requires="a14">
+          <p:graphicFrame>
+            <p:nvGraphicFramePr>
+              <p:cNvPr id="11" name="Table 5">
+                <a:extLst>
+                  <a:ext uri="{FF2B5EF4-FFF2-40B4-BE49-F238E27FC236}">
+                    <a16:creationId xmlns:a16="http://schemas.microsoft.com/office/drawing/2014/main" id="{EA326C96-3A4D-B09B-2783-46F571BEFAB0}"/>
+                  </a:ext>
+                </a:extLst>
+              </p:cNvPr>
+              <p:cNvGraphicFramePr>
+                <a:graphicFrameLocks noGrp="1"/>
+              </p:cNvGraphicFramePr>
+              <p:nvPr>
+                <p:extLst>
+                  <p:ext uri="{D42A27DB-BD31-4B8C-83A1-F6EECF244321}">
+                    <p14:modId xmlns:p14="http://schemas.microsoft.com/office/powerpoint/2010/main" val="3544722353"/>
+                  </p:ext>
+                </p:extLst>
+              </p:nvPr>
+            </p:nvGraphicFramePr>
+            <p:xfrm>
+              <a:off x="5875242" y="409282"/>
+              <a:ext cx="2818615" cy="6105335"/>
+            </p:xfrm>
+            <a:graphic>
+              <a:graphicData uri="http://schemas.openxmlformats.org/drawingml/2006/table">
+                <a:tbl>
+                  <a:tblPr firstRow="1" bandRow="1">
+                    <a:tableStyleId>{5C22544A-7EE6-4342-B048-85BDC9FD1C3A}</a:tableStyleId>
+                  </a:tblPr>
+                  <a:tblGrid>
+                    <a:gridCol w="1220789">
+                      <a:extLst>
+                        <a:ext uri="{9D8B030D-6E8A-4147-A177-3AD203B41FA5}">
+                          <a16:colId xmlns:a16="http://schemas.microsoft.com/office/drawing/2014/main" val="261299034"/>
+                        </a:ext>
+                      </a:extLst>
+                    </a:gridCol>
+                    <a:gridCol w="502063">
+                      <a:extLst>
+                        <a:ext uri="{9D8B030D-6E8A-4147-A177-3AD203B41FA5}">
+                          <a16:colId xmlns:a16="http://schemas.microsoft.com/office/drawing/2014/main" val="1664871799"/>
+                        </a:ext>
+                      </a:extLst>
+                    </a:gridCol>
+                    <a:gridCol w="564484">
+                      <a:extLst>
+                        <a:ext uri="{9D8B030D-6E8A-4147-A177-3AD203B41FA5}">
+                          <a16:colId xmlns:a16="http://schemas.microsoft.com/office/drawing/2014/main" val="3741325556"/>
+                        </a:ext>
+                      </a:extLst>
+                    </a:gridCol>
+                    <a:gridCol w="531279">
+                      <a:extLst>
+                        <a:ext uri="{9D8B030D-6E8A-4147-A177-3AD203B41FA5}">
+                          <a16:colId xmlns:a16="http://schemas.microsoft.com/office/drawing/2014/main" val="4264674326"/>
+                        </a:ext>
+                      </a:extLst>
+                    </a:gridCol>
+                  </a:tblGrid>
+                  <a:tr h="238607">
+                    <a:tc>
+                      <a:txBody>
+                        <a:bodyPr/>
+                        <a:lstStyle/>
+                        <a:p>
+                          <a:pPr/>
+                          <a14:m>
+                            <m:oMathPara xmlns:m="http://schemas.openxmlformats.org/officeDocument/2006/math">
+                              <m:oMathParaPr>
+                                <m:jc m:val="centerGroup"/>
+                              </m:oMathParaPr>
+                              <m:oMath xmlns:m="http://schemas.openxmlformats.org/officeDocument/2006/math">
+                                <m:sSub>
+                                  <m:sSubPr>
+                                    <m:ctrlPr>
+                                      <a:rPr lang="en-US" sz="1400" b="1" i="1" smtClean="0">
+                                        <a:latin typeface="Cambria Math" panose="02040503050406030204" pitchFamily="18" charset="0"/>
+                                      </a:rPr>
+                                    </m:ctrlPr>
+                                  </m:sSubPr>
+                                  <m:e>
+                                    <m:r>
+                                      <a:rPr lang="en-US" sz="1400" b="1" i="1" smtClean="0">
+                                        <a:latin typeface="Cambria Math" panose="02040503050406030204" pitchFamily="18" charset="0"/>
+                                      </a:rPr>
+                                      <m:t>𝒚</m:t>
+                                    </m:r>
+                                  </m:e>
+                                  <m:sub>
+                                    <m:r>
+                                      <a:rPr lang="en-US" sz="1400" b="1" i="1" smtClean="0">
+                                        <a:latin typeface="Cambria Math" panose="02040503050406030204" pitchFamily="18" charset="0"/>
+                                      </a:rPr>
+                                      <m:t>𝑭</m:t>
+                                    </m:r>
+                                    <m:r>
+                                      <a:rPr lang="en-US" sz="1400" b="1" i="1" smtClean="0">
+                                        <a:latin typeface="Cambria Math" panose="02040503050406030204" pitchFamily="18" charset="0"/>
+                                      </a:rPr>
+                                      <m:t>𝟏</m:t>
+                                    </m:r>
+                                    <m:r>
+                                      <a:rPr lang="en-US" sz="1400" b="1" i="1" smtClean="0">
+                                        <a:latin typeface="Cambria Math" panose="02040503050406030204" pitchFamily="18" charset="0"/>
+                                      </a:rPr>
+                                      <m:t>,</m:t>
+                                    </m:r>
+                                    <m:r>
+                                      <a:rPr lang="en-US" sz="1400" b="1" i="1" smtClean="0">
+                                        <a:latin typeface="Cambria Math" panose="02040503050406030204" pitchFamily="18" charset="0"/>
+                                      </a:rPr>
+                                      <m:t>𝑳</m:t>
+                                    </m:r>
+                                    <m:r>
+                                      <a:rPr lang="en-US" sz="1400" b="1" i="1" smtClean="0">
+                                        <a:latin typeface="Cambria Math" panose="02040503050406030204" pitchFamily="18" charset="0"/>
+                                      </a:rPr>
+                                      <m:t>𝟏</m:t>
+                                    </m:r>
+                                    <m:r>
+                                      <a:rPr lang="en-US" sz="1400" b="1" i="1" smtClean="0">
+                                        <a:latin typeface="Cambria Math" panose="02040503050406030204" pitchFamily="18" charset="0"/>
+                                      </a:rPr>
+                                      <m:t>,</m:t>
+                                    </m:r>
+                                    <m:r>
+                                      <a:rPr lang="en-US" sz="1400" b="1" i="1" smtClean="0">
+                                        <a:latin typeface="Cambria Math" panose="02040503050406030204" pitchFamily="18" charset="0"/>
+                                      </a:rPr>
+                                      <m:t>𝑭</m:t>
+                                    </m:r>
+                                    <m:r>
+                                      <a:rPr lang="en-US" sz="1400" b="1" i="1" smtClean="0">
+                                        <a:latin typeface="Cambria Math" panose="02040503050406030204" pitchFamily="18" charset="0"/>
+                                      </a:rPr>
+                                      <m:t>𝟐</m:t>
+                                    </m:r>
+                                    <m:r>
+                                      <a:rPr lang="en-US" sz="1400" b="1" i="1" smtClean="0">
+                                        <a:latin typeface="Cambria Math" panose="02040503050406030204" pitchFamily="18" charset="0"/>
+                                      </a:rPr>
+                                      <m:t>,</m:t>
+                                    </m:r>
+                                    <m:r>
+                                      <a:rPr lang="en-US" sz="1400" b="1" i="1" smtClean="0">
+                                        <a:latin typeface="Cambria Math" panose="02040503050406030204" pitchFamily="18" charset="0"/>
+                                      </a:rPr>
+                                      <m:t>𝑳</m:t>
+                                    </m:r>
+                                    <m:r>
+                                      <a:rPr lang="en-US" sz="1400" b="1" i="1" smtClean="0">
+                                        <a:latin typeface="Cambria Math" panose="02040503050406030204" pitchFamily="18" charset="0"/>
+                                      </a:rPr>
+                                      <m:t>𝟐</m:t>
+                                    </m:r>
+                                    <m:r>
+                                      <a:rPr lang="en-US" sz="1400" b="1" i="1" smtClean="0">
+                                        <a:latin typeface="Cambria Math" panose="02040503050406030204" pitchFamily="18" charset="0"/>
+                                      </a:rPr>
+                                      <m:t>,</m:t>
+                                    </m:r>
+                                    <m:r>
+                                      <a:rPr lang="en-US" sz="1400" b="1" i="1" smtClean="0">
+                                        <a:latin typeface="Cambria Math" panose="02040503050406030204" pitchFamily="18" charset="0"/>
+                                      </a:rPr>
+                                      <m:t>𝑭</m:t>
+                                    </m:r>
+                                    <m:r>
+                                      <a:rPr lang="en-US" sz="1400" b="1" i="1" smtClean="0">
+                                        <a:latin typeface="Cambria Math" panose="02040503050406030204" pitchFamily="18" charset="0"/>
+                                      </a:rPr>
+                                      <m:t>𝟑</m:t>
+                                    </m:r>
+                                    <m:r>
+                                      <a:rPr lang="en-US" sz="1400" b="1" i="1" smtClean="0">
+                                        <a:latin typeface="Cambria Math" panose="02040503050406030204" pitchFamily="18" charset="0"/>
+                                      </a:rPr>
+                                      <m:t>,</m:t>
+                                    </m:r>
+                                    <m:r>
+                                      <a:rPr lang="en-US" sz="1400" b="1" i="1" smtClean="0">
+                                        <a:latin typeface="Cambria Math" panose="02040503050406030204" pitchFamily="18" charset="0"/>
+                                      </a:rPr>
+                                      <m:t>𝑳</m:t>
+                                    </m:r>
+                                    <m:r>
+                                      <a:rPr lang="en-US" sz="1400" b="1" i="1" smtClean="0">
+                                        <a:latin typeface="Cambria Math" panose="02040503050406030204" pitchFamily="18" charset="0"/>
+                                      </a:rPr>
+                                      <m:t>𝟑</m:t>
+                                    </m:r>
+                                  </m:sub>
+                                </m:sSub>
+                              </m:oMath>
+                            </m:oMathPara>
+                          </a14:m>
+                          <a:endParaRPr lang="en-US" sz="1400" dirty="0"/>
+                        </a:p>
+                      </a:txBody>
+                      <a:tcPr/>
+                    </a:tc>
+                    <a:tc>
+                      <a:txBody>
+                        <a:bodyPr/>
+                        <a:lstStyle/>
+                        <a:p>
+                          <a:pPr algn="ctr"/>
+                          <a:r>
+                            <a:rPr lang="en-US" sz="1400" dirty="0"/>
+                            <a:t>F1</a:t>
+                          </a:r>
+                        </a:p>
+                      </a:txBody>
+                      <a:tcPr/>
+                    </a:tc>
+                    <a:tc>
+                      <a:txBody>
+                        <a:bodyPr/>
+                        <a:lstStyle/>
+                        <a:p>
+                          <a:pPr algn="ctr"/>
+                          <a:r>
+                            <a:rPr lang="en-US" sz="1400" dirty="0"/>
+                            <a:t>F2</a:t>
+                          </a:r>
+                        </a:p>
+                      </a:txBody>
+                      <a:tcPr/>
+                    </a:tc>
+                    <a:tc>
+                      <a:txBody>
+                        <a:bodyPr/>
+                        <a:lstStyle/>
+                        <a:p>
+                          <a:pPr algn="ctr"/>
+                          <a:r>
+                            <a:rPr lang="en-US" sz="1400" dirty="0"/>
+                            <a:t>F3</a:t>
+                          </a:r>
+                        </a:p>
+                      </a:txBody>
+                      <a:tcPr/>
+                    </a:tc>
+                    <a:extLst>
+                      <a:ext uri="{0D108BD9-81ED-4DB2-BD59-A6C34878D82A}">
+                        <a16:rowId xmlns:a16="http://schemas.microsoft.com/office/drawing/2014/main" val="604855401"/>
+                      </a:ext>
+                    </a:extLst>
+                  </a:tr>
+                  <a:tr h="232066">
+                    <a:tc>
+                      <a:txBody>
+                        <a:bodyPr/>
+                        <a:lstStyle/>
+                        <a:p>
+                          <a:pPr algn="r"/>
+                          <a:r>
+                            <a:rPr lang="en-US" sz="1400" dirty="0"/>
+                            <a:t>-2</a:t>
+                          </a:r>
+                        </a:p>
+                      </a:txBody>
+                      <a:tcPr/>
+                    </a:tc>
+                    <a:tc>
+                      <a:txBody>
+                        <a:bodyPr/>
+                        <a:lstStyle/>
+                        <a:p>
+                          <a:pPr algn="r"/>
+                          <a:r>
+                            <a:rPr lang="en-US" sz="1400" dirty="0"/>
+                            <a:t>-1</a:t>
+                          </a:r>
+                        </a:p>
+                      </a:txBody>
+                      <a:tcPr/>
+                    </a:tc>
+                    <a:tc>
+                      <a:txBody>
+                        <a:bodyPr/>
+                        <a:lstStyle/>
+                        <a:p>
+                          <a:pPr algn="r"/>
+                          <a:r>
+                            <a:rPr lang="en-US" sz="1400" dirty="0"/>
+                            <a:t>-1</a:t>
+                          </a:r>
+                        </a:p>
+                      </a:txBody>
+                      <a:tcPr/>
+                    </a:tc>
+                    <a:tc>
+                      <a:txBody>
+                        <a:bodyPr/>
+                        <a:lstStyle/>
+                        <a:p>
+                          <a:pPr algn="r"/>
+                          <a:r>
+                            <a:rPr lang="en-US" sz="1400" dirty="0"/>
+                            <a:t>0</a:t>
+                          </a:r>
+                        </a:p>
+                      </a:txBody>
+                      <a:tcPr/>
+                    </a:tc>
+                    <a:extLst>
+                      <a:ext uri="{0D108BD9-81ED-4DB2-BD59-A6C34878D82A}">
+                        <a16:rowId xmlns:a16="http://schemas.microsoft.com/office/drawing/2014/main" val="3261454787"/>
+                      </a:ext>
+                    </a:extLst>
+                  </a:tr>
+                  <a:tr h="232066">
+                    <a:tc>
+                      <a:txBody>
+                        <a:bodyPr/>
+                        <a:lstStyle/>
+                        <a:p>
+                          <a:pPr algn="r"/>
+                          <a:r>
+                            <a:rPr lang="en-US" sz="1400" dirty="0"/>
+                            <a:t>-2</a:t>
+                          </a:r>
+                        </a:p>
+                      </a:txBody>
+                      <a:tcPr/>
+                    </a:tc>
+                    <a:tc>
+                      <a:txBody>
+                        <a:bodyPr/>
+                        <a:lstStyle/>
+                        <a:p>
+                          <a:pPr algn="r"/>
+                          <a:r>
+                            <a:rPr lang="en-US" sz="1400" dirty="0"/>
+                            <a:t>-1</a:t>
+                          </a:r>
+                        </a:p>
+                      </a:txBody>
+                      <a:tcPr/>
+                    </a:tc>
+                    <a:tc>
+                      <a:txBody>
+                        <a:bodyPr/>
+                        <a:lstStyle/>
+                        <a:p>
+                          <a:pPr algn="r"/>
+                          <a:r>
+                            <a:rPr lang="en-US" sz="1400" dirty="0"/>
+                            <a:t>0</a:t>
+                          </a:r>
+                        </a:p>
+                      </a:txBody>
+                      <a:tcPr/>
+                    </a:tc>
+                    <a:tc>
+                      <a:txBody>
+                        <a:bodyPr/>
+                        <a:lstStyle/>
+                        <a:p>
+                          <a:pPr algn="r"/>
+                          <a:r>
+                            <a:rPr lang="en-US" sz="1400" dirty="0"/>
+                            <a:t>-1</a:t>
+                          </a:r>
+                        </a:p>
+                      </a:txBody>
+                      <a:tcPr/>
+                    </a:tc>
+                    <a:extLst>
+                      <a:ext uri="{0D108BD9-81ED-4DB2-BD59-A6C34878D82A}">
+                        <a16:rowId xmlns:a16="http://schemas.microsoft.com/office/drawing/2014/main" val="1208064450"/>
+                      </a:ext>
+                    </a:extLst>
+                  </a:tr>
+                  <a:tr h="232066">
+                    <a:tc>
+                      <a:txBody>
+                        <a:bodyPr/>
+                        <a:lstStyle/>
+                        <a:p>
+                          <a:pPr algn="r"/>
+                          <a:r>
+                            <a:rPr lang="en-US" sz="1400" dirty="0"/>
+                            <a:t>5</a:t>
+                          </a:r>
+                        </a:p>
+                      </a:txBody>
+                      <a:tcPr/>
+                    </a:tc>
+                    <a:tc>
+                      <a:txBody>
+                        <a:bodyPr/>
+                        <a:lstStyle/>
+                        <a:p>
+                          <a:pPr algn="r"/>
+                          <a:r>
+                            <a:rPr lang="en-US" sz="1400" dirty="0"/>
+                            <a:t>-1</a:t>
+                          </a:r>
+                        </a:p>
+                      </a:txBody>
+                      <a:tcPr/>
+                    </a:tc>
+                    <a:tc>
+                      <a:txBody>
+                        <a:bodyPr/>
+                        <a:lstStyle/>
+                        <a:p>
+                          <a:pPr algn="r"/>
+                          <a:r>
+                            <a:rPr lang="en-US" sz="1400" dirty="0"/>
+                            <a:t>0</a:t>
+                          </a:r>
+                        </a:p>
+                      </a:txBody>
+                      <a:tcPr/>
+                    </a:tc>
+                    <a:tc>
+                      <a:txBody>
+                        <a:bodyPr/>
+                        <a:lstStyle/>
+                        <a:p>
+                          <a:pPr algn="r"/>
+                          <a:r>
+                            <a:rPr lang="en-US" sz="1400" dirty="0"/>
+                            <a:t>0</a:t>
+                          </a:r>
+                        </a:p>
+                      </a:txBody>
+                      <a:tcPr/>
+                    </a:tc>
+                    <a:extLst>
+                      <a:ext uri="{0D108BD9-81ED-4DB2-BD59-A6C34878D82A}">
+                        <a16:rowId xmlns:a16="http://schemas.microsoft.com/office/drawing/2014/main" val="3021756256"/>
+                      </a:ext>
+                    </a:extLst>
+                  </a:tr>
+                  <a:tr h="232066">
+                    <a:tc>
+                      <a:txBody>
+                        <a:bodyPr/>
+                        <a:lstStyle/>
+                        <a:p>
+                          <a:pPr algn="r"/>
+                          <a:r>
+                            <a:rPr lang="en-US" sz="1400" dirty="0"/>
+                            <a:t>10</a:t>
+                          </a:r>
+                        </a:p>
+                      </a:txBody>
+                      <a:tcPr/>
+                    </a:tc>
+                    <a:tc>
+                      <a:txBody>
+                        <a:bodyPr/>
+                        <a:lstStyle/>
+                        <a:p>
+                          <a:pPr algn="r"/>
+                          <a:r>
+                            <a:rPr lang="en-US" sz="1400" dirty="0"/>
+                            <a:t>-1</a:t>
+                          </a:r>
+                        </a:p>
+                      </a:txBody>
+                      <a:tcPr/>
+                    </a:tc>
+                    <a:tc>
+                      <a:txBody>
+                        <a:bodyPr/>
+                        <a:lstStyle/>
+                        <a:p>
+                          <a:pPr algn="r"/>
+                          <a:r>
+                            <a:rPr lang="en-US" sz="1400" dirty="0"/>
+                            <a:t>0</a:t>
+                          </a:r>
+                        </a:p>
+                      </a:txBody>
+                      <a:tcPr/>
+                    </a:tc>
+                    <a:tc>
+                      <a:txBody>
+                        <a:bodyPr/>
+                        <a:lstStyle/>
+                        <a:p>
+                          <a:pPr algn="r"/>
+                          <a:r>
+                            <a:rPr lang="en-US" sz="1400" dirty="0"/>
+                            <a:t>1</a:t>
+                          </a:r>
+                        </a:p>
+                      </a:txBody>
+                      <a:tcPr/>
+                    </a:tc>
+                    <a:extLst>
+                      <a:ext uri="{0D108BD9-81ED-4DB2-BD59-A6C34878D82A}">
+                        <a16:rowId xmlns:a16="http://schemas.microsoft.com/office/drawing/2014/main" val="2565100349"/>
+                      </a:ext>
+                    </a:extLst>
+                  </a:tr>
+                  <a:tr h="232066">
+                    <a:tc>
+                      <a:txBody>
+                        <a:bodyPr/>
+                        <a:lstStyle/>
+                        <a:p>
+                          <a:pPr algn="r"/>
+                          <a:r>
+                            <a:rPr lang="en-US" sz="1400" dirty="0"/>
+                            <a:t>10</a:t>
+                          </a:r>
+                        </a:p>
+                      </a:txBody>
+                      <a:tcPr/>
+                    </a:tc>
+                    <a:tc>
+                      <a:txBody>
+                        <a:bodyPr/>
+                        <a:lstStyle/>
+                        <a:p>
+                          <a:pPr algn="r"/>
+                          <a:r>
+                            <a:rPr lang="en-US" sz="1400" dirty="0"/>
+                            <a:t>-1</a:t>
+                          </a:r>
+                        </a:p>
+                      </a:txBody>
+                      <a:tcPr/>
+                    </a:tc>
+                    <a:tc>
+                      <a:txBody>
+                        <a:bodyPr/>
+                        <a:lstStyle/>
+                        <a:p>
+                          <a:pPr algn="r"/>
+                          <a:r>
+                            <a:rPr lang="en-US" sz="1400" dirty="0"/>
+                            <a:t>1</a:t>
+                          </a:r>
+                        </a:p>
+                      </a:txBody>
+                      <a:tcPr/>
+                    </a:tc>
+                    <a:tc>
+                      <a:txBody>
+                        <a:bodyPr/>
+                        <a:lstStyle/>
+                        <a:p>
+                          <a:pPr algn="r"/>
+                          <a:r>
+                            <a:rPr lang="en-US" sz="1400" dirty="0"/>
+                            <a:t>0</a:t>
+                          </a:r>
+                        </a:p>
+                      </a:txBody>
+                      <a:tcPr/>
+                    </a:tc>
+                    <a:extLst>
+                      <a:ext uri="{0D108BD9-81ED-4DB2-BD59-A6C34878D82A}">
+                        <a16:rowId xmlns:a16="http://schemas.microsoft.com/office/drawing/2014/main" val="3746517152"/>
+                      </a:ext>
+                    </a:extLst>
+                  </a:tr>
+                  <a:tr h="119841">
+                    <a:tc>
+                      <a:txBody>
+                        <a:bodyPr/>
+                        <a:lstStyle/>
+                        <a:p>
+                          <a:pPr algn="r"/>
+                          <a:r>
+                            <a:rPr lang="en-US" sz="1400" dirty="0"/>
+                            <a:t>10</a:t>
+                          </a:r>
+                        </a:p>
+                      </a:txBody>
+                      <a:tcPr/>
+                    </a:tc>
+                    <a:tc>
+                      <a:txBody>
+                        <a:bodyPr/>
+                        <a:lstStyle/>
+                        <a:p>
+                          <a:pPr algn="r"/>
+                          <a:r>
+                            <a:rPr lang="en-US" sz="1400" dirty="0"/>
+                            <a:t>0</a:t>
+                          </a:r>
+                        </a:p>
+                      </a:txBody>
+                      <a:tcPr/>
+                    </a:tc>
+                    <a:tc>
+                      <a:txBody>
+                        <a:bodyPr/>
+                        <a:lstStyle/>
+                        <a:p>
+                          <a:pPr algn="r"/>
+                          <a:r>
+                            <a:rPr lang="en-US" sz="1400" dirty="0"/>
+                            <a:t>1</a:t>
+                          </a:r>
+                        </a:p>
+                      </a:txBody>
+                      <a:tcPr/>
+                    </a:tc>
+                    <a:tc>
+                      <a:txBody>
+                        <a:bodyPr/>
+                        <a:lstStyle/>
+                        <a:p>
+                          <a:pPr algn="r"/>
+                          <a:r>
+                            <a:rPr lang="en-US" sz="1400" dirty="0"/>
+                            <a:t>-1</a:t>
+                          </a:r>
+                        </a:p>
+                      </a:txBody>
+                      <a:tcPr/>
+                    </a:tc>
+                    <a:extLst>
+                      <a:ext uri="{0D108BD9-81ED-4DB2-BD59-A6C34878D82A}">
+                        <a16:rowId xmlns:a16="http://schemas.microsoft.com/office/drawing/2014/main" val="2077409460"/>
+                      </a:ext>
+                    </a:extLst>
+                  </a:tr>
+                  <a:tr h="232066">
+                    <a:tc>
+                      <a:txBody>
+                        <a:bodyPr/>
+                        <a:lstStyle/>
+                        <a:p>
+                          <a:pPr algn="r"/>
+                          <a:r>
+                            <a:rPr lang="en-US" sz="1400" dirty="0"/>
+                            <a:t>5</a:t>
+                          </a:r>
+                        </a:p>
+                      </a:txBody>
+                      <a:tcPr/>
+                    </a:tc>
+                    <a:tc>
+                      <a:txBody>
+                        <a:bodyPr/>
+                        <a:lstStyle/>
+                        <a:p>
+                          <a:pPr algn="r"/>
+                          <a:r>
+                            <a:rPr lang="en-US" sz="1400" dirty="0"/>
+                            <a:t>0</a:t>
+                          </a:r>
+                        </a:p>
+                      </a:txBody>
+                      <a:tcPr/>
+                    </a:tc>
+                    <a:tc>
+                      <a:txBody>
+                        <a:bodyPr/>
+                        <a:lstStyle/>
+                        <a:p>
+                          <a:pPr algn="r"/>
+                          <a:r>
+                            <a:rPr lang="en-US" sz="1400" dirty="0"/>
+                            <a:t>-1</a:t>
+                          </a:r>
+                        </a:p>
+                      </a:txBody>
+                      <a:tcPr/>
+                    </a:tc>
+                    <a:tc>
+                      <a:txBody>
+                        <a:bodyPr/>
+                        <a:lstStyle/>
+                        <a:p>
+                          <a:pPr algn="r"/>
+                          <a:r>
+                            <a:rPr lang="en-US" sz="1400" dirty="0"/>
+                            <a:t>0</a:t>
+                          </a:r>
+                        </a:p>
+                      </a:txBody>
+                      <a:tcPr/>
+                    </a:tc>
+                    <a:extLst>
+                      <a:ext uri="{0D108BD9-81ED-4DB2-BD59-A6C34878D82A}">
+                        <a16:rowId xmlns:a16="http://schemas.microsoft.com/office/drawing/2014/main" val="3681507901"/>
+                      </a:ext>
+                    </a:extLst>
+                  </a:tr>
+                  <a:tr h="232066">
+                    <a:tc>
+                      <a:txBody>
+                        <a:bodyPr/>
+                        <a:lstStyle/>
+                        <a:p>
+                          <a:pPr algn="r"/>
+                          <a:r>
+                            <a:rPr lang="en-US" sz="1400" dirty="0"/>
+                            <a:t>10</a:t>
+                          </a:r>
+                        </a:p>
+                      </a:txBody>
+                      <a:tcPr/>
+                    </a:tc>
+                    <a:tc>
+                      <a:txBody>
+                        <a:bodyPr/>
+                        <a:lstStyle/>
+                        <a:p>
+                          <a:pPr algn="r"/>
+                          <a:r>
+                            <a:rPr lang="en-US" sz="1400" dirty="0"/>
+                            <a:t>0</a:t>
+                          </a:r>
+                        </a:p>
+                      </a:txBody>
+                      <a:tcPr/>
+                    </a:tc>
+                    <a:tc>
+                      <a:txBody>
+                        <a:bodyPr/>
+                        <a:lstStyle/>
+                        <a:p>
+                          <a:pPr algn="r"/>
+                          <a:r>
+                            <a:rPr lang="en-US" sz="1400" dirty="0"/>
+                            <a:t>-1</a:t>
+                          </a:r>
+                        </a:p>
+                      </a:txBody>
+                      <a:tcPr/>
+                    </a:tc>
+                    <a:tc>
+                      <a:txBody>
+                        <a:bodyPr/>
+                        <a:lstStyle/>
+                        <a:p>
+                          <a:pPr algn="r"/>
+                          <a:r>
+                            <a:rPr lang="en-US" sz="1400" dirty="0"/>
+                            <a:t>1</a:t>
+                          </a:r>
+                        </a:p>
+                      </a:txBody>
+                      <a:tcPr/>
+                    </a:tc>
+                    <a:extLst>
+                      <a:ext uri="{0D108BD9-81ED-4DB2-BD59-A6C34878D82A}">
+                        <a16:rowId xmlns:a16="http://schemas.microsoft.com/office/drawing/2014/main" val="2265201886"/>
+                      </a:ext>
+                    </a:extLst>
+                  </a:tr>
+                  <a:tr h="232066">
+                    <a:tc>
+                      <a:txBody>
+                        <a:bodyPr/>
+                        <a:lstStyle/>
+                        <a:p>
+                          <a:pPr algn="r"/>
+                          <a:r>
+                            <a:rPr lang="en-US" sz="1400" dirty="0"/>
+                            <a:t>-2</a:t>
+                          </a:r>
+                        </a:p>
+                      </a:txBody>
+                      <a:tcPr/>
+                    </a:tc>
+                    <a:tc>
+                      <a:txBody>
+                        <a:bodyPr/>
+                        <a:lstStyle/>
+                        <a:p>
+                          <a:pPr algn="r"/>
+                          <a:r>
+                            <a:rPr lang="en-US" sz="1400" dirty="0"/>
+                            <a:t>0</a:t>
+                          </a:r>
+                        </a:p>
+                      </a:txBody>
+                      <a:tcPr/>
+                    </a:tc>
+                    <a:tc>
+                      <a:txBody>
+                        <a:bodyPr/>
+                        <a:lstStyle/>
+                        <a:p>
+                          <a:pPr algn="r"/>
+                          <a:r>
+                            <a:rPr lang="en-US" sz="1400" dirty="0"/>
+                            <a:t>-1</a:t>
+                          </a:r>
+                        </a:p>
+                      </a:txBody>
+                      <a:tcPr/>
+                    </a:tc>
+                    <a:tc>
+                      <a:txBody>
+                        <a:bodyPr/>
+                        <a:lstStyle/>
+                        <a:p>
+                          <a:pPr algn="r"/>
+                          <a:r>
+                            <a:rPr lang="en-US" sz="1400" dirty="0"/>
+                            <a:t>-1</a:t>
+                          </a:r>
+                        </a:p>
+                      </a:txBody>
+                      <a:tcPr/>
+                    </a:tc>
+                    <a:extLst>
+                      <a:ext uri="{0D108BD9-81ED-4DB2-BD59-A6C34878D82A}">
+                        <a16:rowId xmlns:a16="http://schemas.microsoft.com/office/drawing/2014/main" val="2609108840"/>
+                      </a:ext>
+                    </a:extLst>
+                  </a:tr>
+                  <a:tr h="232066">
+                    <a:tc>
+                      <a:txBody>
+                        <a:bodyPr/>
+                        <a:lstStyle/>
+                        <a:p>
+                          <a:pPr algn="r"/>
+                          <a:r>
+                            <a:rPr lang="en-US" sz="1400" dirty="0"/>
+                            <a:t>10</a:t>
+                          </a:r>
+                        </a:p>
+                      </a:txBody>
+                      <a:tcPr/>
+                    </a:tc>
+                    <a:tc>
+                      <a:txBody>
+                        <a:bodyPr/>
+                        <a:lstStyle/>
+                        <a:p>
+                          <a:pPr algn="r"/>
+                          <a:r>
+                            <a:rPr lang="en-US" sz="1400" dirty="0"/>
+                            <a:t>0</a:t>
+                          </a:r>
+                        </a:p>
+                      </a:txBody>
+                      <a:tcPr/>
+                    </a:tc>
+                    <a:tc>
+                      <a:txBody>
+                        <a:bodyPr/>
+                        <a:lstStyle/>
+                        <a:p>
+                          <a:pPr algn="r"/>
+                          <a:r>
+                            <a:rPr lang="en-US" sz="1400" dirty="0"/>
+                            <a:t>0</a:t>
+                          </a:r>
+                        </a:p>
+                      </a:txBody>
+                      <a:tcPr/>
+                    </a:tc>
+                    <a:tc>
+                      <a:txBody>
+                        <a:bodyPr/>
+                        <a:lstStyle/>
+                        <a:p>
+                          <a:pPr algn="r"/>
+                          <a:r>
+                            <a:rPr lang="en-US" sz="1400" dirty="0"/>
+                            <a:t>0</a:t>
+                          </a:r>
+                        </a:p>
+                      </a:txBody>
+                      <a:tcPr/>
+                    </a:tc>
+                    <a:extLst>
+                      <a:ext uri="{0D108BD9-81ED-4DB2-BD59-A6C34878D82A}">
+                        <a16:rowId xmlns:a16="http://schemas.microsoft.com/office/drawing/2014/main" val="2128807898"/>
+                      </a:ext>
+                    </a:extLst>
+                  </a:tr>
+                  <a:tr h="232066">
+                    <a:tc>
+                      <a:txBody>
+                        <a:bodyPr/>
+                        <a:lstStyle/>
+                        <a:p>
+                          <a:pPr algn="r"/>
+                          <a:r>
+                            <a:rPr lang="en-US" sz="1400" dirty="0"/>
+                            <a:t>15</a:t>
+                          </a:r>
+                        </a:p>
+                      </a:txBody>
+                      <a:tcPr/>
+                    </a:tc>
+                    <a:tc>
+                      <a:txBody>
+                        <a:bodyPr/>
+                        <a:lstStyle/>
+                        <a:p>
+                          <a:pPr algn="r"/>
+                          <a:r>
+                            <a:rPr lang="en-US" sz="1400" dirty="0"/>
+                            <a:t>0</a:t>
+                          </a:r>
+                        </a:p>
+                      </a:txBody>
+                      <a:tcPr/>
+                    </a:tc>
+                    <a:tc>
+                      <a:txBody>
+                        <a:bodyPr/>
+                        <a:lstStyle/>
+                        <a:p>
+                          <a:pPr algn="r"/>
+                          <a:r>
+                            <a:rPr lang="en-US" sz="1400" dirty="0"/>
+                            <a:t>0</a:t>
+                          </a:r>
+                        </a:p>
+                      </a:txBody>
+                      <a:tcPr/>
+                    </a:tc>
+                    <a:tc>
+                      <a:txBody>
+                        <a:bodyPr/>
+                        <a:lstStyle/>
+                        <a:p>
+                          <a:pPr algn="r"/>
+                          <a:r>
+                            <a:rPr lang="en-US" sz="1400" dirty="0"/>
+                            <a:t>1</a:t>
+                          </a:r>
+                        </a:p>
+                      </a:txBody>
+                      <a:tcPr/>
+                    </a:tc>
+                    <a:extLst>
+                      <a:ext uri="{0D108BD9-81ED-4DB2-BD59-A6C34878D82A}">
+                        <a16:rowId xmlns:a16="http://schemas.microsoft.com/office/drawing/2014/main" val="1364655251"/>
+                      </a:ext>
+                    </a:extLst>
+                  </a:tr>
+                  <a:tr h="232066">
+                    <a:tc>
+                      <a:txBody>
+                        <a:bodyPr/>
+                        <a:lstStyle/>
+                        <a:p>
+                          <a:pPr algn="r"/>
+                          <a:r>
+                            <a:rPr lang="en-US" sz="1400" dirty="0"/>
+                            <a:t>5</a:t>
+                          </a:r>
+                        </a:p>
+                      </a:txBody>
+                      <a:tcPr/>
+                    </a:tc>
+                    <a:tc>
+                      <a:txBody>
+                        <a:bodyPr/>
+                        <a:lstStyle/>
+                        <a:p>
+                          <a:pPr algn="r"/>
+                          <a:r>
+                            <a:rPr lang="en-US" sz="1400" dirty="0"/>
+                            <a:t>0</a:t>
+                          </a:r>
+                        </a:p>
+                      </a:txBody>
+                      <a:tcPr/>
+                    </a:tc>
+                    <a:tc>
+                      <a:txBody>
+                        <a:bodyPr/>
+                        <a:lstStyle/>
+                        <a:p>
+                          <a:pPr algn="r"/>
+                          <a:r>
+                            <a:rPr lang="en-US" sz="1400" dirty="0"/>
+                            <a:t>0</a:t>
+                          </a:r>
+                        </a:p>
+                      </a:txBody>
+                      <a:tcPr/>
+                    </a:tc>
+                    <a:tc>
+                      <a:txBody>
+                        <a:bodyPr/>
+                        <a:lstStyle/>
+                        <a:p>
+                          <a:pPr algn="r"/>
+                          <a:r>
+                            <a:rPr lang="en-US" sz="1400" dirty="0"/>
+                            <a:t>-1</a:t>
+                          </a:r>
+                        </a:p>
+                      </a:txBody>
+                      <a:tcPr/>
+                    </a:tc>
+                    <a:extLst>
+                      <a:ext uri="{0D108BD9-81ED-4DB2-BD59-A6C34878D82A}">
+                        <a16:rowId xmlns:a16="http://schemas.microsoft.com/office/drawing/2014/main" val="2138160173"/>
+                      </a:ext>
+                    </a:extLst>
+                  </a:tr>
+                  <a:tr h="232066">
+                    <a:tc>
+                      <a:txBody>
+                        <a:bodyPr/>
+                        <a:lstStyle/>
+                        <a:p>
+                          <a:pPr algn="r"/>
+                          <a:r>
+                            <a:rPr lang="en-US" sz="1400" dirty="0"/>
+                            <a:t>15</a:t>
+                          </a:r>
+                        </a:p>
+                      </a:txBody>
+                      <a:tcPr/>
+                    </a:tc>
+                    <a:tc>
+                      <a:txBody>
+                        <a:bodyPr/>
+                        <a:lstStyle/>
+                        <a:p>
+                          <a:pPr algn="r"/>
+                          <a:r>
+                            <a:rPr lang="en-US" sz="1400" dirty="0"/>
+                            <a:t>0</a:t>
+                          </a:r>
+                        </a:p>
+                      </a:txBody>
+                      <a:tcPr/>
+                    </a:tc>
+                    <a:tc>
+                      <a:txBody>
+                        <a:bodyPr/>
+                        <a:lstStyle/>
+                        <a:p>
+                          <a:pPr algn="r"/>
+                          <a:r>
+                            <a:rPr lang="en-US" sz="1400" dirty="0"/>
+                            <a:t>1</a:t>
+                          </a:r>
+                        </a:p>
+                      </a:txBody>
+                      <a:tcPr/>
+                    </a:tc>
+                    <a:tc>
+                      <a:txBody>
+                        <a:bodyPr/>
+                        <a:lstStyle/>
+                        <a:p>
+                          <a:pPr algn="r"/>
+                          <a:r>
+                            <a:rPr lang="en-US" sz="1400" dirty="0"/>
+                            <a:t>0</a:t>
+                          </a:r>
+                        </a:p>
+                      </a:txBody>
+                      <a:tcPr/>
+                    </a:tc>
+                    <a:extLst>
+                      <a:ext uri="{0D108BD9-81ED-4DB2-BD59-A6C34878D82A}">
+                        <a16:rowId xmlns:a16="http://schemas.microsoft.com/office/drawing/2014/main" val="1665071660"/>
+                      </a:ext>
+                    </a:extLst>
+                  </a:tr>
+                  <a:tr h="232066">
+                    <a:tc>
+                      <a:txBody>
+                        <a:bodyPr/>
+                        <a:lstStyle/>
+                        <a:p>
+                          <a:pPr algn="r"/>
+                          <a:r>
+                            <a:rPr lang="en-US" sz="1400" dirty="0"/>
+                            <a:t>5</a:t>
+                          </a:r>
+                        </a:p>
+                      </a:txBody>
+                      <a:tcPr/>
+                    </a:tc>
+                    <a:tc>
+                      <a:txBody>
+                        <a:bodyPr/>
+                        <a:lstStyle/>
+                        <a:p>
+                          <a:pPr algn="r"/>
+                          <a:r>
+                            <a:rPr lang="en-US" sz="1400" dirty="0"/>
+                            <a:t>0</a:t>
+                          </a:r>
+                        </a:p>
+                      </a:txBody>
+                      <a:tcPr/>
+                    </a:tc>
+                    <a:tc>
+                      <a:txBody>
+                        <a:bodyPr/>
+                        <a:lstStyle/>
+                        <a:p>
+                          <a:pPr algn="r"/>
+                          <a:r>
+                            <a:rPr lang="en-US" sz="1400" dirty="0"/>
+                            <a:t>1</a:t>
+                          </a:r>
+                        </a:p>
+                      </a:txBody>
+                      <a:tcPr/>
+                    </a:tc>
+                    <a:tc>
+                      <a:txBody>
+                        <a:bodyPr/>
+                        <a:lstStyle/>
+                        <a:p>
+                          <a:pPr algn="r"/>
+                          <a:r>
+                            <a:rPr lang="en-US" sz="1400" dirty="0"/>
+                            <a:t>1</a:t>
+                          </a:r>
+                        </a:p>
+                      </a:txBody>
+                      <a:tcPr/>
+                    </a:tc>
+                    <a:extLst>
+                      <a:ext uri="{0D108BD9-81ED-4DB2-BD59-A6C34878D82A}">
+                        <a16:rowId xmlns:a16="http://schemas.microsoft.com/office/drawing/2014/main" val="1661388008"/>
+                      </a:ext>
+                    </a:extLst>
+                  </a:tr>
+                  <a:tr h="232066">
+                    <a:tc>
+                      <a:txBody>
+                        <a:bodyPr/>
+                        <a:lstStyle/>
+                        <a:p>
+                          <a:pPr algn="r"/>
+                          <a:r>
+                            <a:rPr lang="en-US" sz="1400" dirty="0"/>
+                            <a:t>15</a:t>
+                          </a:r>
+                        </a:p>
+                      </a:txBody>
+                      <a:tcPr/>
+                    </a:tc>
+                    <a:tc>
+                      <a:txBody>
+                        <a:bodyPr/>
+                        <a:lstStyle/>
+                        <a:p>
+                          <a:pPr algn="r"/>
+                          <a:r>
+                            <a:rPr lang="en-US" sz="1400" dirty="0"/>
+                            <a:t>1</a:t>
+                          </a:r>
+                        </a:p>
+                      </a:txBody>
+                      <a:tcPr/>
+                    </a:tc>
+                    <a:tc>
+                      <a:txBody>
+                        <a:bodyPr/>
+                        <a:lstStyle/>
+                        <a:p>
+                          <a:pPr algn="r"/>
+                          <a:r>
+                            <a:rPr lang="en-US" sz="1400" dirty="0"/>
+                            <a:t>1</a:t>
+                          </a:r>
+                        </a:p>
+                      </a:txBody>
+                      <a:tcPr/>
+                    </a:tc>
+                    <a:tc>
+                      <a:txBody>
+                        <a:bodyPr/>
+                        <a:lstStyle/>
+                        <a:p>
+                          <a:pPr algn="r"/>
+                          <a:r>
+                            <a:rPr lang="en-US" sz="1400" dirty="0"/>
+                            <a:t>0</a:t>
+                          </a:r>
+                        </a:p>
+                      </a:txBody>
+                      <a:tcPr/>
+                    </a:tc>
+                    <a:extLst>
+                      <a:ext uri="{0D108BD9-81ED-4DB2-BD59-A6C34878D82A}">
+                        <a16:rowId xmlns:a16="http://schemas.microsoft.com/office/drawing/2014/main" val="3997521818"/>
+                      </a:ext>
+                    </a:extLst>
+                  </a:tr>
+                  <a:tr h="232066">
+                    <a:tc>
+                      <a:txBody>
+                        <a:bodyPr/>
+                        <a:lstStyle/>
+                        <a:p>
+                          <a:pPr algn="r"/>
+                          <a:r>
+                            <a:rPr lang="en-US" sz="1400" dirty="0"/>
+                            <a:t>10</a:t>
+                          </a:r>
+                        </a:p>
+                      </a:txBody>
+                      <a:tcPr/>
+                    </a:tc>
+                    <a:tc>
+                      <a:txBody>
+                        <a:bodyPr/>
+                        <a:lstStyle/>
+                        <a:p>
+                          <a:pPr algn="r"/>
+                          <a:r>
+                            <a:rPr lang="en-US" sz="1400" dirty="0"/>
+                            <a:t>1</a:t>
+                          </a:r>
+                        </a:p>
+                      </a:txBody>
+                      <a:tcPr/>
+                    </a:tc>
+                    <a:tc>
+                      <a:txBody>
+                        <a:bodyPr/>
+                        <a:lstStyle/>
+                        <a:p>
+                          <a:pPr algn="r"/>
+                          <a:r>
+                            <a:rPr lang="en-US" sz="1400" dirty="0"/>
+                            <a:t>-1</a:t>
+                          </a:r>
+                        </a:p>
+                      </a:txBody>
+                      <a:tcPr/>
+                    </a:tc>
+                    <a:tc>
+                      <a:txBody>
+                        <a:bodyPr/>
+                        <a:lstStyle/>
+                        <a:p>
+                          <a:pPr algn="r"/>
+                          <a:r>
+                            <a:rPr lang="en-US" sz="1400" dirty="0"/>
+                            <a:t>0</a:t>
+                          </a:r>
+                        </a:p>
+                      </a:txBody>
+                      <a:tcPr/>
+                    </a:tc>
+                    <a:extLst>
+                      <a:ext uri="{0D108BD9-81ED-4DB2-BD59-A6C34878D82A}">
+                        <a16:rowId xmlns:a16="http://schemas.microsoft.com/office/drawing/2014/main" val="1052872398"/>
+                      </a:ext>
+                    </a:extLst>
+                  </a:tr>
+                  <a:tr h="232066">
+                    <a:tc>
+                      <a:txBody>
+                        <a:bodyPr/>
+                        <a:lstStyle/>
+                        <a:p>
+                          <a:pPr algn="r"/>
+                          <a:r>
+                            <a:rPr lang="en-US" sz="1400" dirty="0"/>
+                            <a:t>22</a:t>
+                          </a:r>
+                        </a:p>
+                      </a:txBody>
+                      <a:tcPr/>
+                    </a:tc>
+                    <a:tc>
+                      <a:txBody>
+                        <a:bodyPr/>
+                        <a:lstStyle/>
+                        <a:p>
+                          <a:pPr algn="r"/>
+                          <a:r>
+                            <a:rPr lang="en-US" sz="1400" dirty="0"/>
+                            <a:t>1</a:t>
+                          </a:r>
+                        </a:p>
+                      </a:txBody>
+                      <a:tcPr/>
+                    </a:tc>
+                    <a:tc>
+                      <a:txBody>
+                        <a:bodyPr/>
+                        <a:lstStyle/>
+                        <a:p>
+                          <a:pPr algn="r"/>
+                          <a:r>
+                            <a:rPr lang="en-US" sz="1400" dirty="0"/>
+                            <a:t>0</a:t>
+                          </a:r>
+                        </a:p>
+                      </a:txBody>
+                      <a:tcPr/>
+                    </a:tc>
+                    <a:tc>
+                      <a:txBody>
+                        <a:bodyPr/>
+                        <a:lstStyle/>
+                        <a:p>
+                          <a:pPr algn="r"/>
+                          <a:r>
+                            <a:rPr lang="en-US" sz="1400" dirty="0"/>
+                            <a:t>1</a:t>
+                          </a:r>
+                        </a:p>
+                      </a:txBody>
+                      <a:tcPr/>
+                    </a:tc>
+                    <a:extLst>
+                      <a:ext uri="{0D108BD9-81ED-4DB2-BD59-A6C34878D82A}">
+                        <a16:rowId xmlns:a16="http://schemas.microsoft.com/office/drawing/2014/main" val="2943653637"/>
+                      </a:ext>
+                    </a:extLst>
+                  </a:tr>
+                  <a:tr h="232066">
+                    <a:tc>
+                      <a:txBody>
+                        <a:bodyPr/>
+                        <a:lstStyle/>
+                        <a:p>
+                          <a:pPr algn="r"/>
+                          <a:r>
+                            <a:rPr lang="en-US" sz="1400" dirty="0"/>
+                            <a:t>10</a:t>
+                          </a:r>
+                        </a:p>
+                      </a:txBody>
+                      <a:tcPr/>
+                    </a:tc>
+                    <a:tc>
+                      <a:txBody>
+                        <a:bodyPr/>
+                        <a:lstStyle/>
+                        <a:p>
+                          <a:pPr algn="r"/>
+                          <a:r>
+                            <a:rPr lang="en-US" sz="1400" dirty="0"/>
+                            <a:t>1</a:t>
+                          </a:r>
+                        </a:p>
+                      </a:txBody>
+                      <a:tcPr/>
+                    </a:tc>
+                    <a:tc>
+                      <a:txBody>
+                        <a:bodyPr/>
+                        <a:lstStyle/>
+                        <a:p>
+                          <a:pPr algn="r"/>
+                          <a:r>
+                            <a:rPr lang="en-US" sz="1400" dirty="0"/>
+                            <a:t>0</a:t>
+                          </a:r>
+                        </a:p>
+                      </a:txBody>
+                      <a:tcPr/>
+                    </a:tc>
+                    <a:tc>
+                      <a:txBody>
+                        <a:bodyPr/>
+                        <a:lstStyle/>
+                        <a:p>
+                          <a:pPr algn="r"/>
+                          <a:r>
+                            <a:rPr lang="en-US" sz="1400" dirty="0"/>
+                            <a:t>-1</a:t>
+                          </a:r>
+                        </a:p>
+                      </a:txBody>
+                      <a:tcPr/>
+                    </a:tc>
+                    <a:extLst>
+                      <a:ext uri="{0D108BD9-81ED-4DB2-BD59-A6C34878D82A}">
+                        <a16:rowId xmlns:a16="http://schemas.microsoft.com/office/drawing/2014/main" val="781998362"/>
+                      </a:ext>
+                    </a:extLst>
+                  </a:tr>
+                  <a:tr h="232066">
+                    <a:tc>
+                      <a:txBody>
+                        <a:bodyPr/>
+                        <a:lstStyle/>
+                        <a:p>
+                          <a:pPr algn="r"/>
+                          <a:r>
+                            <a:rPr lang="en-US" sz="1400" dirty="0"/>
+                            <a:t>15</a:t>
+                          </a:r>
+                        </a:p>
+                      </a:txBody>
+                      <a:tcPr/>
+                    </a:tc>
+                    <a:tc>
+                      <a:txBody>
+                        <a:bodyPr/>
+                        <a:lstStyle/>
+                        <a:p>
+                          <a:pPr algn="r"/>
+                          <a:r>
+                            <a:rPr lang="en-US" sz="1400" dirty="0"/>
+                            <a:t>1</a:t>
+                          </a:r>
+                        </a:p>
+                      </a:txBody>
+                      <a:tcPr/>
+                    </a:tc>
+                    <a:tc>
+                      <a:txBody>
+                        <a:bodyPr/>
+                        <a:lstStyle/>
+                        <a:p>
+                          <a:pPr algn="r"/>
+                          <a:r>
+                            <a:rPr lang="en-US" sz="1400" dirty="0"/>
+                            <a:t>0</a:t>
+                          </a:r>
+                        </a:p>
+                      </a:txBody>
+                      <a:tcPr/>
+                    </a:tc>
+                    <a:tc>
+                      <a:txBody>
+                        <a:bodyPr/>
+                        <a:lstStyle/>
+                        <a:p>
+                          <a:pPr algn="r"/>
+                          <a:r>
+                            <a:rPr lang="en-US" sz="1400" dirty="0"/>
+                            <a:t>0</a:t>
+                          </a:r>
+                        </a:p>
+                      </a:txBody>
+                      <a:tcPr/>
+                    </a:tc>
+                    <a:extLst>
+                      <a:ext uri="{0D108BD9-81ED-4DB2-BD59-A6C34878D82A}">
+                        <a16:rowId xmlns:a16="http://schemas.microsoft.com/office/drawing/2014/main" val="1831228980"/>
+                      </a:ext>
+                    </a:extLst>
+                  </a:tr>
+                </a:tbl>
+              </a:graphicData>
+            </a:graphic>
+          </p:graphicFrame>
+        </mc:Choice>
+        <mc:Fallback>
+          <p:graphicFrame>
+            <p:nvGraphicFramePr>
+              <p:cNvPr id="11" name="Table 5">
+                <a:extLst>
+                  <a:ext uri="{FF2B5EF4-FFF2-40B4-BE49-F238E27FC236}">
+                    <a16:creationId xmlns:a16="http://schemas.microsoft.com/office/drawing/2014/main" id="{EA326C96-3A4D-B09B-2783-46F571BEFAB0}"/>
+                  </a:ext>
+                </a:extLst>
+              </p:cNvPr>
+              <p:cNvGraphicFramePr>
+                <a:graphicFrameLocks noGrp="1"/>
+              </p:cNvGraphicFramePr>
+              <p:nvPr>
+                <p:extLst>
+                  <p:ext uri="{D42A27DB-BD31-4B8C-83A1-F6EECF244321}">
+                    <p14:modId xmlns:p14="http://schemas.microsoft.com/office/powerpoint/2010/main" val="3544722353"/>
+                  </p:ext>
+                </p:extLst>
+              </p:nvPr>
+            </p:nvGraphicFramePr>
+            <p:xfrm>
+              <a:off x="5875242" y="409282"/>
+              <a:ext cx="2818615" cy="6105335"/>
+            </p:xfrm>
+            <a:graphic>
+              <a:graphicData uri="http://schemas.openxmlformats.org/drawingml/2006/table">
+                <a:tbl>
+                  <a:tblPr firstRow="1" bandRow="1">
+                    <a:tableStyleId>{5C22544A-7EE6-4342-B048-85BDC9FD1C3A}</a:tableStyleId>
+                  </a:tblPr>
+                  <a:tblGrid>
+                    <a:gridCol w="1220789">
+                      <a:extLst>
+                        <a:ext uri="{9D8B030D-6E8A-4147-A177-3AD203B41FA5}">
+                          <a16:colId xmlns:a16="http://schemas.microsoft.com/office/drawing/2014/main" val="261299034"/>
+                        </a:ext>
+                      </a:extLst>
+                    </a:gridCol>
+                    <a:gridCol w="502063">
+                      <a:extLst>
+                        <a:ext uri="{9D8B030D-6E8A-4147-A177-3AD203B41FA5}">
+                          <a16:colId xmlns:a16="http://schemas.microsoft.com/office/drawing/2014/main" val="1664871799"/>
+                        </a:ext>
+                      </a:extLst>
+                    </a:gridCol>
+                    <a:gridCol w="564484">
+                      <a:extLst>
+                        <a:ext uri="{9D8B030D-6E8A-4147-A177-3AD203B41FA5}">
+                          <a16:colId xmlns:a16="http://schemas.microsoft.com/office/drawing/2014/main" val="3741325556"/>
+                        </a:ext>
+                      </a:extLst>
+                    </a:gridCol>
+                    <a:gridCol w="531279">
+                      <a:extLst>
+                        <a:ext uri="{9D8B030D-6E8A-4147-A177-3AD203B41FA5}">
+                          <a16:colId xmlns:a16="http://schemas.microsoft.com/office/drawing/2014/main" val="4264674326"/>
+                        </a:ext>
+                      </a:extLst>
+                    </a:gridCol>
+                  </a:tblGrid>
+                  <a:tr h="314135">
+                    <a:tc>
+                      <a:txBody>
+                        <a:bodyPr/>
+                        <a:lstStyle/>
+                        <a:p>
+                          <a:endParaRPr lang="en-US"/>
+                        </a:p>
+                      </a:txBody>
+                      <a:tcPr>
+                        <a:blipFill>
+                          <a:blip r:embed="rId7"/>
+                          <a:stretch>
+                            <a:fillRect l="-1031" t="-4000" r="-131959" b="-1848000"/>
+                          </a:stretch>
+                        </a:blipFill>
+                      </a:tcPr>
+                    </a:tc>
+                    <a:tc>
+                      <a:txBody>
+                        <a:bodyPr/>
+                        <a:lstStyle/>
+                        <a:p>
+                          <a:pPr algn="ctr"/>
+                          <a:r>
+                            <a:rPr lang="en-US" sz="1400" dirty="0"/>
+                            <a:t>F1</a:t>
+                          </a:r>
+                        </a:p>
+                      </a:txBody>
+                      <a:tcPr/>
+                    </a:tc>
+                    <a:tc>
+                      <a:txBody>
+                        <a:bodyPr/>
+                        <a:lstStyle/>
+                        <a:p>
+                          <a:pPr algn="ctr"/>
+                          <a:r>
+                            <a:rPr lang="en-US" sz="1400" dirty="0"/>
+                            <a:t>F2</a:t>
+                          </a:r>
+                        </a:p>
+                      </a:txBody>
+                      <a:tcPr/>
+                    </a:tc>
+                    <a:tc>
+                      <a:txBody>
+                        <a:bodyPr/>
+                        <a:lstStyle/>
+                        <a:p>
+                          <a:pPr algn="ctr"/>
+                          <a:r>
+                            <a:rPr lang="en-US" sz="1400" dirty="0"/>
+                            <a:t>F3</a:t>
+                          </a:r>
+                        </a:p>
+                      </a:txBody>
+                      <a:tcPr/>
+                    </a:tc>
+                    <a:extLst>
+                      <a:ext uri="{0D108BD9-81ED-4DB2-BD59-A6C34878D82A}">
+                        <a16:rowId xmlns:a16="http://schemas.microsoft.com/office/drawing/2014/main" val="604855401"/>
+                      </a:ext>
+                    </a:extLst>
+                  </a:tr>
+                  <a:tr h="304800">
+                    <a:tc>
+                      <a:txBody>
+                        <a:bodyPr/>
+                        <a:lstStyle/>
+                        <a:p>
+                          <a:pPr algn="r"/>
+                          <a:r>
+                            <a:rPr lang="en-US" sz="1400" dirty="0"/>
+                            <a:t>-2</a:t>
+                          </a:r>
+                        </a:p>
+                      </a:txBody>
+                      <a:tcPr/>
+                    </a:tc>
+                    <a:tc>
+                      <a:txBody>
+                        <a:bodyPr/>
+                        <a:lstStyle/>
+                        <a:p>
+                          <a:pPr algn="r"/>
+                          <a:r>
+                            <a:rPr lang="en-US" sz="1400" dirty="0"/>
+                            <a:t>-1</a:t>
+                          </a:r>
+                        </a:p>
+                      </a:txBody>
+                      <a:tcPr/>
+                    </a:tc>
+                    <a:tc>
+                      <a:txBody>
+                        <a:bodyPr/>
+                        <a:lstStyle/>
+                        <a:p>
+                          <a:pPr algn="r"/>
+                          <a:r>
+                            <a:rPr lang="en-US" sz="1400" dirty="0"/>
+                            <a:t>-1</a:t>
+                          </a:r>
+                        </a:p>
+                      </a:txBody>
+                      <a:tcPr/>
+                    </a:tc>
+                    <a:tc>
+                      <a:txBody>
+                        <a:bodyPr/>
+                        <a:lstStyle/>
+                        <a:p>
+                          <a:pPr algn="r"/>
+                          <a:r>
+                            <a:rPr lang="en-US" sz="1400" dirty="0"/>
+                            <a:t>0</a:t>
+                          </a:r>
+                        </a:p>
+                      </a:txBody>
+                      <a:tcPr/>
+                    </a:tc>
+                    <a:extLst>
+                      <a:ext uri="{0D108BD9-81ED-4DB2-BD59-A6C34878D82A}">
+                        <a16:rowId xmlns:a16="http://schemas.microsoft.com/office/drawing/2014/main" val="3261454787"/>
+                      </a:ext>
+                    </a:extLst>
+                  </a:tr>
+                  <a:tr h="304800">
+                    <a:tc>
+                      <a:txBody>
+                        <a:bodyPr/>
+                        <a:lstStyle/>
+                        <a:p>
+                          <a:pPr algn="r"/>
+                          <a:r>
+                            <a:rPr lang="en-US" sz="1400" dirty="0"/>
+                            <a:t>-2</a:t>
+                          </a:r>
+                        </a:p>
+                      </a:txBody>
+                      <a:tcPr/>
+                    </a:tc>
+                    <a:tc>
+                      <a:txBody>
+                        <a:bodyPr/>
+                        <a:lstStyle/>
+                        <a:p>
+                          <a:pPr algn="r"/>
+                          <a:r>
+                            <a:rPr lang="en-US" sz="1400" dirty="0"/>
+                            <a:t>-1</a:t>
+                          </a:r>
+                        </a:p>
+                      </a:txBody>
+                      <a:tcPr/>
+                    </a:tc>
+                    <a:tc>
+                      <a:txBody>
+                        <a:bodyPr/>
+                        <a:lstStyle/>
+                        <a:p>
+                          <a:pPr algn="r"/>
+                          <a:r>
+                            <a:rPr lang="en-US" sz="1400" dirty="0"/>
+                            <a:t>0</a:t>
+                          </a:r>
+                        </a:p>
+                      </a:txBody>
+                      <a:tcPr/>
+                    </a:tc>
+                    <a:tc>
+                      <a:txBody>
+                        <a:bodyPr/>
+                        <a:lstStyle/>
+                        <a:p>
+                          <a:pPr algn="r"/>
+                          <a:r>
+                            <a:rPr lang="en-US" sz="1400" dirty="0"/>
+                            <a:t>-1</a:t>
+                          </a:r>
+                        </a:p>
+                      </a:txBody>
+                      <a:tcPr/>
+                    </a:tc>
+                    <a:extLst>
+                      <a:ext uri="{0D108BD9-81ED-4DB2-BD59-A6C34878D82A}">
+                        <a16:rowId xmlns:a16="http://schemas.microsoft.com/office/drawing/2014/main" val="1208064450"/>
+                      </a:ext>
+                    </a:extLst>
+                  </a:tr>
+                  <a:tr h="304800">
+                    <a:tc>
+                      <a:txBody>
+                        <a:bodyPr/>
+                        <a:lstStyle/>
+                        <a:p>
+                          <a:pPr algn="r"/>
+                          <a:r>
+                            <a:rPr lang="en-US" sz="1400" dirty="0"/>
+                            <a:t>5</a:t>
+                          </a:r>
+                        </a:p>
+                      </a:txBody>
+                      <a:tcPr/>
+                    </a:tc>
+                    <a:tc>
+                      <a:txBody>
+                        <a:bodyPr/>
+                        <a:lstStyle/>
+                        <a:p>
+                          <a:pPr algn="r"/>
+                          <a:r>
+                            <a:rPr lang="en-US" sz="1400" dirty="0"/>
+                            <a:t>-1</a:t>
+                          </a:r>
+                        </a:p>
+                      </a:txBody>
+                      <a:tcPr/>
+                    </a:tc>
+                    <a:tc>
+                      <a:txBody>
+                        <a:bodyPr/>
+                        <a:lstStyle/>
+                        <a:p>
+                          <a:pPr algn="r"/>
+                          <a:r>
+                            <a:rPr lang="en-US" sz="1400" dirty="0"/>
+                            <a:t>0</a:t>
+                          </a:r>
+                        </a:p>
+                      </a:txBody>
+                      <a:tcPr/>
+                    </a:tc>
+                    <a:tc>
+                      <a:txBody>
+                        <a:bodyPr/>
+                        <a:lstStyle/>
+                        <a:p>
+                          <a:pPr algn="r"/>
+                          <a:r>
+                            <a:rPr lang="en-US" sz="1400" dirty="0"/>
+                            <a:t>0</a:t>
+                          </a:r>
+                        </a:p>
+                      </a:txBody>
+                      <a:tcPr/>
+                    </a:tc>
+                    <a:extLst>
+                      <a:ext uri="{0D108BD9-81ED-4DB2-BD59-A6C34878D82A}">
+                        <a16:rowId xmlns:a16="http://schemas.microsoft.com/office/drawing/2014/main" val="3021756256"/>
+                      </a:ext>
+                    </a:extLst>
+                  </a:tr>
+                  <a:tr h="304800">
+                    <a:tc>
+                      <a:txBody>
+                        <a:bodyPr/>
+                        <a:lstStyle/>
+                        <a:p>
+                          <a:pPr algn="r"/>
+                          <a:r>
+                            <a:rPr lang="en-US" sz="1400" dirty="0"/>
+                            <a:t>10</a:t>
+                          </a:r>
+                        </a:p>
+                      </a:txBody>
+                      <a:tcPr/>
+                    </a:tc>
+                    <a:tc>
+                      <a:txBody>
+                        <a:bodyPr/>
+                        <a:lstStyle/>
+                        <a:p>
+                          <a:pPr algn="r"/>
+                          <a:r>
+                            <a:rPr lang="en-US" sz="1400" dirty="0"/>
+                            <a:t>-1</a:t>
+                          </a:r>
+                        </a:p>
+                      </a:txBody>
+                      <a:tcPr/>
+                    </a:tc>
+                    <a:tc>
+                      <a:txBody>
+                        <a:bodyPr/>
+                        <a:lstStyle/>
+                        <a:p>
+                          <a:pPr algn="r"/>
+                          <a:r>
+                            <a:rPr lang="en-US" sz="1400" dirty="0"/>
+                            <a:t>0</a:t>
+                          </a:r>
+                        </a:p>
+                      </a:txBody>
+                      <a:tcPr/>
+                    </a:tc>
+                    <a:tc>
+                      <a:txBody>
+                        <a:bodyPr/>
+                        <a:lstStyle/>
+                        <a:p>
+                          <a:pPr algn="r"/>
+                          <a:r>
+                            <a:rPr lang="en-US" sz="1400" dirty="0"/>
+                            <a:t>1</a:t>
+                          </a:r>
+                        </a:p>
+                      </a:txBody>
+                      <a:tcPr/>
+                    </a:tc>
+                    <a:extLst>
+                      <a:ext uri="{0D108BD9-81ED-4DB2-BD59-A6C34878D82A}">
+                        <a16:rowId xmlns:a16="http://schemas.microsoft.com/office/drawing/2014/main" val="2565100349"/>
+                      </a:ext>
+                    </a:extLst>
+                  </a:tr>
+                  <a:tr h="304800">
+                    <a:tc>
+                      <a:txBody>
+                        <a:bodyPr/>
+                        <a:lstStyle/>
+                        <a:p>
+                          <a:pPr algn="r"/>
+                          <a:r>
+                            <a:rPr lang="en-US" sz="1400" dirty="0"/>
+                            <a:t>10</a:t>
+                          </a:r>
+                        </a:p>
+                      </a:txBody>
+                      <a:tcPr/>
+                    </a:tc>
+                    <a:tc>
+                      <a:txBody>
+                        <a:bodyPr/>
+                        <a:lstStyle/>
+                        <a:p>
+                          <a:pPr algn="r"/>
+                          <a:r>
+                            <a:rPr lang="en-US" sz="1400" dirty="0"/>
+                            <a:t>-1</a:t>
+                          </a:r>
+                        </a:p>
+                      </a:txBody>
+                      <a:tcPr/>
+                    </a:tc>
+                    <a:tc>
+                      <a:txBody>
+                        <a:bodyPr/>
+                        <a:lstStyle/>
+                        <a:p>
+                          <a:pPr algn="r"/>
+                          <a:r>
+                            <a:rPr lang="en-US" sz="1400" dirty="0"/>
+                            <a:t>1</a:t>
+                          </a:r>
+                        </a:p>
+                      </a:txBody>
+                      <a:tcPr/>
+                    </a:tc>
+                    <a:tc>
+                      <a:txBody>
+                        <a:bodyPr/>
+                        <a:lstStyle/>
+                        <a:p>
+                          <a:pPr algn="r"/>
+                          <a:r>
+                            <a:rPr lang="en-US" sz="1400" dirty="0"/>
+                            <a:t>0</a:t>
+                          </a:r>
+                        </a:p>
+                      </a:txBody>
+                      <a:tcPr/>
+                    </a:tc>
+                    <a:extLst>
+                      <a:ext uri="{0D108BD9-81ED-4DB2-BD59-A6C34878D82A}">
+                        <a16:rowId xmlns:a16="http://schemas.microsoft.com/office/drawing/2014/main" val="3746517152"/>
+                      </a:ext>
+                    </a:extLst>
+                  </a:tr>
+                  <a:tr h="304800">
+                    <a:tc>
+                      <a:txBody>
+                        <a:bodyPr/>
+                        <a:lstStyle/>
+                        <a:p>
+                          <a:pPr algn="r"/>
+                          <a:r>
+                            <a:rPr lang="en-US" sz="1400" dirty="0"/>
+                            <a:t>10</a:t>
+                          </a:r>
+                        </a:p>
+                      </a:txBody>
+                      <a:tcPr/>
+                    </a:tc>
+                    <a:tc>
+                      <a:txBody>
+                        <a:bodyPr/>
+                        <a:lstStyle/>
+                        <a:p>
+                          <a:pPr algn="r"/>
+                          <a:r>
+                            <a:rPr lang="en-US" sz="1400" dirty="0"/>
+                            <a:t>0</a:t>
+                          </a:r>
+                        </a:p>
+                      </a:txBody>
+                      <a:tcPr/>
+                    </a:tc>
+                    <a:tc>
+                      <a:txBody>
+                        <a:bodyPr/>
+                        <a:lstStyle/>
+                        <a:p>
+                          <a:pPr algn="r"/>
+                          <a:r>
+                            <a:rPr lang="en-US" sz="1400" dirty="0"/>
+                            <a:t>1</a:t>
+                          </a:r>
+                        </a:p>
+                      </a:txBody>
+                      <a:tcPr/>
+                    </a:tc>
+                    <a:tc>
+                      <a:txBody>
+                        <a:bodyPr/>
+                        <a:lstStyle/>
+                        <a:p>
+                          <a:pPr algn="r"/>
+                          <a:r>
+                            <a:rPr lang="en-US" sz="1400" dirty="0"/>
+                            <a:t>-1</a:t>
+                          </a:r>
+                        </a:p>
+                      </a:txBody>
+                      <a:tcPr/>
+                    </a:tc>
+                    <a:extLst>
+                      <a:ext uri="{0D108BD9-81ED-4DB2-BD59-A6C34878D82A}">
+                        <a16:rowId xmlns:a16="http://schemas.microsoft.com/office/drawing/2014/main" val="2077409460"/>
+                      </a:ext>
+                    </a:extLst>
+                  </a:tr>
+                  <a:tr h="304800">
+                    <a:tc>
+                      <a:txBody>
+                        <a:bodyPr/>
+                        <a:lstStyle/>
+                        <a:p>
+                          <a:pPr algn="r"/>
+                          <a:r>
+                            <a:rPr lang="en-US" sz="1400" dirty="0"/>
+                            <a:t>5</a:t>
+                          </a:r>
+                        </a:p>
+                      </a:txBody>
+                      <a:tcPr/>
+                    </a:tc>
+                    <a:tc>
+                      <a:txBody>
+                        <a:bodyPr/>
+                        <a:lstStyle/>
+                        <a:p>
+                          <a:pPr algn="r"/>
+                          <a:r>
+                            <a:rPr lang="en-US" sz="1400" dirty="0"/>
+                            <a:t>0</a:t>
+                          </a:r>
+                        </a:p>
+                      </a:txBody>
+                      <a:tcPr/>
+                    </a:tc>
+                    <a:tc>
+                      <a:txBody>
+                        <a:bodyPr/>
+                        <a:lstStyle/>
+                        <a:p>
+                          <a:pPr algn="r"/>
+                          <a:r>
+                            <a:rPr lang="en-US" sz="1400" dirty="0"/>
+                            <a:t>-1</a:t>
+                          </a:r>
+                        </a:p>
+                      </a:txBody>
+                      <a:tcPr/>
+                    </a:tc>
+                    <a:tc>
+                      <a:txBody>
+                        <a:bodyPr/>
+                        <a:lstStyle/>
+                        <a:p>
+                          <a:pPr algn="r"/>
+                          <a:r>
+                            <a:rPr lang="en-US" sz="1400" dirty="0"/>
+                            <a:t>0</a:t>
+                          </a:r>
+                        </a:p>
+                      </a:txBody>
+                      <a:tcPr/>
+                    </a:tc>
+                    <a:extLst>
+                      <a:ext uri="{0D108BD9-81ED-4DB2-BD59-A6C34878D82A}">
+                        <a16:rowId xmlns:a16="http://schemas.microsoft.com/office/drawing/2014/main" val="3681507901"/>
+                      </a:ext>
+                    </a:extLst>
+                  </a:tr>
+                  <a:tr h="304800">
+                    <a:tc>
+                      <a:txBody>
+                        <a:bodyPr/>
+                        <a:lstStyle/>
+                        <a:p>
+                          <a:pPr algn="r"/>
+                          <a:r>
+                            <a:rPr lang="en-US" sz="1400" dirty="0"/>
+                            <a:t>10</a:t>
+                          </a:r>
+                        </a:p>
+                      </a:txBody>
+                      <a:tcPr/>
+                    </a:tc>
+                    <a:tc>
+                      <a:txBody>
+                        <a:bodyPr/>
+                        <a:lstStyle/>
+                        <a:p>
+                          <a:pPr algn="r"/>
+                          <a:r>
+                            <a:rPr lang="en-US" sz="1400" dirty="0"/>
+                            <a:t>0</a:t>
+                          </a:r>
+                        </a:p>
+                      </a:txBody>
+                      <a:tcPr/>
+                    </a:tc>
+                    <a:tc>
+                      <a:txBody>
+                        <a:bodyPr/>
+                        <a:lstStyle/>
+                        <a:p>
+                          <a:pPr algn="r"/>
+                          <a:r>
+                            <a:rPr lang="en-US" sz="1400" dirty="0"/>
+                            <a:t>-1</a:t>
+                          </a:r>
+                        </a:p>
+                      </a:txBody>
+                      <a:tcPr/>
+                    </a:tc>
+                    <a:tc>
+                      <a:txBody>
+                        <a:bodyPr/>
+                        <a:lstStyle/>
+                        <a:p>
+                          <a:pPr algn="r"/>
+                          <a:r>
+                            <a:rPr lang="en-US" sz="1400" dirty="0"/>
+                            <a:t>1</a:t>
+                          </a:r>
+                        </a:p>
+                      </a:txBody>
+                      <a:tcPr/>
+                    </a:tc>
+                    <a:extLst>
+                      <a:ext uri="{0D108BD9-81ED-4DB2-BD59-A6C34878D82A}">
+                        <a16:rowId xmlns:a16="http://schemas.microsoft.com/office/drawing/2014/main" val="2265201886"/>
+                      </a:ext>
+                    </a:extLst>
+                  </a:tr>
+                  <a:tr h="304800">
+                    <a:tc>
+                      <a:txBody>
+                        <a:bodyPr/>
+                        <a:lstStyle/>
+                        <a:p>
+                          <a:pPr algn="r"/>
+                          <a:r>
+                            <a:rPr lang="en-US" sz="1400" dirty="0"/>
+                            <a:t>-2</a:t>
+                          </a:r>
+                        </a:p>
+                      </a:txBody>
+                      <a:tcPr/>
+                    </a:tc>
+                    <a:tc>
+                      <a:txBody>
+                        <a:bodyPr/>
+                        <a:lstStyle/>
+                        <a:p>
+                          <a:pPr algn="r"/>
+                          <a:r>
+                            <a:rPr lang="en-US" sz="1400" dirty="0"/>
+                            <a:t>0</a:t>
+                          </a:r>
+                        </a:p>
+                      </a:txBody>
+                      <a:tcPr/>
+                    </a:tc>
+                    <a:tc>
+                      <a:txBody>
+                        <a:bodyPr/>
+                        <a:lstStyle/>
+                        <a:p>
+                          <a:pPr algn="r"/>
+                          <a:r>
+                            <a:rPr lang="en-US" sz="1400" dirty="0"/>
+                            <a:t>-1</a:t>
+                          </a:r>
+                        </a:p>
+                      </a:txBody>
+                      <a:tcPr/>
+                    </a:tc>
+                    <a:tc>
+                      <a:txBody>
+                        <a:bodyPr/>
+                        <a:lstStyle/>
+                        <a:p>
+                          <a:pPr algn="r"/>
+                          <a:r>
+                            <a:rPr lang="en-US" sz="1400" dirty="0"/>
+                            <a:t>-1</a:t>
+                          </a:r>
+                        </a:p>
+                      </a:txBody>
+                      <a:tcPr/>
+                    </a:tc>
+                    <a:extLst>
+                      <a:ext uri="{0D108BD9-81ED-4DB2-BD59-A6C34878D82A}">
+                        <a16:rowId xmlns:a16="http://schemas.microsoft.com/office/drawing/2014/main" val="2609108840"/>
+                      </a:ext>
+                    </a:extLst>
+                  </a:tr>
+                  <a:tr h="304800">
+                    <a:tc>
+                      <a:txBody>
+                        <a:bodyPr/>
+                        <a:lstStyle/>
+                        <a:p>
+                          <a:pPr algn="r"/>
+                          <a:r>
+                            <a:rPr lang="en-US" sz="1400" dirty="0"/>
+                            <a:t>10</a:t>
+                          </a:r>
+                        </a:p>
+                      </a:txBody>
+                      <a:tcPr/>
+                    </a:tc>
+                    <a:tc>
+                      <a:txBody>
+                        <a:bodyPr/>
+                        <a:lstStyle/>
+                        <a:p>
+                          <a:pPr algn="r"/>
+                          <a:r>
+                            <a:rPr lang="en-US" sz="1400" dirty="0"/>
+                            <a:t>0</a:t>
+                          </a:r>
+                        </a:p>
+                      </a:txBody>
+                      <a:tcPr/>
+                    </a:tc>
+                    <a:tc>
+                      <a:txBody>
+                        <a:bodyPr/>
+                        <a:lstStyle/>
+                        <a:p>
+                          <a:pPr algn="r"/>
+                          <a:r>
+                            <a:rPr lang="en-US" sz="1400" dirty="0"/>
+                            <a:t>0</a:t>
+                          </a:r>
+                        </a:p>
+                      </a:txBody>
+                      <a:tcPr/>
+                    </a:tc>
+                    <a:tc>
+                      <a:txBody>
+                        <a:bodyPr/>
+                        <a:lstStyle/>
+                        <a:p>
+                          <a:pPr algn="r"/>
+                          <a:r>
+                            <a:rPr lang="en-US" sz="1400" dirty="0"/>
+                            <a:t>0</a:t>
+                          </a:r>
+                        </a:p>
+                      </a:txBody>
+                      <a:tcPr/>
+                    </a:tc>
+                    <a:extLst>
+                      <a:ext uri="{0D108BD9-81ED-4DB2-BD59-A6C34878D82A}">
+                        <a16:rowId xmlns:a16="http://schemas.microsoft.com/office/drawing/2014/main" val="2128807898"/>
+                      </a:ext>
+                    </a:extLst>
+                  </a:tr>
+                  <a:tr h="304800">
+                    <a:tc>
+                      <a:txBody>
+                        <a:bodyPr/>
+                        <a:lstStyle/>
+                        <a:p>
+                          <a:pPr algn="r"/>
+                          <a:r>
+                            <a:rPr lang="en-US" sz="1400" dirty="0"/>
+                            <a:t>15</a:t>
+                          </a:r>
+                        </a:p>
+                      </a:txBody>
+                      <a:tcPr/>
+                    </a:tc>
+                    <a:tc>
+                      <a:txBody>
+                        <a:bodyPr/>
+                        <a:lstStyle/>
+                        <a:p>
+                          <a:pPr algn="r"/>
+                          <a:r>
+                            <a:rPr lang="en-US" sz="1400" dirty="0"/>
+                            <a:t>0</a:t>
+                          </a:r>
+                        </a:p>
+                      </a:txBody>
+                      <a:tcPr/>
+                    </a:tc>
+                    <a:tc>
+                      <a:txBody>
+                        <a:bodyPr/>
+                        <a:lstStyle/>
+                        <a:p>
+                          <a:pPr algn="r"/>
+                          <a:r>
+                            <a:rPr lang="en-US" sz="1400" dirty="0"/>
+                            <a:t>0</a:t>
+                          </a:r>
+                        </a:p>
+                      </a:txBody>
+                      <a:tcPr/>
+                    </a:tc>
+                    <a:tc>
+                      <a:txBody>
+                        <a:bodyPr/>
+                        <a:lstStyle/>
+                        <a:p>
+                          <a:pPr algn="r"/>
+                          <a:r>
+                            <a:rPr lang="en-US" sz="1400" dirty="0"/>
+                            <a:t>1</a:t>
+                          </a:r>
+                        </a:p>
+                      </a:txBody>
+                      <a:tcPr/>
+                    </a:tc>
+                    <a:extLst>
+                      <a:ext uri="{0D108BD9-81ED-4DB2-BD59-A6C34878D82A}">
+                        <a16:rowId xmlns:a16="http://schemas.microsoft.com/office/drawing/2014/main" val="1364655251"/>
+                      </a:ext>
+                    </a:extLst>
+                  </a:tr>
+                  <a:tr h="304800">
+                    <a:tc>
+                      <a:txBody>
+                        <a:bodyPr/>
+                        <a:lstStyle/>
+                        <a:p>
+                          <a:pPr algn="r"/>
+                          <a:r>
+                            <a:rPr lang="en-US" sz="1400" dirty="0"/>
+                            <a:t>5</a:t>
+                          </a:r>
+                        </a:p>
+                      </a:txBody>
+                      <a:tcPr/>
+                    </a:tc>
+                    <a:tc>
+                      <a:txBody>
+                        <a:bodyPr/>
+                        <a:lstStyle/>
+                        <a:p>
+                          <a:pPr algn="r"/>
+                          <a:r>
+                            <a:rPr lang="en-US" sz="1400" dirty="0"/>
+                            <a:t>0</a:t>
+                          </a:r>
+                        </a:p>
+                      </a:txBody>
+                      <a:tcPr/>
+                    </a:tc>
+                    <a:tc>
+                      <a:txBody>
+                        <a:bodyPr/>
+                        <a:lstStyle/>
+                        <a:p>
+                          <a:pPr algn="r"/>
+                          <a:r>
+                            <a:rPr lang="en-US" sz="1400" dirty="0"/>
+                            <a:t>0</a:t>
+                          </a:r>
+                        </a:p>
+                      </a:txBody>
+                      <a:tcPr/>
+                    </a:tc>
+                    <a:tc>
+                      <a:txBody>
+                        <a:bodyPr/>
+                        <a:lstStyle/>
+                        <a:p>
+                          <a:pPr algn="r"/>
+                          <a:r>
+                            <a:rPr lang="en-US" sz="1400" dirty="0"/>
+                            <a:t>-1</a:t>
+                          </a:r>
+                        </a:p>
+                      </a:txBody>
+                      <a:tcPr/>
+                    </a:tc>
+                    <a:extLst>
+                      <a:ext uri="{0D108BD9-81ED-4DB2-BD59-A6C34878D82A}">
+                        <a16:rowId xmlns:a16="http://schemas.microsoft.com/office/drawing/2014/main" val="2138160173"/>
+                      </a:ext>
+                    </a:extLst>
+                  </a:tr>
+                  <a:tr h="304800">
+                    <a:tc>
+                      <a:txBody>
+                        <a:bodyPr/>
+                        <a:lstStyle/>
+                        <a:p>
+                          <a:pPr algn="r"/>
+                          <a:r>
+                            <a:rPr lang="en-US" sz="1400" dirty="0"/>
+                            <a:t>15</a:t>
+                          </a:r>
+                        </a:p>
+                      </a:txBody>
+                      <a:tcPr/>
+                    </a:tc>
+                    <a:tc>
+                      <a:txBody>
+                        <a:bodyPr/>
+                        <a:lstStyle/>
+                        <a:p>
+                          <a:pPr algn="r"/>
+                          <a:r>
+                            <a:rPr lang="en-US" sz="1400" dirty="0"/>
+                            <a:t>0</a:t>
+                          </a:r>
+                        </a:p>
+                      </a:txBody>
+                      <a:tcPr/>
+                    </a:tc>
+                    <a:tc>
+                      <a:txBody>
+                        <a:bodyPr/>
+                        <a:lstStyle/>
+                        <a:p>
+                          <a:pPr algn="r"/>
+                          <a:r>
+                            <a:rPr lang="en-US" sz="1400" dirty="0"/>
+                            <a:t>1</a:t>
+                          </a:r>
+                        </a:p>
+                      </a:txBody>
+                      <a:tcPr/>
+                    </a:tc>
+                    <a:tc>
+                      <a:txBody>
+                        <a:bodyPr/>
+                        <a:lstStyle/>
+                        <a:p>
+                          <a:pPr algn="r"/>
+                          <a:r>
+                            <a:rPr lang="en-US" sz="1400" dirty="0"/>
+                            <a:t>0</a:t>
+                          </a:r>
+                        </a:p>
+                      </a:txBody>
+                      <a:tcPr/>
+                    </a:tc>
+                    <a:extLst>
+                      <a:ext uri="{0D108BD9-81ED-4DB2-BD59-A6C34878D82A}">
+                        <a16:rowId xmlns:a16="http://schemas.microsoft.com/office/drawing/2014/main" val="1665071660"/>
+                      </a:ext>
+                    </a:extLst>
+                  </a:tr>
+                  <a:tr h="304800">
+                    <a:tc>
+                      <a:txBody>
+                        <a:bodyPr/>
+                        <a:lstStyle/>
+                        <a:p>
+                          <a:pPr algn="r"/>
+                          <a:r>
+                            <a:rPr lang="en-US" sz="1400" dirty="0"/>
+                            <a:t>5</a:t>
+                          </a:r>
+                        </a:p>
+                      </a:txBody>
+                      <a:tcPr/>
+                    </a:tc>
+                    <a:tc>
+                      <a:txBody>
+                        <a:bodyPr/>
+                        <a:lstStyle/>
+                        <a:p>
+                          <a:pPr algn="r"/>
+                          <a:r>
+                            <a:rPr lang="en-US" sz="1400" dirty="0"/>
+                            <a:t>0</a:t>
+                          </a:r>
+                        </a:p>
+                      </a:txBody>
+                      <a:tcPr/>
+                    </a:tc>
+                    <a:tc>
+                      <a:txBody>
+                        <a:bodyPr/>
+                        <a:lstStyle/>
+                        <a:p>
+                          <a:pPr algn="r"/>
+                          <a:r>
+                            <a:rPr lang="en-US" sz="1400" dirty="0"/>
+                            <a:t>1</a:t>
+                          </a:r>
+                        </a:p>
+                      </a:txBody>
+                      <a:tcPr/>
+                    </a:tc>
+                    <a:tc>
+                      <a:txBody>
+                        <a:bodyPr/>
+                        <a:lstStyle/>
+                        <a:p>
+                          <a:pPr algn="r"/>
+                          <a:r>
+                            <a:rPr lang="en-US" sz="1400" dirty="0"/>
+                            <a:t>1</a:t>
+                          </a:r>
+                        </a:p>
+                      </a:txBody>
+                      <a:tcPr/>
+                    </a:tc>
+                    <a:extLst>
+                      <a:ext uri="{0D108BD9-81ED-4DB2-BD59-A6C34878D82A}">
+                        <a16:rowId xmlns:a16="http://schemas.microsoft.com/office/drawing/2014/main" val="1661388008"/>
+                      </a:ext>
+                    </a:extLst>
+                  </a:tr>
+                  <a:tr h="304800">
+                    <a:tc>
+                      <a:txBody>
+                        <a:bodyPr/>
+                        <a:lstStyle/>
+                        <a:p>
+                          <a:pPr algn="r"/>
+                          <a:r>
+                            <a:rPr lang="en-US" sz="1400" dirty="0"/>
+                            <a:t>15</a:t>
+                          </a:r>
+                        </a:p>
+                      </a:txBody>
+                      <a:tcPr/>
+                    </a:tc>
+                    <a:tc>
+                      <a:txBody>
+                        <a:bodyPr/>
+                        <a:lstStyle/>
+                        <a:p>
+                          <a:pPr algn="r"/>
+                          <a:r>
+                            <a:rPr lang="en-US" sz="1400" dirty="0"/>
+                            <a:t>1</a:t>
+                          </a:r>
+                        </a:p>
+                      </a:txBody>
+                      <a:tcPr/>
+                    </a:tc>
+                    <a:tc>
+                      <a:txBody>
+                        <a:bodyPr/>
+                        <a:lstStyle/>
+                        <a:p>
+                          <a:pPr algn="r"/>
+                          <a:r>
+                            <a:rPr lang="en-US" sz="1400" dirty="0"/>
+                            <a:t>1</a:t>
+                          </a:r>
+                        </a:p>
+                      </a:txBody>
+                      <a:tcPr/>
+                    </a:tc>
+                    <a:tc>
+                      <a:txBody>
+                        <a:bodyPr/>
+                        <a:lstStyle/>
+                        <a:p>
+                          <a:pPr algn="r"/>
+                          <a:r>
+                            <a:rPr lang="en-US" sz="1400" dirty="0"/>
+                            <a:t>0</a:t>
+                          </a:r>
+                        </a:p>
+                      </a:txBody>
+                      <a:tcPr/>
+                    </a:tc>
+                    <a:extLst>
+                      <a:ext uri="{0D108BD9-81ED-4DB2-BD59-A6C34878D82A}">
+                        <a16:rowId xmlns:a16="http://schemas.microsoft.com/office/drawing/2014/main" val="3997521818"/>
+                      </a:ext>
+                    </a:extLst>
+                  </a:tr>
+                  <a:tr h="304800">
+                    <a:tc>
+                      <a:txBody>
+                        <a:bodyPr/>
+                        <a:lstStyle/>
+                        <a:p>
+                          <a:pPr algn="r"/>
+                          <a:r>
+                            <a:rPr lang="en-US" sz="1400" dirty="0"/>
+                            <a:t>10</a:t>
+                          </a:r>
+                        </a:p>
+                      </a:txBody>
+                      <a:tcPr/>
+                    </a:tc>
+                    <a:tc>
+                      <a:txBody>
+                        <a:bodyPr/>
+                        <a:lstStyle/>
+                        <a:p>
+                          <a:pPr algn="r"/>
+                          <a:r>
+                            <a:rPr lang="en-US" sz="1400" dirty="0"/>
+                            <a:t>1</a:t>
+                          </a:r>
+                        </a:p>
+                      </a:txBody>
+                      <a:tcPr/>
+                    </a:tc>
+                    <a:tc>
+                      <a:txBody>
+                        <a:bodyPr/>
+                        <a:lstStyle/>
+                        <a:p>
+                          <a:pPr algn="r"/>
+                          <a:r>
+                            <a:rPr lang="en-US" sz="1400" dirty="0"/>
+                            <a:t>-1</a:t>
+                          </a:r>
+                        </a:p>
+                      </a:txBody>
+                      <a:tcPr/>
+                    </a:tc>
+                    <a:tc>
+                      <a:txBody>
+                        <a:bodyPr/>
+                        <a:lstStyle/>
+                        <a:p>
+                          <a:pPr algn="r"/>
+                          <a:r>
+                            <a:rPr lang="en-US" sz="1400" dirty="0"/>
+                            <a:t>0</a:t>
+                          </a:r>
+                        </a:p>
+                      </a:txBody>
+                      <a:tcPr/>
+                    </a:tc>
+                    <a:extLst>
+                      <a:ext uri="{0D108BD9-81ED-4DB2-BD59-A6C34878D82A}">
+                        <a16:rowId xmlns:a16="http://schemas.microsoft.com/office/drawing/2014/main" val="1052872398"/>
+                      </a:ext>
+                    </a:extLst>
+                  </a:tr>
+                  <a:tr h="304800">
+                    <a:tc>
+                      <a:txBody>
+                        <a:bodyPr/>
+                        <a:lstStyle/>
+                        <a:p>
+                          <a:pPr algn="r"/>
+                          <a:r>
+                            <a:rPr lang="en-US" sz="1400" dirty="0"/>
+                            <a:t>22</a:t>
+                          </a:r>
+                        </a:p>
+                      </a:txBody>
+                      <a:tcPr/>
+                    </a:tc>
+                    <a:tc>
+                      <a:txBody>
+                        <a:bodyPr/>
+                        <a:lstStyle/>
+                        <a:p>
+                          <a:pPr algn="r"/>
+                          <a:r>
+                            <a:rPr lang="en-US" sz="1400" dirty="0"/>
+                            <a:t>1</a:t>
+                          </a:r>
+                        </a:p>
+                      </a:txBody>
+                      <a:tcPr/>
+                    </a:tc>
+                    <a:tc>
+                      <a:txBody>
+                        <a:bodyPr/>
+                        <a:lstStyle/>
+                        <a:p>
+                          <a:pPr algn="r"/>
+                          <a:r>
+                            <a:rPr lang="en-US" sz="1400" dirty="0"/>
+                            <a:t>0</a:t>
+                          </a:r>
+                        </a:p>
+                      </a:txBody>
+                      <a:tcPr/>
+                    </a:tc>
+                    <a:tc>
+                      <a:txBody>
+                        <a:bodyPr/>
+                        <a:lstStyle/>
+                        <a:p>
+                          <a:pPr algn="r"/>
+                          <a:r>
+                            <a:rPr lang="en-US" sz="1400" dirty="0"/>
+                            <a:t>1</a:t>
+                          </a:r>
+                        </a:p>
+                      </a:txBody>
+                      <a:tcPr/>
+                    </a:tc>
+                    <a:extLst>
+                      <a:ext uri="{0D108BD9-81ED-4DB2-BD59-A6C34878D82A}">
+                        <a16:rowId xmlns:a16="http://schemas.microsoft.com/office/drawing/2014/main" val="2943653637"/>
+                      </a:ext>
+                    </a:extLst>
+                  </a:tr>
+                  <a:tr h="304800">
+                    <a:tc>
+                      <a:txBody>
+                        <a:bodyPr/>
+                        <a:lstStyle/>
+                        <a:p>
+                          <a:pPr algn="r"/>
+                          <a:r>
+                            <a:rPr lang="en-US" sz="1400" dirty="0"/>
+                            <a:t>10</a:t>
+                          </a:r>
+                        </a:p>
+                      </a:txBody>
+                      <a:tcPr/>
+                    </a:tc>
+                    <a:tc>
+                      <a:txBody>
+                        <a:bodyPr/>
+                        <a:lstStyle/>
+                        <a:p>
+                          <a:pPr algn="r"/>
+                          <a:r>
+                            <a:rPr lang="en-US" sz="1400" dirty="0"/>
+                            <a:t>1</a:t>
+                          </a:r>
+                        </a:p>
+                      </a:txBody>
+                      <a:tcPr/>
+                    </a:tc>
+                    <a:tc>
+                      <a:txBody>
+                        <a:bodyPr/>
+                        <a:lstStyle/>
+                        <a:p>
+                          <a:pPr algn="r"/>
+                          <a:r>
+                            <a:rPr lang="en-US" sz="1400" dirty="0"/>
+                            <a:t>0</a:t>
+                          </a:r>
+                        </a:p>
+                      </a:txBody>
+                      <a:tcPr/>
+                    </a:tc>
+                    <a:tc>
+                      <a:txBody>
+                        <a:bodyPr/>
+                        <a:lstStyle/>
+                        <a:p>
+                          <a:pPr algn="r"/>
+                          <a:r>
+                            <a:rPr lang="en-US" sz="1400" dirty="0"/>
+                            <a:t>-1</a:t>
+                          </a:r>
+                        </a:p>
+                      </a:txBody>
+                      <a:tcPr/>
+                    </a:tc>
+                    <a:extLst>
+                      <a:ext uri="{0D108BD9-81ED-4DB2-BD59-A6C34878D82A}">
+                        <a16:rowId xmlns:a16="http://schemas.microsoft.com/office/drawing/2014/main" val="781998362"/>
+                      </a:ext>
+                    </a:extLst>
+                  </a:tr>
+                  <a:tr h="304800">
+                    <a:tc>
+                      <a:txBody>
+                        <a:bodyPr/>
+                        <a:lstStyle/>
+                        <a:p>
+                          <a:pPr algn="r"/>
+                          <a:r>
+                            <a:rPr lang="en-US" sz="1400" dirty="0"/>
+                            <a:t>15</a:t>
+                          </a:r>
+                        </a:p>
+                      </a:txBody>
+                      <a:tcPr/>
+                    </a:tc>
+                    <a:tc>
+                      <a:txBody>
+                        <a:bodyPr/>
+                        <a:lstStyle/>
+                        <a:p>
+                          <a:pPr algn="r"/>
+                          <a:r>
+                            <a:rPr lang="en-US" sz="1400" dirty="0"/>
+                            <a:t>1</a:t>
+                          </a:r>
+                        </a:p>
+                      </a:txBody>
+                      <a:tcPr/>
+                    </a:tc>
+                    <a:tc>
+                      <a:txBody>
+                        <a:bodyPr/>
+                        <a:lstStyle/>
+                        <a:p>
+                          <a:pPr algn="r"/>
+                          <a:r>
+                            <a:rPr lang="en-US" sz="1400" dirty="0"/>
+                            <a:t>0</a:t>
+                          </a:r>
+                        </a:p>
+                      </a:txBody>
+                      <a:tcPr/>
+                    </a:tc>
+                    <a:tc>
+                      <a:txBody>
+                        <a:bodyPr/>
+                        <a:lstStyle/>
+                        <a:p>
+                          <a:pPr algn="r"/>
+                          <a:r>
+                            <a:rPr lang="en-US" sz="1400" dirty="0"/>
+                            <a:t>0</a:t>
+                          </a:r>
+                        </a:p>
+                      </a:txBody>
+                      <a:tcPr/>
+                    </a:tc>
+                    <a:extLst>
+                      <a:ext uri="{0D108BD9-81ED-4DB2-BD59-A6C34878D82A}">
+                        <a16:rowId xmlns:a16="http://schemas.microsoft.com/office/drawing/2014/main" val="1831228980"/>
+                      </a:ext>
+                    </a:extLst>
+                  </a:tr>
+                </a:tbl>
+              </a:graphicData>
+            </a:graphic>
+          </p:graphicFrame>
+        </mc:Fallback>
+      </mc:AlternateContent>
+    </p:spTree>
+    <p:extLst>
+      <p:ext uri="{BB962C8B-B14F-4D97-AF65-F5344CB8AC3E}">
+        <p14:creationId xmlns:p14="http://schemas.microsoft.com/office/powerpoint/2010/main" val="795667502"/>
+      </p:ext>
+    </p:extLst>
+  </p:cSld>
+  <p:clrMapOvr>
+    <a:masterClrMapping/>
+  </p:clrMapOvr>
+  <p:timing>
+    <p:tnLst>
+      <p:par>
+        <p:cTn id="1" dur="indefinite" restart="never" nodeType="tmRoot">
+          <p:childTnLst>
+            <p:seq concurrent="1" nextAc="seek">
+              <p:cTn id="2" dur="indefinite" nodeType="mainSeq">
+                <p:childTnLst>
+                  <p:par>
+                    <p:cTn id="3" fill="hold">
+                      <p:stCondLst>
+                        <p:cond delay="indefinite"/>
+                      </p:stCondLst>
+                      <p:childTnLst>
+                        <p:par>
+                          <p:cTn id="4" fill="hold">
+                            <p:stCondLst>
+                              <p:cond delay="0"/>
+                            </p:stCondLst>
+                            <p:childTnLst>
+                              <p:par>
+                                <p:cTn id="5" presetID="1" presetClass="entr" presetSubtype="0" fill="hold" grpId="0" nodeType="clickEffect">
+                                  <p:stCondLst>
+                                    <p:cond delay="0"/>
+                                  </p:stCondLst>
+                                  <p:childTnLst>
+                                    <p:set>
+                                      <p:cBhvr>
+                                        <p:cTn id="6" dur="1" fill="hold">
+                                          <p:stCondLst>
+                                            <p:cond delay="0"/>
+                                          </p:stCondLst>
+                                        </p:cTn>
+                                        <p:tgtEl>
+                                          <p:spTgt spid="3">
+                                            <p:txEl>
+                                              <p:pRg st="0" end="0"/>
+                                            </p:txEl>
+                                          </p:spTgt>
+                                        </p:tgtEl>
+                                        <p:attrNameLst>
+                                          <p:attrName>style.visibility</p:attrName>
+                                        </p:attrNameLst>
+                                      </p:cBhvr>
+                                      <p:to>
+                                        <p:strVal val="visible"/>
+                                      </p:to>
+                                    </p:set>
+                                  </p:childTnLst>
+                                </p:cTn>
+                              </p:par>
+                            </p:childTnLst>
+                          </p:cTn>
+                        </p:par>
+                      </p:childTnLst>
+                    </p:cTn>
+                  </p:par>
+                  <p:par>
+                    <p:cTn id="7" fill="hold">
+                      <p:stCondLst>
+                        <p:cond delay="indefinite"/>
+                      </p:stCondLst>
+                      <p:childTnLst>
+                        <p:par>
+                          <p:cTn id="8" fill="hold">
+                            <p:stCondLst>
+                              <p:cond delay="0"/>
+                            </p:stCondLst>
+                            <p:childTnLst>
+                              <p:par>
+                                <p:cTn id="9" presetID="1" presetClass="entr" presetSubtype="0" fill="hold" grpId="0" nodeType="clickEffect">
+                                  <p:stCondLst>
+                                    <p:cond delay="0"/>
+                                  </p:stCondLst>
+                                  <p:childTnLst>
+                                    <p:set>
+                                      <p:cBhvr>
+                                        <p:cTn id="10" dur="1" fill="hold">
+                                          <p:stCondLst>
+                                            <p:cond delay="0"/>
+                                          </p:stCondLst>
+                                        </p:cTn>
+                                        <p:tgtEl>
+                                          <p:spTgt spid="3">
+                                            <p:txEl>
+                                              <p:pRg st="1" end="1"/>
+                                            </p:txEl>
+                                          </p:spTgt>
+                                        </p:tgtEl>
+                                        <p:attrNameLst>
+                                          <p:attrName>style.visibility</p:attrName>
+                                        </p:attrNameLst>
+                                      </p:cBhvr>
+                                      <p:to>
+                                        <p:strVal val="visible"/>
+                                      </p:to>
+                                    </p:set>
+                                  </p:childTnLst>
+                                </p:cTn>
+                              </p:par>
+                            </p:childTnLst>
+                          </p:cTn>
+                        </p:par>
+                      </p:childTnLst>
+                    </p:cTn>
+                  </p:par>
+                  <p:par>
+                    <p:cTn id="11" fill="hold">
+                      <p:stCondLst>
+                        <p:cond delay="indefinite"/>
+                      </p:stCondLst>
+                      <p:childTnLst>
+                        <p:par>
+                          <p:cTn id="12" fill="hold">
+                            <p:stCondLst>
+                              <p:cond delay="0"/>
+                            </p:stCondLst>
+                            <p:childTnLst>
+                              <p:par>
+                                <p:cTn id="13" presetID="1" presetClass="entr" presetSubtype="0" fill="hold" grpId="0" nodeType="clickEffect">
+                                  <p:stCondLst>
+                                    <p:cond delay="0"/>
+                                  </p:stCondLst>
+                                  <p:childTnLst>
+                                    <p:set>
+                                      <p:cBhvr>
+                                        <p:cTn id="14" dur="1" fill="hold">
+                                          <p:stCondLst>
+                                            <p:cond delay="0"/>
+                                          </p:stCondLst>
+                                        </p:cTn>
+                                        <p:tgtEl>
+                                          <p:spTgt spid="3">
+                                            <p:txEl>
+                                              <p:pRg st="2" end="2"/>
+                                            </p:txEl>
+                                          </p:spTgt>
+                                        </p:tgtEl>
+                                        <p:attrNameLst>
+                                          <p:attrName>style.visibility</p:attrName>
+                                        </p:attrNameLst>
+                                      </p:cBhvr>
+                                      <p:to>
+                                        <p:strVal val="visible"/>
+                                      </p:to>
+                                    </p:set>
+                                  </p:childTnLst>
+                                </p:cTn>
+                              </p:par>
+                            </p:childTnLst>
+                          </p:cTn>
+                        </p:par>
+                      </p:childTnLst>
+                    </p:cTn>
+                  </p:par>
+                  <p:par>
+                    <p:cTn id="15" fill="hold">
+                      <p:stCondLst>
+                        <p:cond delay="indefinite"/>
+                      </p:stCondLst>
+                      <p:childTnLst>
+                        <p:par>
+                          <p:cTn id="16" fill="hold">
+                            <p:stCondLst>
+                              <p:cond delay="0"/>
+                            </p:stCondLst>
+                            <p:childTnLst>
+                              <p:par>
+                                <p:cTn id="17" presetID="1" presetClass="entr" presetSubtype="0" fill="hold" grpId="0" nodeType="clickEffect">
+                                  <p:stCondLst>
+                                    <p:cond delay="0"/>
+                                  </p:stCondLst>
+                                  <p:childTnLst>
+                                    <p:set>
+                                      <p:cBhvr>
+                                        <p:cTn id="18" dur="1" fill="hold">
+                                          <p:stCondLst>
+                                            <p:cond delay="0"/>
+                                          </p:stCondLst>
+                                        </p:cTn>
+                                        <p:tgtEl>
+                                          <p:spTgt spid="9"/>
+                                        </p:tgtEl>
+                                        <p:attrNameLst>
+                                          <p:attrName>style.visibility</p:attrName>
+                                        </p:attrNameLst>
+                                      </p:cBhvr>
+                                      <p:to>
+                                        <p:strVal val="visible"/>
+                                      </p:to>
+                                    </p:set>
+                                  </p:childTnLst>
+                                </p:cTn>
+                              </p:par>
+                            </p:childTnLst>
+                          </p:cTn>
+                        </p:par>
+                      </p:childTnLst>
+                    </p:cTn>
+                  </p:par>
+                </p:childTnLst>
+              </p:cTn>
+              <p:prevCondLst>
+                <p:cond evt="onPrev" delay="0">
+                  <p:tgtEl>
+                    <p:sldTgt/>
+                  </p:tgtEl>
+                </p:cond>
+              </p:prevCondLst>
+              <p:nextCondLst>
+                <p:cond evt="onNext" delay="0">
+                  <p:tgtEl>
+                    <p:sldTgt/>
+                  </p:tgtEl>
+                </p:cond>
+              </p:nextCondLst>
+            </p:seq>
+          </p:childTnLst>
+        </p:cTn>
+      </p:par>
+    </p:tnLst>
+    <p:bldLst>
+      <p:bldP spid="3" grpId="0" build="p"/>
+      <p:bldP spid="9" grpId="0"/>
+    </p:bldLst>
+  </p:timing>
+</p:sld>
+</file>
+
+<file path=ppt/slides/slide21.xml><?xml version="1.0" encoding="utf-8"?>
+<p:sld xmlns:a="http://schemas.openxmlformats.org/drawingml/2006/main" xmlns:r="http://schemas.openxmlformats.org/officeDocument/2006/relationships" xmlns:p="http://schemas.openxmlformats.org/presentationml/2006/main">
+  <p:cSld>
+    <p:spTree>
+      <p:nvGrpSpPr>
         <p:cNvPr id="1" name="Shape 277"/>
         <p:cNvGrpSpPr/>
         <p:nvPr/>
@@ -29536,7 +33796,7 @@
                 </a:spcAft>
                 <a:buNone/>
               </a:pPr>
-              <a:t>20</a:t>
+              <a:t>21</a:t>
             </a:fld>
             <a:endParaRPr/>
           </a:p>
@@ -29550,7 +33810,7 @@
 </p:sld>
 </file>
 
-<file path=ppt/slides/slide21.xml><?xml version="1.0" encoding="utf-8"?>
+<file path=ppt/slides/slide22.xml><?xml version="1.0" encoding="utf-8"?>
 <p:sld xmlns:a="http://schemas.openxmlformats.org/drawingml/2006/main" xmlns:r="http://schemas.openxmlformats.org/officeDocument/2006/relationships" xmlns:p="http://schemas.openxmlformats.org/presentationml/2006/main">
   <p:cSld>
     <p:spTree>
@@ -29624,7 +33884,7 @@
               <a:pPr>
                 <a:defRPr/>
               </a:pPr>
-              <a:t>21</a:t>
+              <a:t>22</a:t>
             </a:fld>
             <a:endParaRPr lang="en-US" altLang="x-none"/>
           </a:p>
@@ -30422,8 +34682,8 @@
           </a:p>
         </p:txBody>
       </p:sp>
-      <mc:AlternateContent xmlns:mc="http://schemas.openxmlformats.org/markup-compatibility/2006" xmlns:a14="http://schemas.microsoft.com/office/drawing/2010/main">
-        <mc:Choice Requires="a14">
+      <mc:AlternateContent xmlns:mc="http://schemas.openxmlformats.org/markup-compatibility/2006">
+        <mc:Choice xmlns:a14="http://schemas.microsoft.com/office/drawing/2010/main" Requires="a14">
           <p:sp>
             <p:nvSpPr>
               <p:cNvPr id="12" name="TextBox 11">
@@ -30439,7 +34699,7 @@
             <p:spPr>
               <a:xfrm>
                 <a:off x="350014" y="5480088"/>
-                <a:ext cx="7618752" cy="276999"/>
+                <a:ext cx="6649256" cy="276999"/>
               </a:xfrm>
               <a:prstGeom prst="rect">
                 <a:avLst/>
@@ -30460,46 +34720,58 @@
                     </m:oMathParaPr>
                     <m:oMath xmlns:m="http://schemas.openxmlformats.org/officeDocument/2006/math">
                       <m:r>
-                        <a:rPr lang="en-US" b="0" i="1" smtClean="0">
+                        <m:rPr>
+                          <m:sty m:val="p"/>
+                        </m:rPr>
+                        <a:rPr lang="en-US" b="0" i="0" smtClean="0">
                           <a:latin typeface="Cambria Math" panose="02040503050406030204" pitchFamily="18" charset="0"/>
                         </a:rPr>
-                        <m:t>𝑌𝑖𝑒𝑙𝑑</m:t>
+                        <m:t>Yield</m:t>
                       </m:r>
                       <m:r>
-                        <a:rPr lang="en-US" b="0" i="1" smtClean="0">
+                        <a:rPr lang="en-US" b="0" i="0" smtClean="0">
                           <a:latin typeface="Cambria Math" panose="02040503050406030204" pitchFamily="18" charset="0"/>
                         </a:rPr>
                         <m:t>=</m:t>
                       </m:r>
                       <m:r>
-                        <a:rPr lang="en-US" b="0" i="1" smtClean="0">
+                        <m:rPr>
+                          <m:sty m:val="p"/>
+                        </m:rPr>
+                        <a:rPr lang="en-US" b="0" i="0" smtClean="0">
                           <a:latin typeface="Cambria Math" panose="02040503050406030204" pitchFamily="18" charset="0"/>
                         </a:rPr>
-                        <m:t>𝐸𝑓𝑓𝑒𝑐𝑡𝑂𝑓𝑇𝑒𝑚𝑝𝑒𝑟𝑎𝑡𝑢𝑟𝑒</m:t>
+                        <m:t>EffectOfTemperature</m:t>
                       </m:r>
                       <m:r>
-                        <a:rPr lang="en-US" b="0" i="1" smtClean="0">
+                        <a:rPr lang="en-US" b="0" i="0" smtClean="0">
                           <a:latin typeface="Cambria Math" panose="02040503050406030204" pitchFamily="18" charset="0"/>
                         </a:rPr>
                         <m:t>+</m:t>
                       </m:r>
                       <m:r>
-                        <a:rPr lang="en-US" b="0" i="1" smtClean="0">
+                        <m:rPr>
+                          <m:sty m:val="p"/>
+                        </m:rPr>
+                        <a:rPr lang="en-US" b="0" i="0" smtClean="0">
                           <a:latin typeface="Cambria Math" panose="02040503050406030204" pitchFamily="18" charset="0"/>
                         </a:rPr>
-                        <m:t>𝐸𝑓𝑓𝑒𝑐𝑡𝑂𝑓𝑀𝑎𝑡𝑒𝑟𝑖𝑎𝑙</m:t>
+                        <m:t>EffectOfMaterial</m:t>
                       </m:r>
                       <m:r>
-                        <a:rPr lang="en-US" b="0" i="1" smtClean="0">
+                        <a:rPr lang="en-US" b="0" i="0" smtClean="0">
                           <a:latin typeface="Cambria Math" panose="02040503050406030204" pitchFamily="18" charset="0"/>
                         </a:rPr>
                         <m:t>+</m:t>
                       </m:r>
                       <m:r>
-                        <a:rPr lang="en-US" b="0" i="1" smtClean="0">
+                        <m:rPr>
+                          <m:sty m:val="p"/>
+                        </m:rPr>
+                        <a:rPr lang="en-US" b="0" i="0" smtClean="0">
                           <a:latin typeface="Cambria Math" panose="02040503050406030204" pitchFamily="18" charset="0"/>
                         </a:rPr>
-                        <m:t>𝐸𝑓𝑓𝑒𝑐𝑡𝑂𝑓𝐶𝑎𝑡𝑎𝑙𝑦𝑠𝑡</m:t>
+                        <m:t>EffectOfCatalyst</m:t>
                       </m:r>
                     </m:oMath>
                   </m:oMathPara>
@@ -30509,7 +34781,7 @@
             </p:txBody>
           </p:sp>
         </mc:Choice>
-        <mc:Fallback xmlns="">
+        <mc:Fallback>
           <p:sp>
             <p:nvSpPr>
               <p:cNvPr id="12" name="TextBox 11">
@@ -30527,7 +34799,7 @@
             <p:spPr>
               <a:xfrm>
                 <a:off x="350014" y="5480088"/>
-                <a:ext cx="7618752" cy="276999"/>
+                <a:ext cx="6649256" cy="276999"/>
               </a:xfrm>
               <a:prstGeom prst="rect">
                 <a:avLst/>
@@ -30535,7 +34807,7 @@
               <a:blipFill>
                 <a:blip r:embed="rId3"/>
                 <a:stretch>
-                  <a:fillRect l="-166" r="-499" b="-39130"/>
+                  <a:fillRect l="-381" r="-571" b="-39130"/>
                 </a:stretch>
               </a:blipFill>
             </p:spPr>
@@ -30554,6 +34826,53 @@
           </p:sp>
         </mc:Fallback>
       </mc:AlternateContent>
+      <p:pic>
+        <p:nvPicPr>
+          <p:cNvPr id="3" name="Picture 2" descr="Optimizing Chemical Processes - algorithmica technologies GmbH">
+            <a:extLst>
+              <a:ext uri="{FF2B5EF4-FFF2-40B4-BE49-F238E27FC236}">
+                <a16:creationId xmlns:a16="http://schemas.microsoft.com/office/drawing/2014/main" id="{86E33BD9-C137-C1EE-9D0B-97BC3B67D5FD}"/>
+              </a:ext>
+            </a:extLst>
+          </p:cNvPr>
+          <p:cNvPicPr>
+            <a:picLocks noChangeAspect="1" noChangeArrowheads="1"/>
+          </p:cNvPicPr>
+          <p:nvPr/>
+        </p:nvPicPr>
+        <p:blipFill>
+          <a:blip r:embed="rId4">
+            <a:extLst>
+              <a:ext uri="{28A0092B-C50C-407E-A947-70E740481C1C}">
+                <a14:useLocalDpi xmlns:a14="http://schemas.microsoft.com/office/drawing/2010/main" val="0"/>
+              </a:ext>
+            </a:extLst>
+          </a:blip>
+          <a:srcRect/>
+          <a:stretch>
+            <a:fillRect/>
+          </a:stretch>
+        </p:blipFill>
+        <p:spPr bwMode="auto">
+          <a:xfrm>
+            <a:off x="7340854" y="340883"/>
+            <a:ext cx="1527744" cy="763872"/>
+          </a:xfrm>
+          <a:prstGeom prst="rect">
+            <a:avLst/>
+          </a:prstGeom>
+          <a:noFill/>
+          <a:extLst>
+            <a:ext uri="{909E8E84-426E-40DD-AFC4-6F175D3DCCD1}">
+              <a14:hiddenFill xmlns:a14="http://schemas.microsoft.com/office/drawing/2010/main">
+                <a:solidFill>
+                  <a:srgbClr val="FFFFFF"/>
+                </a:solidFill>
+              </a14:hiddenFill>
+            </a:ext>
+          </a:extLst>
+        </p:spPr>
+      </p:pic>
     </p:spTree>
     <p:extLst>
       <p:ext uri="{BB962C8B-B14F-4D97-AF65-F5344CB8AC3E}">
@@ -31091,6 +35410,511 @@
           <a:chExt cx="0" cy="0"/>
         </a:xfrm>
       </p:grpSpPr>
+      <p:grpSp>
+        <p:nvGrpSpPr>
+          <p:cNvPr id="15" name="Group 14">
+            <a:extLst>
+              <a:ext uri="{FF2B5EF4-FFF2-40B4-BE49-F238E27FC236}">
+                <a16:creationId xmlns:a16="http://schemas.microsoft.com/office/drawing/2014/main" id="{247182E3-034D-94CB-5BF4-C5D722B34315}"/>
+              </a:ext>
+            </a:extLst>
+          </p:cNvPr>
+          <p:cNvGrpSpPr/>
+          <p:nvPr/>
+        </p:nvGrpSpPr>
+        <p:grpSpPr>
+          <a:xfrm>
+            <a:off x="2724621" y="993782"/>
+            <a:ext cx="6163056" cy="3521139"/>
+            <a:chOff x="2618397" y="753637"/>
+            <a:chExt cx="6163056" cy="3521139"/>
+          </a:xfrm>
+        </p:grpSpPr>
+        <p:grpSp>
+          <p:nvGrpSpPr>
+            <p:cNvPr id="14" name="Group 13">
+              <a:extLst>
+                <a:ext uri="{FF2B5EF4-FFF2-40B4-BE49-F238E27FC236}">
+                  <a16:creationId xmlns:a16="http://schemas.microsoft.com/office/drawing/2014/main" id="{991F1FC7-45C0-7762-859A-4237EF08E7E8}"/>
+                </a:ext>
+              </a:extLst>
+            </p:cNvPr>
+            <p:cNvGrpSpPr/>
+            <p:nvPr/>
+          </p:nvGrpSpPr>
+          <p:grpSpPr>
+            <a:xfrm>
+              <a:off x="2618397" y="1393928"/>
+              <a:ext cx="6163056" cy="2880848"/>
+              <a:chOff x="2480855" y="770659"/>
+              <a:chExt cx="6163056" cy="2880848"/>
+            </a:xfrm>
+          </p:grpSpPr>
+          <p:grpSp>
+            <p:nvGrpSpPr>
+              <p:cNvPr id="21" name="Group 20">
+                <a:extLst>
+                  <a:ext uri="{FF2B5EF4-FFF2-40B4-BE49-F238E27FC236}">
+                    <a16:creationId xmlns:a16="http://schemas.microsoft.com/office/drawing/2014/main" id="{7FEDCF9E-347F-25E8-0D11-7E228DE03C47}"/>
+                  </a:ext>
+                </a:extLst>
+              </p:cNvPr>
+              <p:cNvGrpSpPr/>
+              <p:nvPr/>
+            </p:nvGrpSpPr>
+            <p:grpSpPr>
+              <a:xfrm>
+                <a:off x="2480855" y="770659"/>
+                <a:ext cx="6163056" cy="2880848"/>
+                <a:chOff x="987552" y="839007"/>
+                <a:chExt cx="6163056" cy="2880848"/>
+              </a:xfrm>
+            </p:grpSpPr>
+            <p:grpSp>
+              <p:nvGrpSpPr>
+                <p:cNvPr id="20" name="Group 19">
+                  <a:extLst>
+                    <a:ext uri="{FF2B5EF4-FFF2-40B4-BE49-F238E27FC236}">
+                      <a16:creationId xmlns:a16="http://schemas.microsoft.com/office/drawing/2014/main" id="{64DBBE3D-49CC-0EA3-0390-BA26FD1261C3}"/>
+                    </a:ext>
+                  </a:extLst>
+                </p:cNvPr>
+                <p:cNvGrpSpPr/>
+                <p:nvPr/>
+              </p:nvGrpSpPr>
+              <p:grpSpPr>
+                <a:xfrm>
+                  <a:off x="987552" y="839007"/>
+                  <a:ext cx="6163056" cy="2880848"/>
+                  <a:chOff x="987552" y="839007"/>
+                  <a:chExt cx="6163056" cy="2880848"/>
+                </a:xfrm>
+              </p:grpSpPr>
+              <p:pic>
+                <p:nvPicPr>
+                  <p:cNvPr id="13314" name="Picture 2" descr="Design of Experiments (DoE) | Method, Chemistry, Videos">
+                    <a:extLst>
+                      <a:ext uri="{FF2B5EF4-FFF2-40B4-BE49-F238E27FC236}">
+                        <a16:creationId xmlns:a16="http://schemas.microsoft.com/office/drawing/2014/main" id="{C176EC80-0088-F042-B839-B09C7DC218B6}"/>
+                      </a:ext>
+                    </a:extLst>
+                  </p:cNvPr>
+                  <p:cNvPicPr>
+                    <a:picLocks noChangeAspect="1" noChangeArrowheads="1"/>
+                  </p:cNvPicPr>
+                  <p:nvPr/>
+                </p:nvPicPr>
+                <p:blipFill>
+                  <a:blip r:embed="rId2">
+                    <a:extLst>
+                      <a:ext uri="{28A0092B-C50C-407E-A947-70E740481C1C}">
+                        <a14:useLocalDpi xmlns:a14="http://schemas.microsoft.com/office/drawing/2010/main" val="0"/>
+                      </a:ext>
+                    </a:extLst>
+                  </a:blip>
+                  <a:srcRect/>
+                  <a:stretch>
+                    <a:fillRect/>
+                  </a:stretch>
+                </p:blipFill>
+                <p:spPr bwMode="auto">
+                  <a:xfrm>
+                    <a:off x="987552" y="856488"/>
+                    <a:ext cx="6163056" cy="2863367"/>
+                  </a:xfrm>
+                  <a:prstGeom prst="rect">
+                    <a:avLst/>
+                  </a:prstGeom>
+                  <a:noFill/>
+                  <a:extLst>
+                    <a:ext uri="{909E8E84-426E-40DD-AFC4-6F175D3DCCD1}">
+                      <a14:hiddenFill xmlns:a14="http://schemas.microsoft.com/office/drawing/2010/main">
+                        <a:solidFill>
+                          <a:srgbClr val="FFFFFF"/>
+                        </a:solidFill>
+                      </a14:hiddenFill>
+                    </a:ext>
+                  </a:extLst>
+                </p:spPr>
+              </p:pic>
+              <p:sp>
+                <p:nvSpPr>
+                  <p:cNvPr id="6" name="Rectangle 5">
+                    <a:extLst>
+                      <a:ext uri="{FF2B5EF4-FFF2-40B4-BE49-F238E27FC236}">
+                        <a16:creationId xmlns:a16="http://schemas.microsoft.com/office/drawing/2014/main" id="{0C78D342-2525-F44F-61D5-E8B8E568B340}"/>
+                      </a:ext>
+                    </a:extLst>
+                  </p:cNvPr>
+                  <p:cNvSpPr/>
+                  <p:nvPr/>
+                </p:nvSpPr>
+                <p:spPr>
+                  <a:xfrm>
+                    <a:off x="987552" y="839007"/>
+                    <a:ext cx="3086737" cy="2737570"/>
+                  </a:xfrm>
+                  <a:prstGeom prst="rect">
+                    <a:avLst/>
+                  </a:prstGeom>
+                  <a:solidFill>
+                    <a:schemeClr val="bg1"/>
+                  </a:solidFill>
+                  <a:ln>
+                    <a:noFill/>
+                  </a:ln>
+                  <a:effectLst>
+                    <a:outerShdw dist="23000" sx="1000" sy="1000" rotWithShape="0">
+                      <a:srgbClr val="000000"/>
+                    </a:outerShdw>
+                  </a:effectLst>
+                </p:spPr>
+                <p:style>
+                  <a:lnRef idx="1">
+                    <a:schemeClr val="accent1"/>
+                  </a:lnRef>
+                  <a:fillRef idx="3">
+                    <a:schemeClr val="accent1"/>
+                  </a:fillRef>
+                  <a:effectRef idx="2">
+                    <a:schemeClr val="accent1"/>
+                  </a:effectRef>
+                  <a:fontRef idx="minor">
+                    <a:schemeClr val="lt1"/>
+                  </a:fontRef>
+                </p:style>
+                <p:txBody>
+                  <a:bodyPr rtlCol="0" anchor="ctr"/>
+                  <a:lstStyle/>
+                  <a:p>
+                    <a:pPr algn="ctr"/>
+                    <a:endParaRPr lang="en-US"/>
+                  </a:p>
+                </p:txBody>
+              </p:sp>
+            </p:grpSp>
+            <p:sp>
+              <p:nvSpPr>
+                <p:cNvPr id="8" name="Rectangle 7">
+                  <a:extLst>
+                    <a:ext uri="{FF2B5EF4-FFF2-40B4-BE49-F238E27FC236}">
+                      <a16:creationId xmlns:a16="http://schemas.microsoft.com/office/drawing/2014/main" id="{CA188A9C-A5DA-164B-F0D9-EB87CEA70940}"/>
+                    </a:ext>
+                  </a:extLst>
+                </p:cNvPr>
+                <p:cNvSpPr/>
+                <p:nvPr/>
+              </p:nvSpPr>
+              <p:spPr>
+                <a:xfrm>
+                  <a:off x="6006779" y="2245488"/>
+                  <a:ext cx="752836" cy="162045"/>
+                </a:xfrm>
+                <a:prstGeom prst="rect">
+                  <a:avLst/>
+                </a:prstGeom>
+                <a:noFill/>
+                <a:ln w="76200">
+                  <a:solidFill>
+                    <a:schemeClr val="tx2">
+                      <a:lumMod val="20000"/>
+                      <a:lumOff val="80000"/>
+                    </a:schemeClr>
+                  </a:solidFill>
+                </a:ln>
+                <a:effectLst>
+                  <a:outerShdw dist="23000" sx="1000" sy="1000" rotWithShape="0">
+                    <a:srgbClr val="000000"/>
+                  </a:outerShdw>
+                </a:effectLst>
+              </p:spPr>
+              <p:style>
+                <a:lnRef idx="1">
+                  <a:schemeClr val="accent1"/>
+                </a:lnRef>
+                <a:fillRef idx="3">
+                  <a:schemeClr val="accent1"/>
+                </a:fillRef>
+                <a:effectRef idx="2">
+                  <a:schemeClr val="accent1"/>
+                </a:effectRef>
+                <a:fontRef idx="minor">
+                  <a:schemeClr val="lt1"/>
+                </a:fontRef>
+              </p:style>
+              <p:txBody>
+                <a:bodyPr rtlCol="0" anchor="ctr"/>
+                <a:lstStyle/>
+                <a:p>
+                  <a:pPr algn="ctr"/>
+                  <a:endParaRPr lang="en-US"/>
+                </a:p>
+              </p:txBody>
+            </p:sp>
+            <p:cxnSp>
+              <p:nvCxnSpPr>
+                <p:cNvPr id="12" name="Straight Connector 11">
+                  <a:extLst>
+                    <a:ext uri="{FF2B5EF4-FFF2-40B4-BE49-F238E27FC236}">
+                      <a16:creationId xmlns:a16="http://schemas.microsoft.com/office/drawing/2014/main" id="{3CB8F0BF-9469-7282-14E3-FC44755BAD55}"/>
+                    </a:ext>
+                  </a:extLst>
+                </p:cNvPr>
+                <p:cNvCxnSpPr>
+                  <a:cxnSpLocks/>
+                  <a:stCxn id="8" idx="2"/>
+                  <a:endCxn id="16" idx="2"/>
+                </p:cNvCxnSpPr>
+                <p:nvPr/>
+              </p:nvCxnSpPr>
+              <p:spPr>
+                <a:xfrm>
+                  <a:off x="6383197" y="2407533"/>
+                  <a:ext cx="0" cy="165169"/>
+                </a:xfrm>
+                <a:prstGeom prst="line">
+                  <a:avLst/>
+                </a:prstGeom>
+                <a:ln w="38100">
+                  <a:solidFill>
+                    <a:schemeClr val="accent1">
+                      <a:lumMod val="40000"/>
+                      <a:lumOff val="60000"/>
+                    </a:schemeClr>
+                  </a:solidFill>
+                </a:ln>
+                <a:effectLst/>
+              </p:spPr>
+              <p:style>
+                <a:lnRef idx="2">
+                  <a:schemeClr val="accent1"/>
+                </a:lnRef>
+                <a:fillRef idx="0">
+                  <a:schemeClr val="accent1"/>
+                </a:fillRef>
+                <a:effectRef idx="1">
+                  <a:schemeClr val="accent1"/>
+                </a:effectRef>
+                <a:fontRef idx="minor">
+                  <a:schemeClr val="tx1"/>
+                </a:fontRef>
+              </p:style>
+            </p:cxnSp>
+            <p:sp>
+              <p:nvSpPr>
+                <p:cNvPr id="16" name="Rectangle 15">
+                  <a:extLst>
+                    <a:ext uri="{FF2B5EF4-FFF2-40B4-BE49-F238E27FC236}">
+                      <a16:creationId xmlns:a16="http://schemas.microsoft.com/office/drawing/2014/main" id="{98ED895C-56C4-89FE-3633-9C12F3205A34}"/>
+                    </a:ext>
+                  </a:extLst>
+                </p:cNvPr>
+                <p:cNvSpPr/>
+                <p:nvPr/>
+              </p:nvSpPr>
+              <p:spPr>
+                <a:xfrm>
+                  <a:off x="6006779" y="2410657"/>
+                  <a:ext cx="752836" cy="162045"/>
+                </a:xfrm>
+                <a:prstGeom prst="rect">
+                  <a:avLst/>
+                </a:prstGeom>
+                <a:noFill/>
+                <a:ln w="12700">
+                  <a:solidFill>
+                    <a:srgbClr val="FF0000"/>
+                  </a:solidFill>
+                </a:ln>
+                <a:effectLst>
+                  <a:outerShdw dist="23000" sx="1000" sy="1000" rotWithShape="0">
+                    <a:srgbClr val="000000"/>
+                  </a:outerShdw>
+                </a:effectLst>
+              </p:spPr>
+              <p:style>
+                <a:lnRef idx="1">
+                  <a:schemeClr val="accent1"/>
+                </a:lnRef>
+                <a:fillRef idx="3">
+                  <a:schemeClr val="accent1"/>
+                </a:fillRef>
+                <a:effectRef idx="2">
+                  <a:schemeClr val="accent1"/>
+                </a:effectRef>
+                <a:fontRef idx="minor">
+                  <a:schemeClr val="lt1"/>
+                </a:fontRef>
+              </p:style>
+              <p:txBody>
+                <a:bodyPr rtlCol="0" anchor="ctr"/>
+                <a:lstStyle/>
+                <a:p>
+                  <a:pPr algn="ctr"/>
+                  <a:endParaRPr lang="en-US"/>
+                </a:p>
+              </p:txBody>
+            </p:sp>
+          </p:grpSp>
+          <p:sp>
+            <p:nvSpPr>
+              <p:cNvPr id="9" name="Rectangle 8">
+                <a:extLst>
+                  <a:ext uri="{FF2B5EF4-FFF2-40B4-BE49-F238E27FC236}">
+                    <a16:creationId xmlns:a16="http://schemas.microsoft.com/office/drawing/2014/main" id="{0C44D606-D911-7F01-6514-A333F88E3A7E}"/>
+                  </a:ext>
+                </a:extLst>
+              </p:cNvPr>
+              <p:cNvSpPr/>
+              <p:nvPr/>
+            </p:nvSpPr>
+            <p:spPr>
+              <a:xfrm>
+                <a:off x="7419299" y="2925620"/>
+                <a:ext cx="985791" cy="679707"/>
+              </a:xfrm>
+              <a:prstGeom prst="rect">
+                <a:avLst/>
+              </a:prstGeom>
+              <a:solidFill>
+                <a:schemeClr val="bg1"/>
+              </a:solidFill>
+              <a:ln>
+                <a:noFill/>
+              </a:ln>
+              <a:effectLst>
+                <a:outerShdw dist="23000" sx="1000" sy="1000" rotWithShape="0">
+                  <a:srgbClr val="000000"/>
+                </a:outerShdw>
+              </a:effectLst>
+            </p:spPr>
+            <p:style>
+              <a:lnRef idx="1">
+                <a:schemeClr val="accent1"/>
+              </a:lnRef>
+              <a:fillRef idx="3">
+                <a:schemeClr val="accent1"/>
+              </a:fillRef>
+              <a:effectRef idx="2">
+                <a:schemeClr val="accent1"/>
+              </a:effectRef>
+              <a:fontRef idx="minor">
+                <a:schemeClr val="lt1"/>
+              </a:fontRef>
+            </p:style>
+            <p:txBody>
+              <a:bodyPr rtlCol="0" anchor="ctr"/>
+              <a:lstStyle/>
+              <a:p>
+                <a:pPr algn="ctr"/>
+                <a:endParaRPr lang="en-US"/>
+              </a:p>
+            </p:txBody>
+          </p:sp>
+          <p:sp>
+            <p:nvSpPr>
+              <p:cNvPr id="11" name="Rectangle 10">
+                <a:extLst>
+                  <a:ext uri="{FF2B5EF4-FFF2-40B4-BE49-F238E27FC236}">
+                    <a16:creationId xmlns:a16="http://schemas.microsoft.com/office/drawing/2014/main" id="{07CAE846-5955-19B8-1165-428A01CC0733}"/>
+                  </a:ext>
+                </a:extLst>
+              </p:cNvPr>
+              <p:cNvSpPr/>
+              <p:nvPr/>
+            </p:nvSpPr>
+            <p:spPr>
+              <a:xfrm>
+                <a:off x="7685900" y="1488066"/>
+                <a:ext cx="304572" cy="1368781"/>
+              </a:xfrm>
+              <a:prstGeom prst="rect">
+                <a:avLst/>
+              </a:prstGeom>
+              <a:solidFill>
+                <a:srgbClr val="AFD9E8"/>
+              </a:solidFill>
+              <a:ln>
+                <a:noFill/>
+              </a:ln>
+              <a:effectLst>
+                <a:outerShdw dist="23000" sx="1000" sy="1000" rotWithShape="0">
+                  <a:srgbClr val="000000"/>
+                </a:outerShdw>
+              </a:effectLst>
+            </p:spPr>
+            <p:style>
+              <a:lnRef idx="1">
+                <a:schemeClr val="accent1"/>
+              </a:lnRef>
+              <a:fillRef idx="3">
+                <a:schemeClr val="accent1"/>
+              </a:fillRef>
+              <a:effectRef idx="2">
+                <a:schemeClr val="accent1"/>
+              </a:effectRef>
+              <a:fontRef idx="minor">
+                <a:schemeClr val="lt1"/>
+              </a:fontRef>
+            </p:style>
+            <p:txBody>
+              <a:bodyPr rtlCol="0" anchor="ctr"/>
+              <a:lstStyle/>
+              <a:p>
+                <a:pPr algn="ctr"/>
+                <a:endParaRPr lang="en-US"/>
+              </a:p>
+            </p:txBody>
+          </p:sp>
+        </p:grpSp>
+        <p:pic>
+          <p:nvPicPr>
+            <p:cNvPr id="13" name="Picture 12" descr="Optimizing Chemical Processes - algorithmica technologies GmbH">
+              <a:extLst>
+                <a:ext uri="{FF2B5EF4-FFF2-40B4-BE49-F238E27FC236}">
+                  <a16:creationId xmlns:a16="http://schemas.microsoft.com/office/drawing/2014/main" id="{581560B2-794C-C049-E3D3-51F13C0FC2B8}"/>
+                </a:ext>
+              </a:extLst>
+            </p:cNvPr>
+            <p:cNvPicPr>
+              <a:picLocks noChangeAspect="1" noChangeArrowheads="1"/>
+            </p:cNvPicPr>
+            <p:nvPr/>
+          </p:nvPicPr>
+          <p:blipFill>
+            <a:blip r:embed="rId3">
+              <a:extLst>
+                <a:ext uri="{28A0092B-C50C-407E-A947-70E740481C1C}">
+                  <a14:useLocalDpi xmlns:a14="http://schemas.microsoft.com/office/drawing/2010/main" val="0"/>
+                </a:ext>
+              </a:extLst>
+            </a:blip>
+            <a:srcRect/>
+            <a:stretch>
+              <a:fillRect/>
+            </a:stretch>
+          </p:blipFill>
+          <p:spPr bwMode="auto">
+            <a:xfrm>
+              <a:off x="6433240" y="753637"/>
+              <a:ext cx="1527744" cy="763872"/>
+            </a:xfrm>
+            <a:prstGeom prst="rect">
+              <a:avLst/>
+            </a:prstGeom>
+            <a:noFill/>
+            <a:extLst>
+              <a:ext uri="{909E8E84-426E-40DD-AFC4-6F175D3DCCD1}">
+                <a14:hiddenFill xmlns:a14="http://schemas.microsoft.com/office/drawing/2010/main">
+                  <a:solidFill>
+                    <a:srgbClr val="FFFFFF"/>
+                  </a:solidFill>
+                </a14:hiddenFill>
+              </a:ext>
+            </a:extLst>
+          </p:spPr>
+        </p:pic>
+      </p:grpSp>
       <p:sp>
         <p:nvSpPr>
           <p:cNvPr id="4" name="Title 3">
@@ -31168,8 +35992,8 @@
         </p:nvSpPr>
         <p:spPr>
           <a:xfrm>
-            <a:off x="1686994" y="5310522"/>
-            <a:ext cx="5287494" cy="923330"/>
+            <a:off x="1686994" y="5107328"/>
+            <a:ext cx="5287494" cy="1477328"/>
           </a:xfrm>
           <a:prstGeom prst="rect">
             <a:avLst/>
@@ -31206,7 +36030,17 @@
             </a:pPr>
             <a:r>
               <a:rPr lang="en-US" dirty="0"/>
-              <a:t>the collection of conditions considered</a:t>
+              <a:t>the factors</a:t>
+            </a:r>
+          </a:p>
+          <a:p>
+            <a:pPr marL="285750" indent="-285750">
+              <a:buFont typeface="Arial" panose="020B0604020202020204" pitchFamily="34" charset="0"/>
+              <a:buChar char="•"/>
+            </a:pPr>
+            <a:r>
+              <a:rPr lang="en-US" dirty="0"/>
+              <a:t>the collection of conditions considered, the combinations of factor levels</a:t>
             </a:r>
           </a:p>
           <a:p>
@@ -31221,312 +36055,6 @@
           </a:p>
         </p:txBody>
       </p:sp>
-      <p:grpSp>
-        <p:nvGrpSpPr>
-          <p:cNvPr id="21" name="Group 20">
-            <a:extLst>
-              <a:ext uri="{FF2B5EF4-FFF2-40B4-BE49-F238E27FC236}">
-                <a16:creationId xmlns:a16="http://schemas.microsoft.com/office/drawing/2014/main" id="{7FEDCF9E-347F-25E8-0D11-7E228DE03C47}"/>
-              </a:ext>
-            </a:extLst>
-          </p:cNvPr>
-          <p:cNvGrpSpPr/>
-          <p:nvPr/>
-        </p:nvGrpSpPr>
-        <p:grpSpPr>
-          <a:xfrm>
-            <a:off x="2480855" y="770659"/>
-            <a:ext cx="6163056" cy="2880848"/>
-            <a:chOff x="987552" y="839007"/>
-            <a:chExt cx="6163056" cy="2880848"/>
-          </a:xfrm>
-        </p:grpSpPr>
-        <p:grpSp>
-          <p:nvGrpSpPr>
-            <p:cNvPr id="20" name="Group 19">
-              <a:extLst>
-                <a:ext uri="{FF2B5EF4-FFF2-40B4-BE49-F238E27FC236}">
-                  <a16:creationId xmlns:a16="http://schemas.microsoft.com/office/drawing/2014/main" id="{64DBBE3D-49CC-0EA3-0390-BA26FD1261C3}"/>
-                </a:ext>
-              </a:extLst>
-            </p:cNvPr>
-            <p:cNvGrpSpPr/>
-            <p:nvPr/>
-          </p:nvGrpSpPr>
-          <p:grpSpPr>
-            <a:xfrm>
-              <a:off x="987552" y="839007"/>
-              <a:ext cx="6163056" cy="2880848"/>
-              <a:chOff x="987552" y="839007"/>
-              <a:chExt cx="6163056" cy="2880848"/>
-            </a:xfrm>
-          </p:grpSpPr>
-          <p:pic>
-            <p:nvPicPr>
-              <p:cNvPr id="13314" name="Picture 2" descr="Design of Experiments (DoE) | Method, Chemistry, Videos">
-                <a:extLst>
-                  <a:ext uri="{FF2B5EF4-FFF2-40B4-BE49-F238E27FC236}">
-                    <a16:creationId xmlns:a16="http://schemas.microsoft.com/office/drawing/2014/main" id="{C176EC80-0088-F042-B839-B09C7DC218B6}"/>
-                  </a:ext>
-                </a:extLst>
-              </p:cNvPr>
-              <p:cNvPicPr>
-                <a:picLocks noChangeAspect="1" noChangeArrowheads="1"/>
-              </p:cNvPicPr>
-              <p:nvPr/>
-            </p:nvPicPr>
-            <p:blipFill>
-              <a:blip r:embed="rId2">
-                <a:extLst>
-                  <a:ext uri="{28A0092B-C50C-407E-A947-70E740481C1C}">
-                    <a14:useLocalDpi xmlns:a14="http://schemas.microsoft.com/office/drawing/2010/main" val="0"/>
-                  </a:ext>
-                </a:extLst>
-              </a:blip>
-              <a:srcRect/>
-              <a:stretch>
-                <a:fillRect/>
-              </a:stretch>
-            </p:blipFill>
-            <p:spPr bwMode="auto">
-              <a:xfrm>
-                <a:off x="987552" y="856488"/>
-                <a:ext cx="6163056" cy="2863367"/>
-              </a:xfrm>
-              <a:prstGeom prst="rect">
-                <a:avLst/>
-              </a:prstGeom>
-              <a:noFill/>
-              <a:extLst>
-                <a:ext uri="{909E8E84-426E-40DD-AFC4-6F175D3DCCD1}">
-                  <a14:hiddenFill xmlns:a14="http://schemas.microsoft.com/office/drawing/2010/main">
-                    <a:solidFill>
-                      <a:srgbClr val="FFFFFF"/>
-                    </a:solidFill>
-                  </a14:hiddenFill>
-                </a:ext>
-              </a:extLst>
-            </p:spPr>
-          </p:pic>
-          <p:sp>
-            <p:nvSpPr>
-              <p:cNvPr id="6" name="Rectangle 5">
-                <a:extLst>
-                  <a:ext uri="{FF2B5EF4-FFF2-40B4-BE49-F238E27FC236}">
-                    <a16:creationId xmlns:a16="http://schemas.microsoft.com/office/drawing/2014/main" id="{0C78D342-2525-F44F-61D5-E8B8E568B340}"/>
-                  </a:ext>
-                </a:extLst>
-              </p:cNvPr>
-              <p:cNvSpPr/>
-              <p:nvPr/>
-            </p:nvSpPr>
-            <p:spPr>
-              <a:xfrm>
-                <a:off x="987552" y="839007"/>
-                <a:ext cx="3086737" cy="2737570"/>
-              </a:xfrm>
-              <a:prstGeom prst="rect">
-                <a:avLst/>
-              </a:prstGeom>
-              <a:solidFill>
-                <a:schemeClr val="bg1"/>
-              </a:solidFill>
-              <a:ln>
-                <a:noFill/>
-              </a:ln>
-              <a:effectLst>
-                <a:outerShdw dist="23000" sx="1000" sy="1000" rotWithShape="0">
-                  <a:srgbClr val="000000"/>
-                </a:outerShdw>
-              </a:effectLst>
-            </p:spPr>
-            <p:style>
-              <a:lnRef idx="1">
-                <a:schemeClr val="accent1"/>
-              </a:lnRef>
-              <a:fillRef idx="3">
-                <a:schemeClr val="accent1"/>
-              </a:fillRef>
-              <a:effectRef idx="2">
-                <a:schemeClr val="accent1"/>
-              </a:effectRef>
-              <a:fontRef idx="minor">
-                <a:schemeClr val="lt1"/>
-              </a:fontRef>
-            </p:style>
-            <p:txBody>
-              <a:bodyPr rtlCol="0" anchor="ctr"/>
-              <a:lstStyle/>
-              <a:p>
-                <a:pPr algn="ctr"/>
-                <a:endParaRPr lang="en-US"/>
-              </a:p>
-            </p:txBody>
-          </p:sp>
-        </p:grpSp>
-        <p:sp>
-          <p:nvSpPr>
-            <p:cNvPr id="8" name="Rectangle 7">
-              <a:extLst>
-                <a:ext uri="{FF2B5EF4-FFF2-40B4-BE49-F238E27FC236}">
-                  <a16:creationId xmlns:a16="http://schemas.microsoft.com/office/drawing/2014/main" id="{CA188A9C-A5DA-164B-F0D9-EB87CEA70940}"/>
-                </a:ext>
-              </a:extLst>
-            </p:cNvPr>
-            <p:cNvSpPr/>
-            <p:nvPr/>
-          </p:nvSpPr>
-          <p:spPr>
-            <a:xfrm>
-              <a:off x="6006779" y="2245488"/>
-              <a:ext cx="752836" cy="162045"/>
-            </a:xfrm>
-            <a:prstGeom prst="rect">
-              <a:avLst/>
-            </a:prstGeom>
-            <a:noFill/>
-            <a:ln w="76200">
-              <a:solidFill>
-                <a:schemeClr val="tx2">
-                  <a:lumMod val="20000"/>
-                  <a:lumOff val="80000"/>
-                </a:schemeClr>
-              </a:solidFill>
-            </a:ln>
-            <a:effectLst>
-              <a:outerShdw dist="23000" sx="1000" sy="1000" rotWithShape="0">
-                <a:srgbClr val="000000"/>
-              </a:outerShdw>
-            </a:effectLst>
-          </p:spPr>
-          <p:style>
-            <a:lnRef idx="1">
-              <a:schemeClr val="accent1"/>
-            </a:lnRef>
-            <a:fillRef idx="3">
-              <a:schemeClr val="accent1"/>
-            </a:fillRef>
-            <a:effectRef idx="2">
-              <a:schemeClr val="accent1"/>
-            </a:effectRef>
-            <a:fontRef idx="minor">
-              <a:schemeClr val="lt1"/>
-            </a:fontRef>
-          </p:style>
-          <p:txBody>
-            <a:bodyPr rtlCol="0" anchor="ctr"/>
-            <a:lstStyle/>
-            <a:p>
-              <a:pPr algn="ctr"/>
-              <a:endParaRPr lang="en-US"/>
-            </a:p>
-          </p:txBody>
-        </p:sp>
-        <p:cxnSp>
-          <p:nvCxnSpPr>
-            <p:cNvPr id="12" name="Straight Connector 11">
-              <a:extLst>
-                <a:ext uri="{FF2B5EF4-FFF2-40B4-BE49-F238E27FC236}">
-                  <a16:creationId xmlns:a16="http://schemas.microsoft.com/office/drawing/2014/main" id="{3CB8F0BF-9469-7282-14E3-FC44755BAD55}"/>
-                </a:ext>
-              </a:extLst>
-            </p:cNvPr>
-            <p:cNvCxnSpPr>
-              <a:cxnSpLocks/>
-              <a:stCxn id="8" idx="2"/>
-              <a:endCxn id="16" idx="2"/>
-            </p:cNvCxnSpPr>
-            <p:nvPr/>
-          </p:nvCxnSpPr>
-          <p:spPr>
-            <a:xfrm>
-              <a:off x="6383197" y="2407533"/>
-              <a:ext cx="0" cy="165169"/>
-            </a:xfrm>
-            <a:prstGeom prst="line">
-              <a:avLst/>
-            </a:prstGeom>
-            <a:ln w="38100">
-              <a:solidFill>
-                <a:schemeClr val="accent1">
-                  <a:lumMod val="40000"/>
-                  <a:lumOff val="60000"/>
-                </a:schemeClr>
-              </a:solidFill>
-            </a:ln>
-            <a:effectLst/>
-          </p:spPr>
-          <p:style>
-            <a:lnRef idx="2">
-              <a:schemeClr val="accent1"/>
-            </a:lnRef>
-            <a:fillRef idx="0">
-              <a:schemeClr val="accent1"/>
-            </a:fillRef>
-            <a:effectRef idx="1">
-              <a:schemeClr val="accent1"/>
-            </a:effectRef>
-            <a:fontRef idx="minor">
-              <a:schemeClr val="tx1"/>
-            </a:fontRef>
-          </p:style>
-        </p:cxnSp>
-        <p:sp>
-          <p:nvSpPr>
-            <p:cNvPr id="16" name="Rectangle 15">
-              <a:extLst>
-                <a:ext uri="{FF2B5EF4-FFF2-40B4-BE49-F238E27FC236}">
-                  <a16:creationId xmlns:a16="http://schemas.microsoft.com/office/drawing/2014/main" id="{98ED895C-56C4-89FE-3633-9C12F3205A34}"/>
-                </a:ext>
-              </a:extLst>
-            </p:cNvPr>
-            <p:cNvSpPr/>
-            <p:nvPr/>
-          </p:nvSpPr>
-          <p:spPr>
-            <a:xfrm>
-              <a:off x="6006779" y="2410657"/>
-              <a:ext cx="752836" cy="162045"/>
-            </a:xfrm>
-            <a:prstGeom prst="rect">
-              <a:avLst/>
-            </a:prstGeom>
-            <a:noFill/>
-            <a:ln w="12700">
-              <a:solidFill>
-                <a:srgbClr val="FF0000"/>
-              </a:solidFill>
-            </a:ln>
-            <a:effectLst>
-              <a:outerShdw dist="23000" sx="1000" sy="1000" rotWithShape="0">
-                <a:srgbClr val="000000"/>
-              </a:outerShdw>
-            </a:effectLst>
-          </p:spPr>
-          <p:style>
-            <a:lnRef idx="1">
-              <a:schemeClr val="accent1"/>
-            </a:lnRef>
-            <a:fillRef idx="3">
-              <a:schemeClr val="accent1"/>
-            </a:fillRef>
-            <a:effectRef idx="2">
-              <a:schemeClr val="accent1"/>
-            </a:effectRef>
-            <a:fontRef idx="minor">
-              <a:schemeClr val="lt1"/>
-            </a:fontRef>
-          </p:style>
-          <p:txBody>
-            <a:bodyPr rtlCol="0" anchor="ctr"/>
-            <a:lstStyle/>
-            <a:p>
-              <a:pPr algn="ctr"/>
-              <a:endParaRPr lang="en-US"/>
-            </a:p>
-          </p:txBody>
-        </p:sp>
-      </p:grpSp>
       <p:sp>
         <p:nvSpPr>
           <p:cNvPr id="10" name="TextBox 9">
@@ -31541,7 +36069,7 @@
         </p:nvSpPr>
         <p:spPr>
           <a:xfrm>
-            <a:off x="307909" y="4028527"/>
+            <a:off x="362547" y="4358234"/>
             <a:ext cx="8186711" cy="646331"/>
           </a:xfrm>
           <a:prstGeom prst="rect">
@@ -31576,8 +36104,8 @@
         </p:nvSpPr>
         <p:spPr>
           <a:xfrm>
-            <a:off x="362547" y="1204405"/>
-            <a:ext cx="4871925" cy="2031325"/>
+            <a:off x="362547" y="1139746"/>
+            <a:ext cx="4871925" cy="2585323"/>
           </a:xfrm>
           <a:prstGeom prst="rect">
             <a:avLst/>
@@ -31592,11 +36120,22 @@
           <a:p>
             <a:r>
               <a:rPr lang="en-US" b="1" dirty="0"/>
+              <a:t>System: </a:t>
+            </a:r>
+            <a:r>
+              <a:rPr lang="en-US" dirty="0"/>
+              <a:t>What is being studied</a:t>
+            </a:r>
+            <a:endParaRPr lang="en-US" b="1" dirty="0"/>
+          </a:p>
+          <a:p>
+            <a:r>
+              <a:rPr lang="en-US" b="1" dirty="0"/>
               <a:t>Factor</a:t>
             </a:r>
             <a:r>
               <a:rPr lang="en-US" dirty="0"/>
-              <a:t>: Something changed in the experiment (e.g., parameter)</a:t>
+              <a:t>: Something changed in the system (e.g., parameter)</a:t>
             </a:r>
           </a:p>
           <a:p>
@@ -31612,21 +36151,21 @@
           <a:p>
             <a:r>
               <a:rPr lang="en-US" b="1" dirty="0"/>
+              <a:t>Response</a:t>
+            </a:r>
+            <a:r>
+              <a:rPr lang="en-US" dirty="0"/>
+              <a:t>:  Measured result. Output of the system.</a:t>
+            </a:r>
+          </a:p>
+          <a:p>
+            <a:r>
+              <a:rPr lang="en-US" b="1" u="sng" dirty="0"/>
               <a:t>Condition</a:t>
             </a:r>
             <a:r>
               <a:rPr lang="en-US" dirty="0"/>
-              <a:t>: The levels assigned to factors for an experiment</a:t>
-            </a:r>
-          </a:p>
-          <a:p>
-            <a:r>
-              <a:rPr lang="en-US" b="1" dirty="0"/>
-              <a:t>Response</a:t>
-            </a:r>
-            <a:r>
-              <a:rPr lang="en-US" dirty="0"/>
-              <a:t>:  Measured result of an experiment</a:t>
+              <a:t>: The levels assigned to all factors under consideration.</a:t>
             </a:r>
           </a:p>
         </p:txBody>
@@ -31645,7 +36184,7 @@
         </p:nvSpPr>
         <p:spPr>
           <a:xfrm>
-            <a:off x="362547" y="3465660"/>
+            <a:off x="362547" y="3881839"/>
             <a:ext cx="5673994" cy="369332"/>
           </a:xfrm>
           <a:prstGeom prst="rect">
@@ -32382,7 +36921,7 @@
         <p:spPr>
           <a:xfrm>
             <a:off x="514805" y="4576899"/>
-            <a:ext cx="6122189" cy="646331"/>
+            <a:ext cx="7109703" cy="646331"/>
           </a:xfrm>
           <a:prstGeom prst="rect">
             <a:avLst/>
@@ -32403,7 +36942,7 @@
           <a:p>
             <a:r>
               <a:rPr lang="en-US" dirty="0"/>
-              <a:t>A condition corresponds to a row in the table.</a:t>
+              <a:t>A condition corresponds to the values of factors in a row of the table.</a:t>
             </a:r>
           </a:p>
         </p:txBody>
@@ -33672,65 +38211,6 @@
       </p:sp>
       <p:sp>
         <p:nvSpPr>
-          <p:cNvPr id="3" name="TextBox 2">
-            <a:extLst>
-              <a:ext uri="{FF2B5EF4-FFF2-40B4-BE49-F238E27FC236}">
-                <a16:creationId xmlns:a16="http://schemas.microsoft.com/office/drawing/2014/main" id="{1DD984C2-374B-F940-BC68-E1F9149E6268}"/>
-              </a:ext>
-            </a:extLst>
-          </p:cNvPr>
-          <p:cNvSpPr txBox="1"/>
-          <p:nvPr/>
-        </p:nvSpPr>
-        <p:spPr>
-          <a:xfrm>
-            <a:off x="4069080" y="3587716"/>
-            <a:ext cx="4511171" cy="646331"/>
-          </a:xfrm>
-          <a:prstGeom prst="rect">
-            <a:avLst/>
-          </a:prstGeom>
-          <a:noFill/>
-        </p:spPr>
-        <p:txBody>
-          <a:bodyPr wrap="none" rtlCol="0">
-            <a:spAutoFit/>
-          </a:bodyPr>
-          <a:lstStyle/>
-          <a:p>
-            <a:r>
-              <a:rPr lang="en-US" sz="1200" b="1" dirty="0"/>
-              <a:t>Factor</a:t>
-            </a:r>
-            <a:r>
-              <a:rPr lang="en-US" sz="1200" dirty="0"/>
-              <a:t>: Something changed in the experiment (e.g., parameter)</a:t>
-            </a:r>
-          </a:p>
-          <a:p>
-            <a:r>
-              <a:rPr lang="en-US" sz="1200" b="1" dirty="0"/>
-              <a:t>Level of factor</a:t>
-            </a:r>
-            <a:r>
-              <a:rPr lang="en-US" sz="1200" dirty="0"/>
-              <a:t>: Value/setting of a factor.</a:t>
-            </a:r>
-          </a:p>
-          <a:p>
-            <a:r>
-              <a:rPr lang="en-US" sz="1200" b="1" dirty="0"/>
-              <a:t>Response</a:t>
-            </a:r>
-            <a:r>
-              <a:rPr lang="en-US" sz="1200" dirty="0"/>
-              <a:t>:  Measured result of an experiment</a:t>
-            </a:r>
-          </a:p>
-        </p:txBody>
-      </p:sp>
-      <p:sp>
-        <p:nvSpPr>
           <p:cNvPr id="7" name="Rectangle 6">
             <a:extLst>
               <a:ext uri="{FF2B5EF4-FFF2-40B4-BE49-F238E27FC236}">
@@ -33743,8 +38223,8 @@
         </p:nvSpPr>
         <p:spPr>
           <a:xfrm>
-            <a:off x="3945636" y="904493"/>
-            <a:ext cx="3461004" cy="2597659"/>
+            <a:off x="4921098" y="1133487"/>
+            <a:ext cx="3461004" cy="953993"/>
           </a:xfrm>
           <a:prstGeom prst="rect">
             <a:avLst/>
@@ -33780,7 +38260,14 @@
           <a:lstStyle/>
           <a:p>
             <a:pPr algn="ctr"/>
-            <a:endParaRPr lang="en-US"/>
+            <a:r>
+              <a:rPr lang="en-US" dirty="0">
+                <a:solidFill>
+                  <a:schemeClr val="tx1"/>
+                </a:solidFill>
+              </a:rPr>
+              <a:t>The baseline is the status quo, your starting point for exploration.</a:t>
+            </a:r>
           </a:p>
         </p:txBody>
       </p:sp>
@@ -33904,123 +38391,12 @@
           </a:p>
         </p:txBody>
       </p:sp>
-      <p:sp>
-        <p:nvSpPr>
-          <p:cNvPr id="15" name="TextBox 14">
+      <p:grpSp>
+        <p:nvGrpSpPr>
+          <p:cNvPr id="5" name="Group 4">
             <a:extLst>
               <a:ext uri="{FF2B5EF4-FFF2-40B4-BE49-F238E27FC236}">
-                <a16:creationId xmlns:a16="http://schemas.microsoft.com/office/drawing/2014/main" id="{93FC6E44-9EF4-BE69-97B9-029E38499593}"/>
-              </a:ext>
-            </a:extLst>
-          </p:cNvPr>
-          <p:cNvSpPr txBox="1"/>
-          <p:nvPr/>
-        </p:nvSpPr>
-        <p:spPr>
-          <a:xfrm>
-            <a:off x="2520433" y="2569761"/>
-            <a:ext cx="354584" cy="276999"/>
-          </a:xfrm>
-          <a:prstGeom prst="rect">
-            <a:avLst/>
-          </a:prstGeom>
-          <a:solidFill>
-            <a:schemeClr val="bg1"/>
-          </a:solidFill>
-        </p:spPr>
-        <p:txBody>
-          <a:bodyPr wrap="none" rtlCol="0">
-            <a:spAutoFit/>
-          </a:bodyPr>
-          <a:lstStyle/>
-          <a:p>
-            <a:r>
-              <a:rPr lang="en-US" sz="1200" dirty="0"/>
-              <a:t>25</a:t>
-            </a:r>
-          </a:p>
-        </p:txBody>
-      </p:sp>
-      <p:sp>
-        <p:nvSpPr>
-          <p:cNvPr id="16" name="TextBox 15">
-            <a:extLst>
-              <a:ext uri="{FF2B5EF4-FFF2-40B4-BE49-F238E27FC236}">
-                <a16:creationId xmlns:a16="http://schemas.microsoft.com/office/drawing/2014/main" id="{EF47FDD3-5C19-7E4E-014E-846A9698FEA1}"/>
-              </a:ext>
-            </a:extLst>
-          </p:cNvPr>
-          <p:cNvSpPr txBox="1"/>
-          <p:nvPr/>
-        </p:nvSpPr>
-        <p:spPr>
-          <a:xfrm>
-            <a:off x="1857928" y="3159033"/>
-            <a:ext cx="354584" cy="276999"/>
-          </a:xfrm>
-          <a:prstGeom prst="rect">
-            <a:avLst/>
-          </a:prstGeom>
-          <a:solidFill>
-            <a:schemeClr val="bg1"/>
-          </a:solidFill>
-        </p:spPr>
-        <p:txBody>
-          <a:bodyPr wrap="none" rtlCol="0">
-            <a:spAutoFit/>
-          </a:bodyPr>
-          <a:lstStyle/>
-          <a:p>
-            <a:r>
-              <a:rPr lang="en-US" sz="1200" dirty="0"/>
-              <a:t>50</a:t>
-            </a:r>
-          </a:p>
-        </p:txBody>
-      </p:sp>
-      <p:sp>
-        <p:nvSpPr>
-          <p:cNvPr id="17" name="TextBox 16">
-            <a:extLst>
-              <a:ext uri="{FF2B5EF4-FFF2-40B4-BE49-F238E27FC236}">
-                <a16:creationId xmlns:a16="http://schemas.microsoft.com/office/drawing/2014/main" id="{463A16D8-0F4A-3D72-8750-A5B22FA1CDB8}"/>
-              </a:ext>
-            </a:extLst>
-          </p:cNvPr>
-          <p:cNvSpPr txBox="1"/>
-          <p:nvPr/>
-        </p:nvSpPr>
-        <p:spPr>
-          <a:xfrm rot="18827094">
-            <a:off x="1726574" y="2503649"/>
-            <a:ext cx="902811" cy="338554"/>
-          </a:xfrm>
-          <a:prstGeom prst="rect">
-            <a:avLst/>
-          </a:prstGeom>
-          <a:solidFill>
-            <a:schemeClr val="bg1"/>
-          </a:solidFill>
-        </p:spPr>
-        <p:txBody>
-          <a:bodyPr wrap="none" rtlCol="0">
-            <a:spAutoFit/>
-          </a:bodyPr>
-          <a:lstStyle/>
-          <a:p>
-            <a:r>
-              <a:rPr lang="en-US" sz="1600" dirty="0"/>
-              <a:t>quantity</a:t>
-            </a:r>
-          </a:p>
-        </p:txBody>
-      </p:sp>
-      <p:grpSp>
-        <p:nvGrpSpPr>
-          <p:cNvPr id="57" name="Group 56">
-            <a:extLst>
-              <a:ext uri="{FF2B5EF4-FFF2-40B4-BE49-F238E27FC236}">
-                <a16:creationId xmlns:a16="http://schemas.microsoft.com/office/drawing/2014/main" id="{1EAB55F1-8B1E-0D0A-39E1-99FE6B84CC37}"/>
+                <a16:creationId xmlns:a16="http://schemas.microsoft.com/office/drawing/2014/main" id="{4C653FFA-D199-77F1-5950-02064A687115}"/>
               </a:ext>
             </a:extLst>
           </p:cNvPr>
@@ -34029,104 +38405,129 @@
         </p:nvGrpSpPr>
         <p:grpSpPr>
           <a:xfrm>
-            <a:off x="1732592" y="1649232"/>
-            <a:ext cx="2218199" cy="1753653"/>
-            <a:chOff x="1732592" y="1649232"/>
-            <a:chExt cx="2218199" cy="1753653"/>
+            <a:off x="1151702" y="1649232"/>
+            <a:ext cx="2799089" cy="2319189"/>
+            <a:chOff x="1151702" y="1649232"/>
+            <a:chExt cx="2799089" cy="2319189"/>
           </a:xfrm>
         </p:grpSpPr>
-        <p:cxnSp>
-          <p:nvCxnSpPr>
-            <p:cNvPr id="29" name="Straight Connector 28">
+        <p:sp>
+          <p:nvSpPr>
+            <p:cNvPr id="15" name="TextBox 14">
               <a:extLst>
                 <a:ext uri="{FF2B5EF4-FFF2-40B4-BE49-F238E27FC236}">
-                  <a16:creationId xmlns:a16="http://schemas.microsoft.com/office/drawing/2014/main" id="{0AE0BEAD-2C5C-E255-F2AF-C193089D51F8}"/>
+                  <a16:creationId xmlns:a16="http://schemas.microsoft.com/office/drawing/2014/main" id="{93FC6E44-9EF4-BE69-97B9-029E38499593}"/>
                 </a:ext>
               </a:extLst>
             </p:cNvPr>
-            <p:cNvCxnSpPr>
-              <a:cxnSpLocks/>
-            </p:cNvCxnSpPr>
+            <p:cNvSpPr txBox="1"/>
             <p:nvPr/>
-          </p:nvCxnSpPr>
+          </p:nvSpPr>
           <p:spPr>
             <a:xfrm>
-              <a:off x="1784719" y="3390109"/>
-              <a:ext cx="1234188" cy="12776"/>
+              <a:off x="2520433" y="2569761"/>
+              <a:ext cx="354584" cy="276999"/>
             </a:xfrm>
-            <a:prstGeom prst="line">
+            <a:prstGeom prst="rect">
               <a:avLst/>
             </a:prstGeom>
-            <a:effectLst>
-              <a:outerShdw dist="20000" sx="1000" sy="1000" rotWithShape="0">
-                <a:srgbClr val="000000"/>
-              </a:outerShdw>
-            </a:effectLst>
+            <a:solidFill>
+              <a:schemeClr val="bg1"/>
+            </a:solidFill>
           </p:spPr>
-          <p:style>
-            <a:lnRef idx="2">
-              <a:schemeClr val="accent1"/>
-            </a:lnRef>
-            <a:fillRef idx="0">
-              <a:schemeClr val="accent1"/>
-            </a:fillRef>
-            <a:effectRef idx="1">
-              <a:schemeClr val="accent1"/>
-            </a:effectRef>
-            <a:fontRef idx="minor">
-              <a:schemeClr val="tx1"/>
-            </a:fontRef>
-          </p:style>
-        </p:cxnSp>
-        <p:cxnSp>
-          <p:nvCxnSpPr>
-            <p:cNvPr id="30" name="Straight Connector 29">
+          <p:txBody>
+            <a:bodyPr wrap="none" rtlCol="0">
+              <a:spAutoFit/>
+            </a:bodyPr>
+            <a:lstStyle/>
+            <a:p>
+              <a:r>
+                <a:rPr lang="en-US" sz="1200" dirty="0"/>
+                <a:t>25</a:t>
+              </a:r>
+            </a:p>
+          </p:txBody>
+        </p:sp>
+        <p:sp>
+          <p:nvSpPr>
+            <p:cNvPr id="16" name="TextBox 15">
               <a:extLst>
                 <a:ext uri="{FF2B5EF4-FFF2-40B4-BE49-F238E27FC236}">
-                  <a16:creationId xmlns:a16="http://schemas.microsoft.com/office/drawing/2014/main" id="{DB070D94-B41F-BB2A-4A92-7011F80C912C}"/>
+                  <a16:creationId xmlns:a16="http://schemas.microsoft.com/office/drawing/2014/main" id="{EF47FDD3-5C19-7E4E-014E-846A9698FEA1}"/>
                 </a:ext>
               </a:extLst>
             </p:cNvPr>
-            <p:cNvCxnSpPr>
-              <a:cxnSpLocks/>
-            </p:cNvCxnSpPr>
+            <p:cNvSpPr txBox="1"/>
             <p:nvPr/>
-          </p:nvCxnSpPr>
+          </p:nvSpPr>
           <p:spPr>
-            <a:xfrm flipV="1">
-              <a:off x="2691957" y="2461005"/>
-              <a:ext cx="1251340" cy="14799"/>
+            <a:xfrm>
+              <a:off x="1857928" y="3159033"/>
+              <a:ext cx="354584" cy="276999"/>
             </a:xfrm>
-            <a:prstGeom prst="line">
+            <a:prstGeom prst="rect">
               <a:avLst/>
             </a:prstGeom>
-            <a:effectLst>
-              <a:outerShdw dist="20000" sx="1000" sy="1000" rotWithShape="0">
-                <a:srgbClr val="000000"/>
-              </a:outerShdw>
-            </a:effectLst>
+            <a:solidFill>
+              <a:schemeClr val="bg1"/>
+            </a:solidFill>
           </p:spPr>
-          <p:style>
-            <a:lnRef idx="2">
-              <a:schemeClr val="accent1"/>
-            </a:lnRef>
-            <a:fillRef idx="0">
-              <a:schemeClr val="accent1"/>
-            </a:fillRef>
-            <a:effectRef idx="1">
-              <a:schemeClr val="accent1"/>
-            </a:effectRef>
-            <a:fontRef idx="minor">
-              <a:schemeClr val="tx1"/>
-            </a:fontRef>
-          </p:style>
-        </p:cxnSp>
+          <p:txBody>
+            <a:bodyPr wrap="none" rtlCol="0">
+              <a:spAutoFit/>
+            </a:bodyPr>
+            <a:lstStyle/>
+            <a:p>
+              <a:r>
+                <a:rPr lang="en-US" sz="1200" dirty="0"/>
+                <a:t>50</a:t>
+              </a:r>
+            </a:p>
+          </p:txBody>
+        </p:sp>
+        <p:sp>
+          <p:nvSpPr>
+            <p:cNvPr id="17" name="TextBox 16">
+              <a:extLst>
+                <a:ext uri="{FF2B5EF4-FFF2-40B4-BE49-F238E27FC236}">
+                  <a16:creationId xmlns:a16="http://schemas.microsoft.com/office/drawing/2014/main" id="{463A16D8-0F4A-3D72-8750-A5B22FA1CDB8}"/>
+                </a:ext>
+              </a:extLst>
+            </p:cNvPr>
+            <p:cNvSpPr txBox="1"/>
+            <p:nvPr/>
+          </p:nvSpPr>
+          <p:spPr>
+            <a:xfrm rot="18827094">
+              <a:off x="1726574" y="2503649"/>
+              <a:ext cx="902811" cy="338554"/>
+            </a:xfrm>
+            <a:prstGeom prst="rect">
+              <a:avLst/>
+            </a:prstGeom>
+            <a:solidFill>
+              <a:schemeClr val="bg1"/>
+            </a:solidFill>
+          </p:spPr>
+          <p:txBody>
+            <a:bodyPr wrap="none" rtlCol="0">
+              <a:spAutoFit/>
+            </a:bodyPr>
+            <a:lstStyle/>
+            <a:p>
+              <a:r>
+                <a:rPr lang="en-US" sz="1600" dirty="0"/>
+                <a:t>quantity</a:t>
+              </a:r>
+            </a:p>
+          </p:txBody>
+        </p:sp>
         <p:grpSp>
           <p:nvGrpSpPr>
-            <p:cNvPr id="31" name="Group 30">
+            <p:cNvPr id="57" name="Group 56">
               <a:extLst>
                 <a:ext uri="{FF2B5EF4-FFF2-40B4-BE49-F238E27FC236}">
-                  <a16:creationId xmlns:a16="http://schemas.microsoft.com/office/drawing/2014/main" id="{F3BE6BF6-E7EF-2878-6A08-A794AD409D5D}"/>
+                  <a16:creationId xmlns:a16="http://schemas.microsoft.com/office/drawing/2014/main" id="{1EAB55F1-8B1E-0D0A-39E1-99FE6B84CC37}"/>
                 </a:ext>
               </a:extLst>
             </p:cNvPr>
@@ -34136,17 +38537,17 @@
           <p:grpSpPr>
             <a:xfrm>
               <a:off x="1732592" y="1649232"/>
-              <a:ext cx="2218199" cy="1753367"/>
-              <a:chOff x="1927754" y="3960186"/>
-              <a:chExt cx="2218199" cy="1753367"/>
+              <a:ext cx="2218199" cy="1753653"/>
+              <a:chOff x="1732592" y="1649232"/>
+              <a:chExt cx="2218199" cy="1753653"/>
             </a:xfrm>
           </p:grpSpPr>
           <p:cxnSp>
             <p:nvCxnSpPr>
-              <p:cNvPr id="38" name="Straight Connector 37">
+              <p:cNvPr id="29" name="Straight Connector 28">
                 <a:extLst>
                   <a:ext uri="{FF2B5EF4-FFF2-40B4-BE49-F238E27FC236}">
-                    <a16:creationId xmlns:a16="http://schemas.microsoft.com/office/drawing/2014/main" id="{456CED5A-2EF8-97B3-0186-CD2B9CA7F072}"/>
+                    <a16:creationId xmlns:a16="http://schemas.microsoft.com/office/drawing/2014/main" id="{0AE0BEAD-2C5C-E255-F2AF-C193089D51F8}"/>
                   </a:ext>
                 </a:extLst>
               </p:cNvPr>
@@ -34156,9 +38557,9 @@
               <p:nvPr/>
             </p:nvCxnSpPr>
             <p:spPr>
-              <a:xfrm flipV="1">
-                <a:off x="1979881" y="4779358"/>
-                <a:ext cx="907125" cy="934195"/>
+              <a:xfrm>
+                <a:off x="1784719" y="3390109"/>
+                <a:ext cx="1234188" cy="12776"/>
               </a:xfrm>
               <a:prstGeom prst="line">
                 <a:avLst/>
@@ -34186,10 +38587,10 @@
           </p:cxnSp>
           <p:cxnSp>
             <p:nvCxnSpPr>
-              <p:cNvPr id="39" name="Straight Connector 38">
+              <p:cNvPr id="30" name="Straight Connector 29">
                 <a:extLst>
                   <a:ext uri="{FF2B5EF4-FFF2-40B4-BE49-F238E27FC236}">
-                    <a16:creationId xmlns:a16="http://schemas.microsoft.com/office/drawing/2014/main" id="{3F79639A-B0F7-8A66-D580-C5B5E0F45557}"/>
+                    <a16:creationId xmlns:a16="http://schemas.microsoft.com/office/drawing/2014/main" id="{DB070D94-B41F-BB2A-4A92-7011F80C912C}"/>
                   </a:ext>
                 </a:extLst>
               </p:cNvPr>
@@ -34200,8 +38601,244 @@
             </p:nvCxnSpPr>
             <p:spPr>
               <a:xfrm flipV="1">
-                <a:off x="3190855" y="4771675"/>
-                <a:ext cx="955098" cy="941878"/>
+                <a:off x="2691957" y="2461005"/>
+                <a:ext cx="1251340" cy="14799"/>
+              </a:xfrm>
+              <a:prstGeom prst="line">
+                <a:avLst/>
+              </a:prstGeom>
+              <a:effectLst>
+                <a:outerShdw dist="20000" sx="1000" sy="1000" rotWithShape="0">
+                  <a:srgbClr val="000000"/>
+                </a:outerShdw>
+              </a:effectLst>
+            </p:spPr>
+            <p:style>
+              <a:lnRef idx="2">
+                <a:schemeClr val="accent1"/>
+              </a:lnRef>
+              <a:fillRef idx="0">
+                <a:schemeClr val="accent1"/>
+              </a:fillRef>
+              <a:effectRef idx="1">
+                <a:schemeClr val="accent1"/>
+              </a:effectRef>
+              <a:fontRef idx="minor">
+                <a:schemeClr val="tx1"/>
+              </a:fontRef>
+            </p:style>
+          </p:cxnSp>
+          <p:grpSp>
+            <p:nvGrpSpPr>
+              <p:cNvPr id="31" name="Group 30">
+                <a:extLst>
+                  <a:ext uri="{FF2B5EF4-FFF2-40B4-BE49-F238E27FC236}">
+                    <a16:creationId xmlns:a16="http://schemas.microsoft.com/office/drawing/2014/main" id="{F3BE6BF6-E7EF-2878-6A08-A794AD409D5D}"/>
+                  </a:ext>
+                </a:extLst>
+              </p:cNvPr>
+              <p:cNvGrpSpPr/>
+              <p:nvPr/>
+            </p:nvGrpSpPr>
+            <p:grpSpPr>
+              <a:xfrm>
+                <a:off x="1732592" y="1649232"/>
+                <a:ext cx="2218199" cy="1753367"/>
+                <a:chOff x="1927754" y="3960186"/>
+                <a:chExt cx="2218199" cy="1753367"/>
+              </a:xfrm>
+            </p:grpSpPr>
+            <p:cxnSp>
+              <p:nvCxnSpPr>
+                <p:cNvPr id="38" name="Straight Connector 37">
+                  <a:extLst>
+                    <a:ext uri="{FF2B5EF4-FFF2-40B4-BE49-F238E27FC236}">
+                      <a16:creationId xmlns:a16="http://schemas.microsoft.com/office/drawing/2014/main" id="{456CED5A-2EF8-97B3-0186-CD2B9CA7F072}"/>
+                    </a:ext>
+                  </a:extLst>
+                </p:cNvPr>
+                <p:cNvCxnSpPr>
+                  <a:cxnSpLocks/>
+                </p:cNvCxnSpPr>
+                <p:nvPr/>
+              </p:nvCxnSpPr>
+              <p:spPr>
+                <a:xfrm flipV="1">
+                  <a:off x="1979881" y="4779358"/>
+                  <a:ext cx="907125" cy="934195"/>
+                </a:xfrm>
+                <a:prstGeom prst="line">
+                  <a:avLst/>
+                </a:prstGeom>
+                <a:effectLst>
+                  <a:outerShdw dist="20000" sx="1000" sy="1000" rotWithShape="0">
+                    <a:srgbClr val="000000"/>
+                  </a:outerShdw>
+                </a:effectLst>
+              </p:spPr>
+              <p:style>
+                <a:lnRef idx="2">
+                  <a:schemeClr val="accent1"/>
+                </a:lnRef>
+                <a:fillRef idx="0">
+                  <a:schemeClr val="accent1"/>
+                </a:fillRef>
+                <a:effectRef idx="1">
+                  <a:schemeClr val="accent1"/>
+                </a:effectRef>
+                <a:fontRef idx="minor">
+                  <a:schemeClr val="tx1"/>
+                </a:fontRef>
+              </p:style>
+            </p:cxnSp>
+            <p:cxnSp>
+              <p:nvCxnSpPr>
+                <p:cNvPr id="39" name="Straight Connector 38">
+                  <a:extLst>
+                    <a:ext uri="{FF2B5EF4-FFF2-40B4-BE49-F238E27FC236}">
+                      <a16:creationId xmlns:a16="http://schemas.microsoft.com/office/drawing/2014/main" id="{3F79639A-B0F7-8A66-D580-C5B5E0F45557}"/>
+                    </a:ext>
+                  </a:extLst>
+                </p:cNvPr>
+                <p:cNvCxnSpPr>
+                  <a:cxnSpLocks/>
+                </p:cNvCxnSpPr>
+                <p:nvPr/>
+              </p:nvCxnSpPr>
+              <p:spPr>
+                <a:xfrm flipV="1">
+                  <a:off x="3190855" y="4771675"/>
+                  <a:ext cx="955098" cy="941878"/>
+                </a:xfrm>
+                <a:prstGeom prst="line">
+                  <a:avLst/>
+                </a:prstGeom>
+                <a:effectLst>
+                  <a:outerShdw dist="20000" sx="1000" sy="1000" rotWithShape="0">
+                    <a:srgbClr val="000000"/>
+                  </a:outerShdw>
+                </a:effectLst>
+              </p:spPr>
+              <p:style>
+                <a:lnRef idx="2">
+                  <a:schemeClr val="accent1"/>
+                </a:lnRef>
+                <a:fillRef idx="0">
+                  <a:schemeClr val="accent1"/>
+                </a:fillRef>
+                <a:effectRef idx="1">
+                  <a:schemeClr val="accent1"/>
+                </a:effectRef>
+                <a:fontRef idx="minor">
+                  <a:schemeClr val="tx1"/>
+                </a:fontRef>
+              </p:style>
+            </p:cxnSp>
+            <p:cxnSp>
+              <p:nvCxnSpPr>
+                <p:cNvPr id="40" name="Straight Connector 39">
+                  <a:extLst>
+                    <a:ext uri="{FF2B5EF4-FFF2-40B4-BE49-F238E27FC236}">
+                      <a16:creationId xmlns:a16="http://schemas.microsoft.com/office/drawing/2014/main" id="{FEC8BC68-7473-BA98-CA39-DDCCA12DCC3A}"/>
+                    </a:ext>
+                  </a:extLst>
+                </p:cNvPr>
+                <p:cNvCxnSpPr>
+                  <a:cxnSpLocks/>
+                </p:cNvCxnSpPr>
+                <p:nvPr/>
+              </p:nvCxnSpPr>
+              <p:spPr>
+                <a:xfrm flipV="1">
+                  <a:off x="1927754" y="3964899"/>
+                  <a:ext cx="924277" cy="934195"/>
+                </a:xfrm>
+                <a:prstGeom prst="line">
+                  <a:avLst/>
+                </a:prstGeom>
+                <a:effectLst>
+                  <a:outerShdw dist="20000" sx="1000" sy="1000" rotWithShape="0">
+                    <a:srgbClr val="000000"/>
+                  </a:outerShdw>
+                </a:effectLst>
+              </p:spPr>
+              <p:style>
+                <a:lnRef idx="2">
+                  <a:schemeClr val="accent1"/>
+                </a:lnRef>
+                <a:fillRef idx="0">
+                  <a:schemeClr val="accent1"/>
+                </a:fillRef>
+                <a:effectRef idx="1">
+                  <a:schemeClr val="accent1"/>
+                </a:effectRef>
+                <a:fontRef idx="minor">
+                  <a:schemeClr val="tx1"/>
+                </a:fontRef>
+              </p:style>
+            </p:cxnSp>
+            <p:cxnSp>
+              <p:nvCxnSpPr>
+                <p:cNvPr id="41" name="Straight Connector 40">
+                  <a:extLst>
+                    <a:ext uri="{FF2B5EF4-FFF2-40B4-BE49-F238E27FC236}">
+                      <a16:creationId xmlns:a16="http://schemas.microsoft.com/office/drawing/2014/main" id="{A62F14E6-A197-5F74-CD93-A919ECAF1D88}"/>
+                    </a:ext>
+                  </a:extLst>
+                </p:cNvPr>
+                <p:cNvCxnSpPr>
+                  <a:cxnSpLocks/>
+                </p:cNvCxnSpPr>
+                <p:nvPr/>
+              </p:nvCxnSpPr>
+              <p:spPr>
+                <a:xfrm flipV="1">
+                  <a:off x="3155880" y="3960186"/>
+                  <a:ext cx="970307" cy="953993"/>
+                </a:xfrm>
+                <a:prstGeom prst="line">
+                  <a:avLst/>
+                </a:prstGeom>
+                <a:effectLst>
+                  <a:outerShdw dist="20000" sx="1000" sy="1000" rotWithShape="0">
+                    <a:srgbClr val="000000"/>
+                  </a:outerShdw>
+                </a:effectLst>
+              </p:spPr>
+              <p:style>
+                <a:lnRef idx="2">
+                  <a:schemeClr val="accent1"/>
+                </a:lnRef>
+                <a:fillRef idx="0">
+                  <a:schemeClr val="accent1"/>
+                </a:fillRef>
+                <a:effectRef idx="1">
+                  <a:schemeClr val="accent1"/>
+                </a:effectRef>
+                <a:fontRef idx="minor">
+                  <a:schemeClr val="tx1"/>
+                </a:fontRef>
+              </p:style>
+            </p:cxnSp>
+          </p:grpSp>
+          <p:cxnSp>
+            <p:nvCxnSpPr>
+              <p:cNvPr id="32" name="Straight Connector 31">
+                <a:extLst>
+                  <a:ext uri="{FF2B5EF4-FFF2-40B4-BE49-F238E27FC236}">
+                    <a16:creationId xmlns:a16="http://schemas.microsoft.com/office/drawing/2014/main" id="{F7F888E8-DAC1-F72A-8C45-9D2EE9C8971B}"/>
+                  </a:ext>
+                </a:extLst>
+              </p:cNvPr>
+              <p:cNvCxnSpPr>
+                <a:cxnSpLocks/>
+              </p:cNvCxnSpPr>
+              <p:nvPr/>
+            </p:nvCxnSpPr>
+            <p:spPr>
+              <a:xfrm flipV="1">
+                <a:off x="1732592" y="2588426"/>
+                <a:ext cx="1251340" cy="14799"/>
               </a:xfrm>
               <a:prstGeom prst="line">
                 <a:avLst/>
@@ -34229,10 +38866,10 @@
           </p:cxnSp>
           <p:cxnSp>
             <p:nvCxnSpPr>
-              <p:cNvPr id="40" name="Straight Connector 39">
+              <p:cNvPr id="33" name="Straight Connector 32">
                 <a:extLst>
                   <a:ext uri="{FF2B5EF4-FFF2-40B4-BE49-F238E27FC236}">
-                    <a16:creationId xmlns:a16="http://schemas.microsoft.com/office/drawing/2014/main" id="{FEC8BC68-7473-BA98-CA39-DDCCA12DCC3A}"/>
+                    <a16:creationId xmlns:a16="http://schemas.microsoft.com/office/drawing/2014/main" id="{700EBFEC-9601-CB6D-3928-685E83DE7125}"/>
                   </a:ext>
                 </a:extLst>
               </p:cNvPr>
@@ -34242,9 +38879,9 @@
               <p:nvPr/>
             </p:nvCxnSpPr>
             <p:spPr>
-              <a:xfrm flipV="1">
-                <a:off x="1927754" y="3964899"/>
-                <a:ext cx="924277" cy="934195"/>
+              <a:xfrm>
+                <a:off x="2656982" y="1661345"/>
+                <a:ext cx="1274043" cy="0"/>
               </a:xfrm>
               <a:prstGeom prst="line">
                 <a:avLst/>
@@ -34272,10 +38909,10 @@
           </p:cxnSp>
           <p:cxnSp>
             <p:nvCxnSpPr>
-              <p:cNvPr id="41" name="Straight Connector 40">
+              <p:cNvPr id="34" name="Straight Connector 33">
                 <a:extLst>
                   <a:ext uri="{FF2B5EF4-FFF2-40B4-BE49-F238E27FC236}">
-                    <a16:creationId xmlns:a16="http://schemas.microsoft.com/office/drawing/2014/main" id="{A62F14E6-A197-5F74-CD93-A919ECAF1D88}"/>
+                    <a16:creationId xmlns:a16="http://schemas.microsoft.com/office/drawing/2014/main" id="{42E31EFF-113B-9039-EBF4-EF908BD003D2}"/>
                   </a:ext>
                 </a:extLst>
               </p:cNvPr>
@@ -34285,9 +38922,138 @@
               <p:nvPr/>
             </p:nvCxnSpPr>
             <p:spPr>
-              <a:xfrm flipV="1">
-                <a:off x="3155880" y="3960186"/>
-                <a:ext cx="970307" cy="953993"/>
+              <a:xfrm flipH="1" flipV="1">
+                <a:off x="2972325" y="2603225"/>
+                <a:ext cx="23368" cy="799374"/>
+              </a:xfrm>
+              <a:prstGeom prst="line">
+                <a:avLst/>
+              </a:prstGeom>
+              <a:effectLst>
+                <a:outerShdw dist="20000" sx="1000" sy="1000" rotWithShape="0">
+                  <a:srgbClr val="000000"/>
+                </a:outerShdw>
+              </a:effectLst>
+            </p:spPr>
+            <p:style>
+              <a:lnRef idx="2">
+                <a:schemeClr val="accent1"/>
+              </a:lnRef>
+              <a:fillRef idx="0">
+                <a:schemeClr val="accent1"/>
+              </a:fillRef>
+              <a:effectRef idx="1">
+                <a:schemeClr val="accent1"/>
+              </a:effectRef>
+              <a:fontRef idx="minor">
+                <a:schemeClr val="tx1"/>
+              </a:fontRef>
+            </p:style>
+          </p:cxnSp>
+          <p:cxnSp>
+            <p:nvCxnSpPr>
+              <p:cNvPr id="35" name="Straight Connector 34">
+                <a:extLst>
+                  <a:ext uri="{FF2B5EF4-FFF2-40B4-BE49-F238E27FC236}">
+                    <a16:creationId xmlns:a16="http://schemas.microsoft.com/office/drawing/2014/main" id="{C7E210A5-FE31-CC4C-AA29-41273D813DC2}"/>
+                  </a:ext>
+                </a:extLst>
+              </p:cNvPr>
+              <p:cNvCxnSpPr>
+                <a:cxnSpLocks/>
+              </p:cNvCxnSpPr>
+              <p:nvPr/>
+            </p:nvCxnSpPr>
+            <p:spPr>
+              <a:xfrm flipH="1" flipV="1">
+                <a:off x="3931025" y="1653945"/>
+                <a:ext cx="19766" cy="806776"/>
+              </a:xfrm>
+              <a:prstGeom prst="line">
+                <a:avLst/>
+              </a:prstGeom>
+              <a:effectLst>
+                <a:outerShdw dist="20000" sx="1000" sy="1000" rotWithShape="0">
+                  <a:srgbClr val="000000"/>
+                </a:outerShdw>
+              </a:effectLst>
+            </p:spPr>
+            <p:style>
+              <a:lnRef idx="2">
+                <a:schemeClr val="accent1"/>
+              </a:lnRef>
+              <a:fillRef idx="0">
+                <a:schemeClr val="accent1"/>
+              </a:fillRef>
+              <a:effectRef idx="1">
+                <a:schemeClr val="accent1"/>
+              </a:effectRef>
+              <a:fontRef idx="minor">
+                <a:schemeClr val="tx1"/>
+              </a:fontRef>
+            </p:style>
+          </p:cxnSp>
+          <p:cxnSp>
+            <p:nvCxnSpPr>
+              <p:cNvPr id="36" name="Straight Connector 35">
+                <a:extLst>
+                  <a:ext uri="{FF2B5EF4-FFF2-40B4-BE49-F238E27FC236}">
+                    <a16:creationId xmlns:a16="http://schemas.microsoft.com/office/drawing/2014/main" id="{C2988CF9-8D27-479E-ACDF-2A3FB53D6617}"/>
+                  </a:ext>
+                </a:extLst>
+              </p:cNvPr>
+              <p:cNvCxnSpPr>
+                <a:cxnSpLocks/>
+              </p:cNvCxnSpPr>
+              <p:nvPr/>
+            </p:nvCxnSpPr>
+            <p:spPr>
+              <a:xfrm flipH="1" flipV="1">
+                <a:off x="1738137" y="2590735"/>
+                <a:ext cx="46582" cy="799374"/>
+              </a:xfrm>
+              <a:prstGeom prst="line">
+                <a:avLst/>
+              </a:prstGeom>
+              <a:effectLst>
+                <a:outerShdw dist="20000" sx="1000" sy="1000" rotWithShape="0">
+                  <a:srgbClr val="000000"/>
+                </a:outerShdw>
+              </a:effectLst>
+            </p:spPr>
+            <p:style>
+              <a:lnRef idx="2">
+                <a:schemeClr val="accent1"/>
+              </a:lnRef>
+              <a:fillRef idx="0">
+                <a:schemeClr val="accent1"/>
+              </a:fillRef>
+              <a:effectRef idx="1">
+                <a:schemeClr val="accent1"/>
+              </a:effectRef>
+              <a:fontRef idx="minor">
+                <a:schemeClr val="tx1"/>
+              </a:fontRef>
+            </p:style>
+          </p:cxnSp>
+          <p:cxnSp>
+            <p:nvCxnSpPr>
+              <p:cNvPr id="37" name="Straight Connector 36">
+                <a:extLst>
+                  <a:ext uri="{FF2B5EF4-FFF2-40B4-BE49-F238E27FC236}">
+                    <a16:creationId xmlns:a16="http://schemas.microsoft.com/office/drawing/2014/main" id="{E7A96053-57D2-8033-EBA2-6ED63DA5F4CE}"/>
+                  </a:ext>
+                </a:extLst>
+              </p:cNvPr>
+              <p:cNvCxnSpPr>
+                <a:cxnSpLocks/>
+              </p:cNvCxnSpPr>
+              <p:nvPr/>
+            </p:nvCxnSpPr>
+            <p:spPr>
+              <a:xfrm flipH="1" flipV="1">
+                <a:off x="2656869" y="1649232"/>
+                <a:ext cx="34975" cy="826572"/>
               </a:xfrm>
               <a:prstGeom prst="line">
                 <a:avLst/>
@@ -34314,450 +39080,192 @@
             </p:style>
           </p:cxnSp>
         </p:grpSp>
-        <p:cxnSp>
-          <p:nvCxnSpPr>
-            <p:cNvPr id="32" name="Straight Connector 31">
+        <p:sp>
+          <p:nvSpPr>
+            <p:cNvPr id="19" name="TextBox 18">
               <a:extLst>
                 <a:ext uri="{FF2B5EF4-FFF2-40B4-BE49-F238E27FC236}">
-                  <a16:creationId xmlns:a16="http://schemas.microsoft.com/office/drawing/2014/main" id="{F7F888E8-DAC1-F72A-8C45-9D2EE9C8971B}"/>
+                  <a16:creationId xmlns:a16="http://schemas.microsoft.com/office/drawing/2014/main" id="{D097BC90-65D9-988C-E722-A39B13DC19B4}"/>
                 </a:ext>
               </a:extLst>
             </p:cNvPr>
-            <p:cNvCxnSpPr>
-              <a:cxnSpLocks/>
-            </p:cNvCxnSpPr>
+            <p:cNvSpPr txBox="1"/>
             <p:nvPr/>
-          </p:nvCxnSpPr>
+          </p:nvSpPr>
           <p:spPr>
-            <a:xfrm flipV="1">
-              <a:off x="1732592" y="2588426"/>
-              <a:ext cx="1251340" cy="14799"/>
+            <a:xfrm>
+              <a:off x="1785057" y="3629867"/>
+              <a:ext cx="1292341" cy="338554"/>
             </a:xfrm>
-            <a:prstGeom prst="line">
+            <a:prstGeom prst="rect">
               <a:avLst/>
             </a:prstGeom>
-            <a:effectLst>
-              <a:outerShdw dist="20000" sx="1000" sy="1000" rotWithShape="0">
-                <a:srgbClr val="000000"/>
-              </a:outerShdw>
-            </a:effectLst>
+            <a:solidFill>
+              <a:schemeClr val="bg1"/>
+            </a:solidFill>
           </p:spPr>
-          <p:style>
-            <a:lnRef idx="2">
-              <a:schemeClr val="accent1"/>
-            </a:lnRef>
-            <a:fillRef idx="0">
-              <a:schemeClr val="accent1"/>
-            </a:fillRef>
-            <a:effectRef idx="1">
-              <a:schemeClr val="accent1"/>
-            </a:effectRef>
-            <a:fontRef idx="minor">
-              <a:schemeClr val="tx1"/>
-            </a:fontRef>
-          </p:style>
-        </p:cxnSp>
-        <p:cxnSp>
-          <p:nvCxnSpPr>
-            <p:cNvPr id="33" name="Straight Connector 32">
+          <p:txBody>
+            <a:bodyPr wrap="none" rtlCol="0">
+              <a:spAutoFit/>
+            </a:bodyPr>
+            <a:lstStyle/>
+            <a:p>
+              <a:r>
+                <a:rPr lang="en-US" sz="1600" dirty="0"/>
+                <a:t>temperature</a:t>
+              </a:r>
+            </a:p>
+          </p:txBody>
+        </p:sp>
+        <p:sp>
+          <p:nvSpPr>
+            <p:cNvPr id="20" name="TextBox 19">
               <a:extLst>
                 <a:ext uri="{FF2B5EF4-FFF2-40B4-BE49-F238E27FC236}">
-                  <a16:creationId xmlns:a16="http://schemas.microsoft.com/office/drawing/2014/main" id="{700EBFEC-9601-CB6D-3928-685E83DE7125}"/>
+                  <a16:creationId xmlns:a16="http://schemas.microsoft.com/office/drawing/2014/main" id="{94C0CB87-3E91-1035-120F-798D683145DE}"/>
                 </a:ext>
               </a:extLst>
             </p:cNvPr>
-            <p:cNvCxnSpPr>
-              <a:cxnSpLocks/>
-            </p:cNvCxnSpPr>
+            <p:cNvSpPr txBox="1"/>
             <p:nvPr/>
-          </p:nvCxnSpPr>
+          </p:nvSpPr>
           <p:spPr>
-            <a:xfrm>
-              <a:off x="2656982" y="1661345"/>
-              <a:ext cx="1274043" cy="0"/>
+            <a:xfrm rot="16200000">
+              <a:off x="880794" y="2808223"/>
+              <a:ext cx="880369" cy="338554"/>
             </a:xfrm>
-            <a:prstGeom prst="line">
+            <a:prstGeom prst="rect">
               <a:avLst/>
             </a:prstGeom>
-            <a:effectLst>
-              <a:outerShdw dist="20000" sx="1000" sy="1000" rotWithShape="0">
-                <a:srgbClr val="000000"/>
-              </a:outerShdw>
-            </a:effectLst>
+            <a:solidFill>
+              <a:schemeClr val="bg1"/>
+            </a:solidFill>
           </p:spPr>
-          <p:style>
-            <a:lnRef idx="2">
-              <a:schemeClr val="accent1"/>
-            </a:lnRef>
-            <a:fillRef idx="0">
-              <a:schemeClr val="accent1"/>
-            </a:fillRef>
-            <a:effectRef idx="1">
-              <a:schemeClr val="accent1"/>
-            </a:effectRef>
-            <a:fontRef idx="minor">
-              <a:schemeClr val="tx1"/>
-            </a:fontRef>
-          </p:style>
-        </p:cxnSp>
-        <p:cxnSp>
-          <p:nvCxnSpPr>
-            <p:cNvPr id="34" name="Straight Connector 33">
+          <p:txBody>
+            <a:bodyPr wrap="none" rtlCol="0">
+              <a:spAutoFit/>
+            </a:bodyPr>
+            <a:lstStyle/>
+            <a:p>
+              <a:r>
+                <a:rPr lang="en-US" sz="1600" dirty="0"/>
+                <a:t>catalyst</a:t>
+              </a:r>
+            </a:p>
+          </p:txBody>
+        </p:sp>
+        <p:sp>
+          <p:nvSpPr>
+            <p:cNvPr id="21" name="TextBox 20">
               <a:extLst>
                 <a:ext uri="{FF2B5EF4-FFF2-40B4-BE49-F238E27FC236}">
-                  <a16:creationId xmlns:a16="http://schemas.microsoft.com/office/drawing/2014/main" id="{42E31EFF-113B-9039-EBF4-EF908BD003D2}"/>
+                  <a16:creationId xmlns:a16="http://schemas.microsoft.com/office/drawing/2014/main" id="{6554A9C4-FB56-8FC8-D8CD-078E12C091EF}"/>
                 </a:ext>
               </a:extLst>
             </p:cNvPr>
-            <p:cNvCxnSpPr>
-              <a:cxnSpLocks/>
-            </p:cNvCxnSpPr>
+            <p:cNvSpPr txBox="1"/>
             <p:nvPr/>
-          </p:nvCxnSpPr>
+          </p:nvSpPr>
           <p:spPr>
-            <a:xfrm flipH="1" flipV="1">
-              <a:off x="2972325" y="2603225"/>
-              <a:ext cx="23368" cy="799374"/>
+            <a:xfrm>
+              <a:off x="1427164" y="2573239"/>
+              <a:ext cx="269626" cy="276999"/>
             </a:xfrm>
-            <a:prstGeom prst="line">
+            <a:prstGeom prst="rect">
               <a:avLst/>
             </a:prstGeom>
-            <a:effectLst>
-              <a:outerShdw dist="20000" sx="1000" sy="1000" rotWithShape="0">
-                <a:srgbClr val="000000"/>
-              </a:outerShdw>
-            </a:effectLst>
+            <a:solidFill>
+              <a:schemeClr val="bg1"/>
+            </a:solidFill>
           </p:spPr>
-          <p:style>
-            <a:lnRef idx="2">
-              <a:schemeClr val="accent1"/>
-            </a:lnRef>
-            <a:fillRef idx="0">
-              <a:schemeClr val="accent1"/>
-            </a:fillRef>
-            <a:effectRef idx="1">
-              <a:schemeClr val="accent1"/>
-            </a:effectRef>
-            <a:fontRef idx="minor">
-              <a:schemeClr val="tx1"/>
-            </a:fontRef>
-          </p:style>
-        </p:cxnSp>
-        <p:cxnSp>
-          <p:nvCxnSpPr>
-            <p:cNvPr id="35" name="Straight Connector 34">
+          <p:txBody>
+            <a:bodyPr wrap="none" rtlCol="0">
+              <a:spAutoFit/>
+            </a:bodyPr>
+            <a:lstStyle/>
+            <a:p>
+              <a:r>
+                <a:rPr lang="en-US" sz="1200" dirty="0"/>
+                <a:t>2</a:t>
+              </a:r>
+            </a:p>
+          </p:txBody>
+        </p:sp>
+        <p:sp>
+          <p:nvSpPr>
+            <p:cNvPr id="22" name="TextBox 21">
               <a:extLst>
                 <a:ext uri="{FF2B5EF4-FFF2-40B4-BE49-F238E27FC236}">
-                  <a16:creationId xmlns:a16="http://schemas.microsoft.com/office/drawing/2014/main" id="{C7E210A5-FE31-CC4C-AA29-41273D813DC2}"/>
+                  <a16:creationId xmlns:a16="http://schemas.microsoft.com/office/drawing/2014/main" id="{BAE81342-02B1-FDAA-BD37-CAD846E5C575}"/>
                 </a:ext>
               </a:extLst>
             </p:cNvPr>
-            <p:cNvCxnSpPr>
-              <a:cxnSpLocks/>
-            </p:cNvCxnSpPr>
+            <p:cNvSpPr txBox="1"/>
             <p:nvPr/>
-          </p:nvCxnSpPr>
+          </p:nvSpPr>
           <p:spPr>
-            <a:xfrm flipH="1" flipV="1">
-              <a:off x="3931025" y="1653945"/>
-              <a:ext cx="19766" cy="806776"/>
+            <a:xfrm>
+              <a:off x="1471785" y="3150029"/>
+              <a:ext cx="269626" cy="276999"/>
             </a:xfrm>
-            <a:prstGeom prst="line">
+            <a:prstGeom prst="rect">
               <a:avLst/>
             </a:prstGeom>
-            <a:effectLst>
-              <a:outerShdw dist="20000" sx="1000" sy="1000" rotWithShape="0">
-                <a:srgbClr val="000000"/>
-              </a:outerShdw>
-            </a:effectLst>
+            <a:solidFill>
+              <a:schemeClr val="bg1"/>
+            </a:solidFill>
           </p:spPr>
-          <p:style>
-            <a:lnRef idx="2">
-              <a:schemeClr val="accent1"/>
-            </a:lnRef>
-            <a:fillRef idx="0">
-              <a:schemeClr val="accent1"/>
-            </a:fillRef>
-            <a:effectRef idx="1">
-              <a:schemeClr val="accent1"/>
-            </a:effectRef>
-            <a:fontRef idx="minor">
-              <a:schemeClr val="tx1"/>
-            </a:fontRef>
-          </p:style>
-        </p:cxnSp>
-        <p:cxnSp>
-          <p:nvCxnSpPr>
-            <p:cNvPr id="36" name="Straight Connector 35">
+          <p:txBody>
+            <a:bodyPr wrap="none" rtlCol="0">
+              <a:spAutoFit/>
+            </a:bodyPr>
+            <a:lstStyle/>
+            <a:p>
+              <a:r>
+                <a:rPr lang="en-US" sz="1200" dirty="0"/>
+                <a:t>4</a:t>
+              </a:r>
+            </a:p>
+          </p:txBody>
+        </p:sp>
+        <p:sp>
+          <p:nvSpPr>
+            <p:cNvPr id="23" name="TextBox 22">
               <a:extLst>
                 <a:ext uri="{FF2B5EF4-FFF2-40B4-BE49-F238E27FC236}">
-                  <a16:creationId xmlns:a16="http://schemas.microsoft.com/office/drawing/2014/main" id="{C2988CF9-8D27-479E-ACDF-2A3FB53D6617}"/>
+                  <a16:creationId xmlns:a16="http://schemas.microsoft.com/office/drawing/2014/main" id="{E4D9837B-4419-0570-1CD3-C5E9624C8619}"/>
                 </a:ext>
               </a:extLst>
             </p:cNvPr>
-            <p:cNvCxnSpPr>
-              <a:cxnSpLocks/>
-            </p:cNvCxnSpPr>
+            <p:cNvSpPr txBox="1"/>
             <p:nvPr/>
-          </p:nvCxnSpPr>
+          </p:nvSpPr>
           <p:spPr>
-            <a:xfrm flipH="1" flipV="1">
-              <a:off x="1738137" y="2590735"/>
-              <a:ext cx="46582" cy="799374"/>
+            <a:xfrm>
+              <a:off x="1636092" y="3443735"/>
+              <a:ext cx="439544" cy="276999"/>
             </a:xfrm>
-            <a:prstGeom prst="line">
+            <a:prstGeom prst="rect">
               <a:avLst/>
             </a:prstGeom>
-            <a:effectLst>
-              <a:outerShdw dist="20000" sx="1000" sy="1000" rotWithShape="0">
-                <a:srgbClr val="000000"/>
-              </a:outerShdw>
-            </a:effectLst>
+            <a:solidFill>
+              <a:schemeClr val="bg1"/>
+            </a:solidFill>
           </p:spPr>
-          <p:style>
-            <a:lnRef idx="2">
-              <a:schemeClr val="accent1"/>
-            </a:lnRef>
-            <a:fillRef idx="0">
-              <a:schemeClr val="accent1"/>
-            </a:fillRef>
-            <a:effectRef idx="1">
-              <a:schemeClr val="accent1"/>
-            </a:effectRef>
-            <a:fontRef idx="minor">
-              <a:schemeClr val="tx1"/>
-            </a:fontRef>
-          </p:style>
-        </p:cxnSp>
-        <p:cxnSp>
-          <p:nvCxnSpPr>
-            <p:cNvPr id="37" name="Straight Connector 36">
-              <a:extLst>
-                <a:ext uri="{FF2B5EF4-FFF2-40B4-BE49-F238E27FC236}">
-                  <a16:creationId xmlns:a16="http://schemas.microsoft.com/office/drawing/2014/main" id="{E7A96053-57D2-8033-EBA2-6ED63DA5F4CE}"/>
-                </a:ext>
-              </a:extLst>
-            </p:cNvPr>
-            <p:cNvCxnSpPr>
-              <a:cxnSpLocks/>
-            </p:cNvCxnSpPr>
-            <p:nvPr/>
-          </p:nvCxnSpPr>
-          <p:spPr>
-            <a:xfrm flipH="1" flipV="1">
-              <a:off x="2656869" y="1649232"/>
-              <a:ext cx="34975" cy="826572"/>
-            </a:xfrm>
-            <a:prstGeom prst="line">
-              <a:avLst/>
-            </a:prstGeom>
-            <a:effectLst>
-              <a:outerShdw dist="20000" sx="1000" sy="1000" rotWithShape="0">
-                <a:srgbClr val="000000"/>
-              </a:outerShdw>
-            </a:effectLst>
-          </p:spPr>
-          <p:style>
-            <a:lnRef idx="2">
-              <a:schemeClr val="accent1"/>
-            </a:lnRef>
-            <a:fillRef idx="0">
-              <a:schemeClr val="accent1"/>
-            </a:fillRef>
-            <a:effectRef idx="1">
-              <a:schemeClr val="accent1"/>
-            </a:effectRef>
-            <a:fontRef idx="minor">
-              <a:schemeClr val="tx1"/>
-            </a:fontRef>
-          </p:style>
-        </p:cxnSp>
+          <p:txBody>
+            <a:bodyPr wrap="none" rtlCol="0">
+              <a:spAutoFit/>
+            </a:bodyPr>
+            <a:lstStyle/>
+            <a:p>
+              <a:r>
+                <a:rPr lang="en-US" sz="1200" dirty="0"/>
+                <a:t>100</a:t>
+              </a:r>
+            </a:p>
+          </p:txBody>
+        </p:sp>
       </p:grpSp>
-      <p:sp>
-        <p:nvSpPr>
-          <p:cNvPr id="19" name="TextBox 18">
-            <a:extLst>
-              <a:ext uri="{FF2B5EF4-FFF2-40B4-BE49-F238E27FC236}">
-                <a16:creationId xmlns:a16="http://schemas.microsoft.com/office/drawing/2014/main" id="{D097BC90-65D9-988C-E722-A39B13DC19B4}"/>
-              </a:ext>
-            </a:extLst>
-          </p:cNvPr>
-          <p:cNvSpPr txBox="1"/>
-          <p:nvPr/>
-        </p:nvSpPr>
-        <p:spPr>
-          <a:xfrm>
-            <a:off x="1785057" y="3629867"/>
-            <a:ext cx="1292341" cy="338554"/>
-          </a:xfrm>
-          <a:prstGeom prst="rect">
-            <a:avLst/>
-          </a:prstGeom>
-          <a:solidFill>
-            <a:schemeClr val="bg1"/>
-          </a:solidFill>
-        </p:spPr>
-        <p:txBody>
-          <a:bodyPr wrap="none" rtlCol="0">
-            <a:spAutoFit/>
-          </a:bodyPr>
-          <a:lstStyle/>
-          <a:p>
-            <a:r>
-              <a:rPr lang="en-US" sz="1600" dirty="0"/>
-              <a:t>temperature</a:t>
-            </a:r>
-          </a:p>
-        </p:txBody>
-      </p:sp>
-      <p:sp>
-        <p:nvSpPr>
-          <p:cNvPr id="20" name="TextBox 19">
-            <a:extLst>
-              <a:ext uri="{FF2B5EF4-FFF2-40B4-BE49-F238E27FC236}">
-                <a16:creationId xmlns:a16="http://schemas.microsoft.com/office/drawing/2014/main" id="{94C0CB87-3E91-1035-120F-798D683145DE}"/>
-              </a:ext>
-            </a:extLst>
-          </p:cNvPr>
-          <p:cNvSpPr txBox="1"/>
-          <p:nvPr/>
-        </p:nvSpPr>
-        <p:spPr>
-          <a:xfrm rot="16200000">
-            <a:off x="880794" y="2808223"/>
-            <a:ext cx="880369" cy="338554"/>
-          </a:xfrm>
-          <a:prstGeom prst="rect">
-            <a:avLst/>
-          </a:prstGeom>
-          <a:solidFill>
-            <a:schemeClr val="bg1"/>
-          </a:solidFill>
-        </p:spPr>
-        <p:txBody>
-          <a:bodyPr wrap="none" rtlCol="0">
-            <a:spAutoFit/>
-          </a:bodyPr>
-          <a:lstStyle/>
-          <a:p>
-            <a:r>
-              <a:rPr lang="en-US" sz="1600" dirty="0"/>
-              <a:t>catalyst</a:t>
-            </a:r>
-          </a:p>
-        </p:txBody>
-      </p:sp>
-      <p:sp>
-        <p:nvSpPr>
-          <p:cNvPr id="21" name="TextBox 20">
-            <a:extLst>
-              <a:ext uri="{FF2B5EF4-FFF2-40B4-BE49-F238E27FC236}">
-                <a16:creationId xmlns:a16="http://schemas.microsoft.com/office/drawing/2014/main" id="{6554A9C4-FB56-8FC8-D8CD-078E12C091EF}"/>
-              </a:ext>
-            </a:extLst>
-          </p:cNvPr>
-          <p:cNvSpPr txBox="1"/>
-          <p:nvPr/>
-        </p:nvSpPr>
-        <p:spPr>
-          <a:xfrm>
-            <a:off x="1427164" y="2573239"/>
-            <a:ext cx="269626" cy="276999"/>
-          </a:xfrm>
-          <a:prstGeom prst="rect">
-            <a:avLst/>
-          </a:prstGeom>
-          <a:solidFill>
-            <a:schemeClr val="bg1"/>
-          </a:solidFill>
-        </p:spPr>
-        <p:txBody>
-          <a:bodyPr wrap="none" rtlCol="0">
-            <a:spAutoFit/>
-          </a:bodyPr>
-          <a:lstStyle/>
-          <a:p>
-            <a:r>
-              <a:rPr lang="en-US" sz="1200" dirty="0"/>
-              <a:t>2</a:t>
-            </a:r>
-          </a:p>
-        </p:txBody>
-      </p:sp>
-      <p:sp>
-        <p:nvSpPr>
-          <p:cNvPr id="22" name="TextBox 21">
-            <a:extLst>
-              <a:ext uri="{FF2B5EF4-FFF2-40B4-BE49-F238E27FC236}">
-                <a16:creationId xmlns:a16="http://schemas.microsoft.com/office/drawing/2014/main" id="{BAE81342-02B1-FDAA-BD37-CAD846E5C575}"/>
-              </a:ext>
-            </a:extLst>
-          </p:cNvPr>
-          <p:cNvSpPr txBox="1"/>
-          <p:nvPr/>
-        </p:nvSpPr>
-        <p:spPr>
-          <a:xfrm>
-            <a:off x="1471785" y="3150029"/>
-            <a:ext cx="269626" cy="276999"/>
-          </a:xfrm>
-          <a:prstGeom prst="rect">
-            <a:avLst/>
-          </a:prstGeom>
-          <a:solidFill>
-            <a:schemeClr val="bg1"/>
-          </a:solidFill>
-        </p:spPr>
-        <p:txBody>
-          <a:bodyPr wrap="none" rtlCol="0">
-            <a:spAutoFit/>
-          </a:bodyPr>
-          <a:lstStyle/>
-          <a:p>
-            <a:r>
-              <a:rPr lang="en-US" sz="1200" dirty="0"/>
-              <a:t>4</a:t>
-            </a:r>
-          </a:p>
-        </p:txBody>
-      </p:sp>
-      <p:sp>
-        <p:nvSpPr>
-          <p:cNvPr id="23" name="TextBox 22">
-            <a:extLst>
-              <a:ext uri="{FF2B5EF4-FFF2-40B4-BE49-F238E27FC236}">
-                <a16:creationId xmlns:a16="http://schemas.microsoft.com/office/drawing/2014/main" id="{E4D9837B-4419-0570-1CD3-C5E9624C8619}"/>
-              </a:ext>
-            </a:extLst>
-          </p:cNvPr>
-          <p:cNvSpPr txBox="1"/>
-          <p:nvPr/>
-        </p:nvSpPr>
-        <p:spPr>
-          <a:xfrm>
-            <a:off x="1636092" y="3443735"/>
-            <a:ext cx="439544" cy="276999"/>
-          </a:xfrm>
-          <a:prstGeom prst="rect">
-            <a:avLst/>
-          </a:prstGeom>
-          <a:solidFill>
-            <a:schemeClr val="bg1"/>
-          </a:solidFill>
-        </p:spPr>
-        <p:txBody>
-          <a:bodyPr wrap="none" rtlCol="0">
-            <a:spAutoFit/>
-          </a:bodyPr>
-          <a:lstStyle/>
-          <a:p>
-            <a:r>
-              <a:rPr lang="en-US" sz="1200" dirty="0"/>
-              <a:t>100</a:t>
-            </a:r>
-          </a:p>
-        </p:txBody>
-      </p:sp>
     </p:spTree>
     <p:extLst>
       <p:ext uri="{BB962C8B-B14F-4D97-AF65-F5344CB8AC3E}">
@@ -34789,7 +39297,7 @@
                             </p:stCondLst>
                             <p:childTnLst>
                               <p:par>
-                                <p:cTn id="5" presetID="1" presetClass="entr" presetSubtype="0" fill="hold" grpId="0" nodeType="clickEffect">
+                                <p:cTn id="5" presetID="1" presetClass="entr" presetSubtype="0" fill="hold" nodeType="clickEffect">
                                   <p:stCondLst>
                                     <p:cond delay="0"/>
                                   </p:stCondLst>
@@ -34797,6 +39305,51 @@
                                     <p:set>
                                       <p:cBhvr>
                                         <p:cTn id="6" dur="1" fill="hold">
+                                          <p:stCondLst>
+                                            <p:cond delay="0"/>
+                                          </p:stCondLst>
+                                        </p:cTn>
+                                        <p:tgtEl>
+                                          <p:spTgt spid="5"/>
+                                        </p:tgtEl>
+                                        <p:attrNameLst>
+                                          <p:attrName>style.visibility</p:attrName>
+                                        </p:attrNameLst>
+                                      </p:cBhvr>
+                                      <p:to>
+                                        <p:strVal val="visible"/>
+                                      </p:to>
+                                    </p:set>
+                                  </p:childTnLst>
+                                </p:cTn>
+                              </p:par>
+                            </p:childTnLst>
+                          </p:cTn>
+                        </p:par>
+                      </p:childTnLst>
+                    </p:cTn>
+                  </p:par>
+                  <p:par>
+                    <p:cTn id="7" fill="hold">
+                      <p:stCondLst>
+                        <p:cond delay="indefinite"/>
+                      </p:stCondLst>
+                      <p:childTnLst>
+                        <p:par>
+                          <p:cTn id="8" fill="hold">
+                            <p:stCondLst>
+                              <p:cond delay="0"/>
+                            </p:stCondLst>
+                            <p:childTnLst>
+                              <p:par>
+                                <p:cTn id="9" presetID="1" presetClass="entr" presetSubtype="0" fill="hold" grpId="0" nodeType="clickEffect">
+                                  <p:stCondLst>
+                                    <p:cond delay="0"/>
+                                  </p:stCondLst>
+                                  <p:childTnLst>
+                                    <p:set>
+                                      <p:cBhvr>
+                                        <p:cTn id="10" dur="1" fill="hold">
                                           <p:stCondLst>
                                             <p:cond delay="0"/>
                                           </p:stCondLst>
@@ -34816,14 +39369,14 @@
                                 </p:cTn>
                               </p:par>
                               <p:par>
-                                <p:cTn id="7" presetID="1" presetClass="entr" presetSubtype="0" fill="hold" nodeType="withEffect">
+                                <p:cTn id="11" presetID="1" presetClass="entr" presetSubtype="0" fill="hold" nodeType="withEffect">
                                   <p:stCondLst>
                                     <p:cond delay="0"/>
                                   </p:stCondLst>
                                   <p:childTnLst>
                                     <p:set>
                                       <p:cBhvr>
-                                        <p:cTn id="8" dur="1" fill="hold">
+                                        <p:cTn id="12" dur="1" fill="hold">
                                           <p:stCondLst>
                                             <p:cond delay="0"/>
                                           </p:stCondLst>
@@ -34849,26 +39402,26 @@
                     </p:cTn>
                   </p:par>
                   <p:par>
-                    <p:cTn id="9" fill="hold">
+                    <p:cTn id="13" fill="hold">
                       <p:stCondLst>
                         <p:cond delay="indefinite"/>
                       </p:stCondLst>
                       <p:childTnLst>
                         <p:par>
-                          <p:cTn id="10" fill="hold">
+                          <p:cTn id="14" fill="hold">
                             <p:stCondLst>
                               <p:cond delay="0"/>
                             </p:stCondLst>
                             <p:childTnLst>
                               <p:par>
-                                <p:cTn id="11" presetID="1" presetClass="entr" presetSubtype="0" fill="hold" grpId="0" nodeType="clickEffect">
+                                <p:cTn id="15" presetID="1" presetClass="entr" presetSubtype="0" fill="hold" grpId="0" nodeType="clickEffect">
                                   <p:stCondLst>
                                     <p:cond delay="0"/>
                                   </p:stCondLst>
                                   <p:childTnLst>
                                     <p:set>
                                       <p:cBhvr>
-                                        <p:cTn id="12" dur="1" fill="hold">
+                                        <p:cTn id="16" dur="1" fill="hold">
                                           <p:stCondLst>
                                             <p:cond delay="0"/>
                                           </p:stCondLst>
